--- a/internal_doc/03.开发设计/ACID/数据文件设计/数据文件设计讨论会20190109.pptx
+++ b/internal_doc/03.开发设计/ACID/数据文件设计/数据文件设计讨论会20190109.pptx
@@ -5,7 +5,7 @@
     <p:sldMasterId id="2147483648" r:id="rId1"/>
   </p:sldMasterIdLst>
   <p:notesMasterIdLst>
-    <p:notesMasterId r:id="rId18"/>
+    <p:notesMasterId r:id="rId19"/>
   </p:notesMasterIdLst>
   <p:sldIdLst>
     <p:sldId id="256" r:id="rId2"/>
@@ -19,11 +19,12 @@
     <p:sldId id="274" r:id="rId10"/>
     <p:sldId id="270" r:id="rId11"/>
     <p:sldId id="265" r:id="rId12"/>
-    <p:sldId id="275" r:id="rId13"/>
-    <p:sldId id="273" r:id="rId14"/>
-    <p:sldId id="278" r:id="rId15"/>
-    <p:sldId id="268" r:id="rId16"/>
-    <p:sldId id="260" r:id="rId17"/>
+    <p:sldId id="279" r:id="rId13"/>
+    <p:sldId id="275" r:id="rId14"/>
+    <p:sldId id="273" r:id="rId15"/>
+    <p:sldId id="278" r:id="rId16"/>
+    <p:sldId id="268" r:id="rId17"/>
+    <p:sldId id="260" r:id="rId18"/>
   </p:sldIdLst>
   <p:sldSz cx="12192000" cy="6858000"/>
   <p:notesSz cx="6858000" cy="9144000"/>
@@ -132,7 +133,7 @@
 
 <file path=ppt/commentAuthors.xml><?xml version="1.0" encoding="utf-8"?>
 <p:cmAuthorLst xmlns:a="http://schemas.openxmlformats.org/drawingml/2006/main" xmlns:r="http://schemas.openxmlformats.org/officeDocument/2006/relationships" xmlns:p="http://schemas.openxmlformats.org/presentationml/2006/main">
-  <p:cmAuthor id="1" name="linyoubin" initials="l" lastIdx="7" clrIdx="0">
+  <p:cmAuthor id="1" name="linyoubin" initials="l" lastIdx="12" clrIdx="0">
     <p:extLst>
       <p:ext uri="{19B8F6BF-5375-455C-9EA6-DF929625EA0E}">
         <p15:presenceInfo xmlns:p15="http://schemas.microsoft.com/office/powerpoint/2012/main" userId="linyoubin" providerId="None"/>
@@ -158,18 +159,9 @@
 
 <file path=ppt/comments/comment2.xml><?xml version="1.0" encoding="utf-8"?>
 <p:cmLst xmlns:a="http://schemas.openxmlformats.org/drawingml/2006/main" xmlns:r="http://schemas.openxmlformats.org/officeDocument/2006/relationships" xmlns:p="http://schemas.openxmlformats.org/presentationml/2006/main">
-  <p:cm authorId="1" dt="2019-01-09T21:57:35.874" idx="3">
-    <p:pos x="4157" y="2986"/>
-    <p:text>可以省略 page num字段</p:text>
-    <p:extLst>
-      <p:ext uri="{C676402C-5697-4E1C-873F-D02D1690AC5C}">
-        <p15:threadingInfo xmlns:p15="http://schemas.microsoft.com/office/powerpoint/2012/main" timeZoneBias="-480"/>
-      </p:ext>
-    </p:extLst>
-  </p:cm>
-  <p:cm authorId="1" dt="2019-01-09T22:04:10.724" idx="4">
-    <p:pos x="4378" y="2467"/>
-    <p:text>type与EYE_CATCHER合并</p:text>
+  <p:cm authorId="1" dt="2019-01-11T08:51:55.521" idx="8">
+    <p:pos x="2363" y="457"/>
+    <p:text>补充delete空间回收算法。补充logic extentid的重分配算法</p:text>
     <p:extLst>
       <p:ext uri="{C676402C-5697-4E1C-873F-D02D1690AC5C}">
         <p15:threadingInfo xmlns:p15="http://schemas.microsoft.com/office/powerpoint/2012/main" timeZoneBias="-480"/>
@@ -181,18 +173,9 @@
 
 <file path=ppt/comments/comment3.xml><?xml version="1.0" encoding="utf-8"?>
 <p:cmLst xmlns:a="http://schemas.openxmlformats.org/drawingml/2006/main" xmlns:r="http://schemas.openxmlformats.org/officeDocument/2006/relationships" xmlns:p="http://schemas.openxmlformats.org/presentationml/2006/main">
-  <p:cm authorId="1" dt="2019-01-09T22:16:30.701" idx="5">
-    <p:pos x="4469" y="1546"/>
-    <p:text>考虑是否有使用场景？</p:text>
-    <p:extLst>
-      <p:ext uri="{C676402C-5697-4E1C-873F-D02D1690AC5C}">
-        <p15:threadingInfo xmlns:p15="http://schemas.microsoft.com/office/powerpoint/2012/main" timeZoneBias="-480"/>
-      </p:ext>
-    </p:extLst>
-  </p:cm>
-  <p:cm authorId="1" dt="2019-01-09T22:16:44.974" idx="6">
-    <p:pos x="3288" y="1910"/>
-    <p:text>record count两字节</p:text>
+  <p:cm authorId="1" dt="2019-01-09T22:45:15.379" idx="7">
+    <p:pos x="7243" y="1382"/>
+    <p:text>具体算法需要再斟酌</p:text>
     <p:extLst>
       <p:ext uri="{C676402C-5697-4E1C-873F-D02D1690AC5C}">
         <p15:threadingInfo xmlns:p15="http://schemas.microsoft.com/office/powerpoint/2012/main" timeZoneBias="-480"/>
@@ -204,9 +187,9 @@
 
 <file path=ppt/comments/comment4.xml><?xml version="1.0" encoding="utf-8"?>
 <p:cmLst xmlns:a="http://schemas.openxmlformats.org/drawingml/2006/main" xmlns:r="http://schemas.openxmlformats.org/officeDocument/2006/relationships" xmlns:p="http://schemas.openxmlformats.org/presentationml/2006/main">
-  <p:cm authorId="1" dt="2019-01-09T22:45:15.379" idx="7">
-    <p:pos x="7243" y="1382"/>
-    <p:text>具体算法需要再斟酌</p:text>
+  <p:cm authorId="1" dt="2019-01-11T10:15:04.484" idx="11">
+    <p:pos x="10" y="10"/>
+    <p:text>多级bitmap与单个bitmap测试性能。</p:text>
     <p:extLst>
       <p:ext uri="{C676402C-5697-4E1C-873F-D02D1690AC5C}">
         <p15:threadingInfo xmlns:p15="http://schemas.microsoft.com/office/powerpoint/2012/main" timeZoneBias="-480"/>
@@ -298,7 +281,7 @@
           <a:p>
             <a:fld id="{193CF9C5-560D-4BE0-8FF5-372197204B47}" type="datetimeFigureOut">
               <a:rPr lang="zh-CN" altLang="en-US" smtClean="0"/>
-              <a:t>2019/1/9</a:t>
+              <a:t>2019/1/14</a:t>
             </a:fld>
             <a:endParaRPr lang="zh-CN" altLang="en-US"/>
           </a:p>
@@ -715,7 +698,7 @@
           <a:p>
             <a:fld id="{17227AFA-EB4C-4686-97EC-5D83EA90DB0E}" type="slidenum">
               <a:rPr lang="zh-CN" altLang="en-US" smtClean="0"/>
-              <a:t>16</a:t>
+              <a:t>17</a:t>
             </a:fld>
             <a:endParaRPr lang="zh-CN" altLang="en-US"/>
           </a:p>
@@ -1613,7 +1596,7 @@
           <a:p>
             <a:fld id="{17227AFA-EB4C-4686-97EC-5D83EA90DB0E}" type="slidenum">
               <a:rPr lang="zh-CN" altLang="en-US" smtClean="0"/>
-              <a:t>13</a:t>
+              <a:t>14</a:t>
             </a:fld>
             <a:endParaRPr lang="zh-CN" altLang="en-US"/>
           </a:p>
@@ -1928,7 +1911,7 @@
           <a:p>
             <a:fld id="{17227AFA-EB4C-4686-97EC-5D83EA90DB0E}" type="slidenum">
               <a:rPr lang="zh-CN" altLang="en-US" smtClean="0"/>
-              <a:t>15</a:t>
+              <a:t>16</a:t>
             </a:fld>
             <a:endParaRPr lang="zh-CN" altLang="en-US"/>
           </a:p>
@@ -2078,7 +2061,7 @@
           <a:p>
             <a:fld id="{67EDBE0D-D193-4915-9F9C-E6864CED25A9}" type="datetimeFigureOut">
               <a:rPr lang="zh-CN" altLang="en-US" smtClean="0"/>
-              <a:t>2019/1/9</a:t>
+              <a:t>2019/1/14</a:t>
             </a:fld>
             <a:endParaRPr lang="zh-CN" altLang="en-US"/>
           </a:p>
@@ -2248,7 +2231,7 @@
           <a:p>
             <a:fld id="{67EDBE0D-D193-4915-9F9C-E6864CED25A9}" type="datetimeFigureOut">
               <a:rPr lang="zh-CN" altLang="en-US" smtClean="0"/>
-              <a:t>2019/1/9</a:t>
+              <a:t>2019/1/14</a:t>
             </a:fld>
             <a:endParaRPr lang="zh-CN" altLang="en-US"/>
           </a:p>
@@ -2428,7 +2411,7 @@
           <a:p>
             <a:fld id="{67EDBE0D-D193-4915-9F9C-E6864CED25A9}" type="datetimeFigureOut">
               <a:rPr lang="zh-CN" altLang="en-US" smtClean="0"/>
-              <a:t>2019/1/9</a:t>
+              <a:t>2019/1/14</a:t>
             </a:fld>
             <a:endParaRPr lang="zh-CN" altLang="en-US"/>
           </a:p>
@@ -2598,7 +2581,7 @@
           <a:p>
             <a:fld id="{67EDBE0D-D193-4915-9F9C-E6864CED25A9}" type="datetimeFigureOut">
               <a:rPr lang="zh-CN" altLang="en-US" smtClean="0"/>
-              <a:t>2019/1/9</a:t>
+              <a:t>2019/1/14</a:t>
             </a:fld>
             <a:endParaRPr lang="zh-CN" altLang="en-US"/>
           </a:p>
@@ -2844,7 +2827,7 @@
           <a:p>
             <a:fld id="{67EDBE0D-D193-4915-9F9C-E6864CED25A9}" type="datetimeFigureOut">
               <a:rPr lang="zh-CN" altLang="en-US" smtClean="0"/>
-              <a:t>2019/1/9</a:t>
+              <a:t>2019/1/14</a:t>
             </a:fld>
             <a:endParaRPr lang="zh-CN" altLang="en-US"/>
           </a:p>
@@ -3076,7 +3059,7 @@
           <a:p>
             <a:fld id="{67EDBE0D-D193-4915-9F9C-E6864CED25A9}" type="datetimeFigureOut">
               <a:rPr lang="zh-CN" altLang="en-US" smtClean="0"/>
-              <a:t>2019/1/9</a:t>
+              <a:t>2019/1/14</a:t>
             </a:fld>
             <a:endParaRPr lang="zh-CN" altLang="en-US"/>
           </a:p>
@@ -3443,7 +3426,7 @@
           <a:p>
             <a:fld id="{67EDBE0D-D193-4915-9F9C-E6864CED25A9}" type="datetimeFigureOut">
               <a:rPr lang="zh-CN" altLang="en-US" smtClean="0"/>
-              <a:t>2019/1/9</a:t>
+              <a:t>2019/1/14</a:t>
             </a:fld>
             <a:endParaRPr lang="zh-CN" altLang="en-US"/>
           </a:p>
@@ -3561,7 +3544,7 @@
           <a:p>
             <a:fld id="{67EDBE0D-D193-4915-9F9C-E6864CED25A9}" type="datetimeFigureOut">
               <a:rPr lang="zh-CN" altLang="en-US" smtClean="0"/>
-              <a:t>2019/1/9</a:t>
+              <a:t>2019/1/14</a:t>
             </a:fld>
             <a:endParaRPr lang="zh-CN" altLang="en-US"/>
           </a:p>
@@ -3656,7 +3639,7 @@
           <a:p>
             <a:fld id="{67EDBE0D-D193-4915-9F9C-E6864CED25A9}" type="datetimeFigureOut">
               <a:rPr lang="zh-CN" altLang="en-US" smtClean="0"/>
-              <a:t>2019/1/9</a:t>
+              <a:t>2019/1/14</a:t>
             </a:fld>
             <a:endParaRPr lang="zh-CN" altLang="en-US"/>
           </a:p>
@@ -3933,7 +3916,7 @@
           <a:p>
             <a:fld id="{67EDBE0D-D193-4915-9F9C-E6864CED25A9}" type="datetimeFigureOut">
               <a:rPr lang="zh-CN" altLang="en-US" smtClean="0"/>
-              <a:t>2019/1/9</a:t>
+              <a:t>2019/1/14</a:t>
             </a:fld>
             <a:endParaRPr lang="zh-CN" altLang="en-US"/>
           </a:p>
@@ -4186,7 +4169,7 @@
           <a:p>
             <a:fld id="{67EDBE0D-D193-4915-9F9C-E6864CED25A9}" type="datetimeFigureOut">
               <a:rPr lang="zh-CN" altLang="en-US" smtClean="0"/>
-              <a:t>2019/1/9</a:t>
+              <a:t>2019/1/14</a:t>
             </a:fld>
             <a:endParaRPr lang="zh-CN" altLang="en-US"/>
           </a:p>
@@ -4399,7 +4382,7 @@
           <a:p>
             <a:fld id="{67EDBE0D-D193-4915-9F9C-E6864CED25A9}" type="datetimeFigureOut">
               <a:rPr lang="zh-CN" altLang="en-US" smtClean="0"/>
-              <a:t>2019/1/9</a:t>
+              <a:t>2019/1/14</a:t>
             </a:fld>
             <a:endParaRPr lang="zh-CN" altLang="en-US"/>
           </a:p>
@@ -4927,14 +4910,14 @@
           <p:nvPr>
             <p:extLst>
               <p:ext uri="{D42A27DB-BD31-4B8C-83A1-F6EECF244321}">
-                <p14:modId xmlns:p14="http://schemas.microsoft.com/office/powerpoint/2010/main" val="3307496190"/>
+                <p14:modId xmlns:p14="http://schemas.microsoft.com/office/powerpoint/2010/main" val="849583940"/>
               </p:ext>
             </p:extLst>
           </p:nvPr>
         </p:nvGraphicFramePr>
         <p:xfrm>
           <a:off x="838200" y="1781535"/>
-          <a:ext cx="6338104" cy="4306845"/>
+          <a:ext cx="6338104" cy="3494045"/>
         </p:xfrm>
         <a:graphic>
           <a:graphicData uri="http://schemas.openxmlformats.org/drawingml/2006/table">
@@ -5671,6 +5654,36 @@
                     <a:bodyPr/>
                     <a:lstStyle/>
                     <a:p>
+                      <a:r>
+                        <a:rPr lang="en-US" altLang="zh-CN" sz="1600" dirty="0" err="1" smtClean="0"/>
+                        <a:t>DE:data</a:t>
+                      </a:r>
+                      <a:r>
+                        <a:rPr lang="en-US" altLang="zh-CN" sz="1600" dirty="0" smtClean="0"/>
+                        <a:t> extent</a:t>
+                      </a:r>
+                    </a:p>
+                    <a:p>
+                      <a:r>
+                        <a:rPr lang="en-US" altLang="zh-CN" sz="1600" dirty="0" smtClean="0"/>
+                        <a:t>R0: relation level0</a:t>
+                      </a:r>
+                      <a:r>
+                        <a:rPr lang="en-US" altLang="zh-CN" sz="1600" baseline="0" dirty="0" smtClean="0"/>
+                        <a:t> extent</a:t>
+                      </a:r>
+                    </a:p>
+                    <a:p>
+                      <a:r>
+                        <a:rPr lang="en-US" altLang="zh-CN" sz="1600" baseline="0" dirty="0" smtClean="0"/>
+                        <a:t>R1: relation level1 extent</a:t>
+                      </a:r>
+                    </a:p>
+                    <a:p>
+                      <a:r>
+                        <a:rPr lang="en-US" altLang="zh-CN" sz="1600" baseline="0" dirty="0" smtClean="0"/>
+                        <a:t>R2: relation level2 extent</a:t>
+                      </a:r>
                       <a:endParaRPr lang="zh-CN" altLang="en-US" sz="1600" dirty="0"/>
                     </a:p>
                   </a:txBody>
@@ -6245,797 +6258,6 @@
                   </a:ext>
                 </a:extLst>
               </a:tr>
-              <a:tr h="177779">
-                <a:tc>
-                  <a:txBody>
-                    <a:bodyPr/>
-                    <a:lstStyle/>
-                    <a:p>
-                      <a:r>
-                        <a:rPr lang="en-US" altLang="zh-CN" sz="1600" dirty="0" smtClean="0"/>
-                        <a:t>type</a:t>
-                      </a:r>
-                    </a:p>
-                  </a:txBody>
-                  <a:tcPr>
-                    <a:lnL w="12700" cap="flat" cmpd="sng" algn="ctr">
-                      <a:solidFill>
-                        <a:schemeClr val="tx1"/>
-                      </a:solidFill>
-                      <a:prstDash val="solid"/>
-                      <a:round/>
-                      <a:headEnd type="none" w="med" len="med"/>
-                      <a:tailEnd type="none" w="med" len="med"/>
-                    </a:lnL>
-                    <a:lnR w="12700" cap="flat" cmpd="sng" algn="ctr">
-                      <a:solidFill>
-                        <a:schemeClr val="tx1"/>
-                      </a:solidFill>
-                      <a:prstDash val="solid"/>
-                      <a:round/>
-                      <a:headEnd type="none" w="med" len="med"/>
-                      <a:tailEnd type="none" w="med" len="med"/>
-                    </a:lnR>
-                    <a:lnT w="12700" cap="flat" cmpd="sng" algn="ctr">
-                      <a:solidFill>
-                        <a:schemeClr val="tx1"/>
-                      </a:solidFill>
-                      <a:prstDash val="solid"/>
-                      <a:round/>
-                      <a:headEnd type="none" w="med" len="med"/>
-                      <a:tailEnd type="none" w="med" len="med"/>
-                    </a:lnT>
-                    <a:lnB w="12700" cap="flat" cmpd="sng" algn="ctr">
-                      <a:solidFill>
-                        <a:schemeClr val="tx1"/>
-                      </a:solidFill>
-                      <a:prstDash val="solid"/>
-                      <a:round/>
-                      <a:headEnd type="none" w="med" len="med"/>
-                      <a:tailEnd type="none" w="med" len="med"/>
-                    </a:lnB>
-                    <a:lnTlToBr w="12700" cmpd="sng">
-                      <a:noFill/>
-                      <a:prstDash val="solid"/>
-                    </a:lnTlToBr>
-                    <a:lnBlToTr w="12700" cmpd="sng">
-                      <a:noFill/>
-                      <a:prstDash val="solid"/>
-                    </a:lnBlToTr>
-                    <a:solidFill>
-                      <a:schemeClr val="bg2"/>
-                    </a:solidFill>
-                  </a:tcPr>
-                </a:tc>
-                <a:tc>
-                  <a:txBody>
-                    <a:bodyPr/>
-                    <a:lstStyle/>
-                    <a:p>
-                      <a:r>
-                        <a:rPr lang="en-US" altLang="zh-CN" sz="1600" dirty="0" smtClean="0"/>
-                        <a:t>UINT8</a:t>
-                      </a:r>
-                      <a:endParaRPr lang="zh-CN" altLang="en-US" sz="1600" dirty="0"/>
-                    </a:p>
-                  </a:txBody>
-                  <a:tcPr>
-                    <a:lnL w="12700" cap="flat" cmpd="sng" algn="ctr">
-                      <a:solidFill>
-                        <a:schemeClr val="tx1"/>
-                      </a:solidFill>
-                      <a:prstDash val="solid"/>
-                      <a:round/>
-                      <a:headEnd type="none" w="med" len="med"/>
-                      <a:tailEnd type="none" w="med" len="med"/>
-                    </a:lnL>
-                    <a:lnR w="12700" cap="flat" cmpd="sng" algn="ctr">
-                      <a:solidFill>
-                        <a:schemeClr val="tx1"/>
-                      </a:solidFill>
-                      <a:prstDash val="solid"/>
-                      <a:round/>
-                      <a:headEnd type="none" w="med" len="med"/>
-                      <a:tailEnd type="none" w="med" len="med"/>
-                    </a:lnR>
-                    <a:lnT w="12700" cap="flat" cmpd="sng" algn="ctr">
-                      <a:solidFill>
-                        <a:schemeClr val="tx1"/>
-                      </a:solidFill>
-                      <a:prstDash val="solid"/>
-                      <a:round/>
-                      <a:headEnd type="none" w="med" len="med"/>
-                      <a:tailEnd type="none" w="med" len="med"/>
-                    </a:lnT>
-                    <a:lnB w="12700" cap="flat" cmpd="sng" algn="ctr">
-                      <a:solidFill>
-                        <a:schemeClr val="tx1"/>
-                      </a:solidFill>
-                      <a:prstDash val="solid"/>
-                      <a:round/>
-                      <a:headEnd type="none" w="med" len="med"/>
-                      <a:tailEnd type="none" w="med" len="med"/>
-                    </a:lnB>
-                    <a:lnTlToBr w="12700" cmpd="sng">
-                      <a:noFill/>
-                      <a:prstDash val="solid"/>
-                    </a:lnTlToBr>
-                    <a:lnBlToTr w="12700" cmpd="sng">
-                      <a:noFill/>
-                      <a:prstDash val="solid"/>
-                    </a:lnBlToTr>
-                    <a:solidFill>
-                      <a:schemeClr val="bg2"/>
-                    </a:solidFill>
-                  </a:tcPr>
-                </a:tc>
-                <a:tc>
-                  <a:txBody>
-                    <a:bodyPr/>
-                    <a:lstStyle/>
-                    <a:p>
-                      <a:r>
-                        <a:rPr lang="en-US" altLang="zh-CN" sz="1600" dirty="0" smtClean="0"/>
-                        <a:t>1</a:t>
-                      </a:r>
-                      <a:endParaRPr lang="zh-CN" altLang="en-US" sz="1600" dirty="0"/>
-                    </a:p>
-                  </a:txBody>
-                  <a:tcPr>
-                    <a:lnL w="12700" cap="flat" cmpd="sng" algn="ctr">
-                      <a:solidFill>
-                        <a:schemeClr val="tx1"/>
-                      </a:solidFill>
-                      <a:prstDash val="solid"/>
-                      <a:round/>
-                      <a:headEnd type="none" w="med" len="med"/>
-                      <a:tailEnd type="none" w="med" len="med"/>
-                    </a:lnL>
-                    <a:lnR w="12700" cap="flat" cmpd="sng" algn="ctr">
-                      <a:solidFill>
-                        <a:schemeClr val="tx1"/>
-                      </a:solidFill>
-                      <a:prstDash val="solid"/>
-                      <a:round/>
-                      <a:headEnd type="none" w="med" len="med"/>
-                      <a:tailEnd type="none" w="med" len="med"/>
-                    </a:lnR>
-                    <a:lnT w="12700" cap="flat" cmpd="sng" algn="ctr">
-                      <a:solidFill>
-                        <a:schemeClr val="tx1"/>
-                      </a:solidFill>
-                      <a:prstDash val="solid"/>
-                      <a:round/>
-                      <a:headEnd type="none" w="med" len="med"/>
-                      <a:tailEnd type="none" w="med" len="med"/>
-                    </a:lnT>
-                    <a:lnB w="12700" cap="flat" cmpd="sng" algn="ctr">
-                      <a:solidFill>
-                        <a:schemeClr val="tx1"/>
-                      </a:solidFill>
-                      <a:prstDash val="solid"/>
-                      <a:round/>
-                      <a:headEnd type="none" w="med" len="med"/>
-                      <a:tailEnd type="none" w="med" len="med"/>
-                    </a:lnB>
-                    <a:lnTlToBr w="12700" cmpd="sng">
-                      <a:noFill/>
-                      <a:prstDash val="solid"/>
-                    </a:lnTlToBr>
-                    <a:lnBlToTr w="12700" cmpd="sng">
-                      <a:noFill/>
-                      <a:prstDash val="solid"/>
-                    </a:lnBlToTr>
-                    <a:solidFill>
-                      <a:schemeClr val="bg2"/>
-                    </a:solidFill>
-                  </a:tcPr>
-                </a:tc>
-                <a:tc>
-                  <a:txBody>
-                    <a:bodyPr/>
-                    <a:lstStyle/>
-                    <a:p>
-                      <a:r>
-                        <a:rPr lang="en-US" altLang="zh-CN" sz="1600" baseline="0" dirty="0" smtClean="0"/>
-                        <a:t>0x00 data extent</a:t>
-                      </a:r>
-                    </a:p>
-                    <a:p>
-                      <a:r>
-                        <a:rPr lang="en-US" altLang="zh-CN" sz="1600" baseline="0" dirty="0" smtClean="0"/>
-                        <a:t>0x01 relation leaf extent</a:t>
-                      </a:r>
-                    </a:p>
-                    <a:p>
-                      <a:r>
-                        <a:rPr lang="en-US" altLang="zh-CN" sz="1600" baseline="0" dirty="0" smtClean="0"/>
-                        <a:t>0x02 relation parent extent</a:t>
-                      </a:r>
-                    </a:p>
-                  </a:txBody>
-                  <a:tcPr>
-                    <a:lnL w="12700" cap="flat" cmpd="sng" algn="ctr">
-                      <a:solidFill>
-                        <a:schemeClr val="tx1"/>
-                      </a:solidFill>
-                      <a:prstDash val="solid"/>
-                      <a:round/>
-                      <a:headEnd type="none" w="med" len="med"/>
-                      <a:tailEnd type="none" w="med" len="med"/>
-                    </a:lnL>
-                    <a:lnR w="12700" cap="flat" cmpd="sng" algn="ctr">
-                      <a:solidFill>
-                        <a:schemeClr val="tx1"/>
-                      </a:solidFill>
-                      <a:prstDash val="solid"/>
-                      <a:round/>
-                      <a:headEnd type="none" w="med" len="med"/>
-                      <a:tailEnd type="none" w="med" len="med"/>
-                    </a:lnR>
-                    <a:lnT w="12700" cap="flat" cmpd="sng" algn="ctr">
-                      <a:solidFill>
-                        <a:schemeClr val="tx1"/>
-                      </a:solidFill>
-                      <a:prstDash val="solid"/>
-                      <a:round/>
-                      <a:headEnd type="none" w="med" len="med"/>
-                      <a:tailEnd type="none" w="med" len="med"/>
-                    </a:lnT>
-                    <a:lnB w="12700" cap="flat" cmpd="sng" algn="ctr">
-                      <a:solidFill>
-                        <a:schemeClr val="tx1"/>
-                      </a:solidFill>
-                      <a:prstDash val="solid"/>
-                      <a:round/>
-                      <a:headEnd type="none" w="med" len="med"/>
-                      <a:tailEnd type="none" w="med" len="med"/>
-                    </a:lnB>
-                    <a:lnTlToBr w="12700" cmpd="sng">
-                      <a:noFill/>
-                      <a:prstDash val="solid"/>
-                    </a:lnTlToBr>
-                    <a:lnBlToTr w="12700" cmpd="sng">
-                      <a:noFill/>
-                      <a:prstDash val="solid"/>
-                    </a:lnBlToTr>
-                    <a:solidFill>
-                      <a:schemeClr val="bg2"/>
-                    </a:solidFill>
-                  </a:tcPr>
-                </a:tc>
-                <a:extLst>
-                  <a:ext uri="{0D108BD9-81ED-4DB2-BD59-A6C34878D82A}">
-                    <a16:rowId xmlns:a16="http://schemas.microsoft.com/office/drawing/2014/main" val="1025920981"/>
-                  </a:ext>
-                </a:extLst>
-              </a:tr>
-              <a:tr h="177779">
-                <a:tc>
-                  <a:txBody>
-                    <a:bodyPr/>
-                    <a:lstStyle/>
-                    <a:p>
-                      <a:r>
-                        <a:rPr lang="en-US" altLang="zh-CN" sz="1600" dirty="0" smtClean="0"/>
-                        <a:t>Page </a:t>
-                      </a:r>
-                      <a:r>
-                        <a:rPr lang="en-US" altLang="zh-CN" sz="1600" dirty="0" err="1" smtClean="0"/>
-                        <a:t>num</a:t>
-                      </a:r>
-                      <a:endParaRPr lang="zh-CN" altLang="en-US" sz="1600" dirty="0"/>
-                    </a:p>
-                  </a:txBody>
-                  <a:tcPr>
-                    <a:lnL w="12700" cap="flat" cmpd="sng" algn="ctr">
-                      <a:solidFill>
-                        <a:schemeClr val="tx1"/>
-                      </a:solidFill>
-                      <a:prstDash val="solid"/>
-                      <a:round/>
-                      <a:headEnd type="none" w="med" len="med"/>
-                      <a:tailEnd type="none" w="med" len="med"/>
-                    </a:lnL>
-                    <a:lnR w="12700" cap="flat" cmpd="sng" algn="ctr">
-                      <a:solidFill>
-                        <a:schemeClr val="tx1"/>
-                      </a:solidFill>
-                      <a:prstDash val="solid"/>
-                      <a:round/>
-                      <a:headEnd type="none" w="med" len="med"/>
-                      <a:tailEnd type="none" w="med" len="med"/>
-                    </a:lnR>
-                    <a:lnT w="12700" cap="flat" cmpd="sng" algn="ctr">
-                      <a:solidFill>
-                        <a:schemeClr val="tx1"/>
-                      </a:solidFill>
-                      <a:prstDash val="solid"/>
-                      <a:round/>
-                      <a:headEnd type="none" w="med" len="med"/>
-                      <a:tailEnd type="none" w="med" len="med"/>
-                    </a:lnT>
-                    <a:lnB w="12700" cap="flat" cmpd="sng" algn="ctr">
-                      <a:solidFill>
-                        <a:schemeClr val="tx1"/>
-                      </a:solidFill>
-                      <a:prstDash val="solid"/>
-                      <a:round/>
-                      <a:headEnd type="none" w="med" len="med"/>
-                      <a:tailEnd type="none" w="med" len="med"/>
-                    </a:lnB>
-                    <a:lnTlToBr w="12700" cmpd="sng">
-                      <a:noFill/>
-                      <a:prstDash val="solid"/>
-                    </a:lnTlToBr>
-                    <a:lnBlToTr w="12700" cmpd="sng">
-                      <a:noFill/>
-                      <a:prstDash val="solid"/>
-                    </a:lnBlToTr>
-                    <a:solidFill>
-                      <a:schemeClr val="bg2"/>
-                    </a:solidFill>
-                  </a:tcPr>
-                </a:tc>
-                <a:tc>
-                  <a:txBody>
-                    <a:bodyPr/>
-                    <a:lstStyle/>
-                    <a:p>
-                      <a:r>
-                        <a:rPr lang="en-US" altLang="zh-CN" sz="1600" dirty="0" smtClean="0"/>
-                        <a:t>UINT16</a:t>
-                      </a:r>
-                      <a:endParaRPr lang="zh-CN" altLang="en-US" sz="1600" dirty="0"/>
-                    </a:p>
-                  </a:txBody>
-                  <a:tcPr>
-                    <a:lnL w="12700" cap="flat" cmpd="sng" algn="ctr">
-                      <a:solidFill>
-                        <a:schemeClr val="tx1"/>
-                      </a:solidFill>
-                      <a:prstDash val="solid"/>
-                      <a:round/>
-                      <a:headEnd type="none" w="med" len="med"/>
-                      <a:tailEnd type="none" w="med" len="med"/>
-                    </a:lnL>
-                    <a:lnR w="12700" cap="flat" cmpd="sng" algn="ctr">
-                      <a:solidFill>
-                        <a:schemeClr val="tx1"/>
-                      </a:solidFill>
-                      <a:prstDash val="solid"/>
-                      <a:round/>
-                      <a:headEnd type="none" w="med" len="med"/>
-                      <a:tailEnd type="none" w="med" len="med"/>
-                    </a:lnR>
-                    <a:lnT w="12700" cap="flat" cmpd="sng" algn="ctr">
-                      <a:solidFill>
-                        <a:schemeClr val="tx1"/>
-                      </a:solidFill>
-                      <a:prstDash val="solid"/>
-                      <a:round/>
-                      <a:headEnd type="none" w="med" len="med"/>
-                      <a:tailEnd type="none" w="med" len="med"/>
-                    </a:lnT>
-                    <a:lnB w="12700" cap="flat" cmpd="sng" algn="ctr">
-                      <a:solidFill>
-                        <a:schemeClr val="tx1"/>
-                      </a:solidFill>
-                      <a:prstDash val="solid"/>
-                      <a:round/>
-                      <a:headEnd type="none" w="med" len="med"/>
-                      <a:tailEnd type="none" w="med" len="med"/>
-                    </a:lnB>
-                    <a:lnTlToBr w="12700" cmpd="sng">
-                      <a:noFill/>
-                      <a:prstDash val="solid"/>
-                    </a:lnTlToBr>
-                    <a:lnBlToTr w="12700" cmpd="sng">
-                      <a:noFill/>
-                      <a:prstDash val="solid"/>
-                    </a:lnBlToTr>
-                    <a:solidFill>
-                      <a:schemeClr val="bg2"/>
-                    </a:solidFill>
-                  </a:tcPr>
-                </a:tc>
-                <a:tc>
-                  <a:txBody>
-                    <a:bodyPr/>
-                    <a:lstStyle/>
-                    <a:p>
-                      <a:r>
-                        <a:rPr lang="en-US" altLang="zh-CN" sz="1600" dirty="0" smtClean="0"/>
-                        <a:t>2</a:t>
-                      </a:r>
-                      <a:endParaRPr lang="zh-CN" altLang="en-US" sz="1600" dirty="0"/>
-                    </a:p>
-                  </a:txBody>
-                  <a:tcPr>
-                    <a:lnL w="12700" cap="flat" cmpd="sng" algn="ctr">
-                      <a:solidFill>
-                        <a:schemeClr val="tx1"/>
-                      </a:solidFill>
-                      <a:prstDash val="solid"/>
-                      <a:round/>
-                      <a:headEnd type="none" w="med" len="med"/>
-                      <a:tailEnd type="none" w="med" len="med"/>
-                    </a:lnL>
-                    <a:lnR w="12700" cap="flat" cmpd="sng" algn="ctr">
-                      <a:solidFill>
-                        <a:schemeClr val="tx1"/>
-                      </a:solidFill>
-                      <a:prstDash val="solid"/>
-                      <a:round/>
-                      <a:headEnd type="none" w="med" len="med"/>
-                      <a:tailEnd type="none" w="med" len="med"/>
-                    </a:lnR>
-                    <a:lnT w="12700" cap="flat" cmpd="sng" algn="ctr">
-                      <a:solidFill>
-                        <a:schemeClr val="tx1"/>
-                      </a:solidFill>
-                      <a:prstDash val="solid"/>
-                      <a:round/>
-                      <a:headEnd type="none" w="med" len="med"/>
-                      <a:tailEnd type="none" w="med" len="med"/>
-                    </a:lnT>
-                    <a:lnB w="12700" cap="flat" cmpd="sng" algn="ctr">
-                      <a:solidFill>
-                        <a:schemeClr val="tx1"/>
-                      </a:solidFill>
-                      <a:prstDash val="solid"/>
-                      <a:round/>
-                      <a:headEnd type="none" w="med" len="med"/>
-                      <a:tailEnd type="none" w="med" len="med"/>
-                    </a:lnB>
-                    <a:lnTlToBr w="12700" cmpd="sng">
-                      <a:noFill/>
-                      <a:prstDash val="solid"/>
-                    </a:lnTlToBr>
-                    <a:lnBlToTr w="12700" cmpd="sng">
-                      <a:noFill/>
-                      <a:prstDash val="solid"/>
-                    </a:lnBlToTr>
-                    <a:solidFill>
-                      <a:schemeClr val="bg2"/>
-                    </a:solidFill>
-                  </a:tcPr>
-                </a:tc>
-                <a:tc>
-                  <a:txBody>
-                    <a:bodyPr/>
-                    <a:lstStyle/>
-                    <a:p>
-                      <a:r>
-                        <a:rPr lang="en-US" altLang="zh-CN" sz="1600" baseline="0" dirty="0" smtClean="0"/>
-                        <a:t>Extent</a:t>
-                      </a:r>
-                      <a:r>
-                        <a:rPr lang="zh-CN" altLang="en-US" sz="1600" baseline="0" dirty="0" smtClean="0"/>
-                        <a:t>包含的</a:t>
-                      </a:r>
-                      <a:r>
-                        <a:rPr lang="en-US" altLang="zh-CN" sz="1600" baseline="0" dirty="0" smtClean="0"/>
-                        <a:t>page</a:t>
-                      </a:r>
-                      <a:r>
-                        <a:rPr lang="zh-CN" altLang="en-US" sz="1600" baseline="0" dirty="0" smtClean="0"/>
-                        <a:t>数量</a:t>
-                      </a:r>
-                      <a:endParaRPr lang="en-US" altLang="zh-CN" sz="1600" baseline="0" dirty="0" smtClean="0"/>
-                    </a:p>
-                  </a:txBody>
-                  <a:tcPr>
-                    <a:lnL w="12700" cap="flat" cmpd="sng" algn="ctr">
-                      <a:solidFill>
-                        <a:schemeClr val="tx1"/>
-                      </a:solidFill>
-                      <a:prstDash val="solid"/>
-                      <a:round/>
-                      <a:headEnd type="none" w="med" len="med"/>
-                      <a:tailEnd type="none" w="med" len="med"/>
-                    </a:lnL>
-                    <a:lnR w="12700" cap="flat" cmpd="sng" algn="ctr">
-                      <a:solidFill>
-                        <a:schemeClr val="tx1"/>
-                      </a:solidFill>
-                      <a:prstDash val="solid"/>
-                      <a:round/>
-                      <a:headEnd type="none" w="med" len="med"/>
-                      <a:tailEnd type="none" w="med" len="med"/>
-                    </a:lnR>
-                    <a:lnT w="12700" cap="flat" cmpd="sng" algn="ctr">
-                      <a:solidFill>
-                        <a:schemeClr val="tx1"/>
-                      </a:solidFill>
-                      <a:prstDash val="solid"/>
-                      <a:round/>
-                      <a:headEnd type="none" w="med" len="med"/>
-                      <a:tailEnd type="none" w="med" len="med"/>
-                    </a:lnT>
-                    <a:lnB w="12700" cap="flat" cmpd="sng" algn="ctr">
-                      <a:solidFill>
-                        <a:schemeClr val="tx1"/>
-                      </a:solidFill>
-                      <a:prstDash val="solid"/>
-                      <a:round/>
-                      <a:headEnd type="none" w="med" len="med"/>
-                      <a:tailEnd type="none" w="med" len="med"/>
-                    </a:lnB>
-                    <a:lnTlToBr w="12700" cmpd="sng">
-                      <a:noFill/>
-                      <a:prstDash val="solid"/>
-                    </a:lnTlToBr>
-                    <a:lnBlToTr w="12700" cmpd="sng">
-                      <a:noFill/>
-                      <a:prstDash val="solid"/>
-                    </a:lnBlToTr>
-                    <a:solidFill>
-                      <a:schemeClr val="bg2"/>
-                    </a:solidFill>
-                  </a:tcPr>
-                </a:tc>
-                <a:extLst>
-                  <a:ext uri="{0D108BD9-81ED-4DB2-BD59-A6C34878D82A}">
-                    <a16:rowId xmlns:a16="http://schemas.microsoft.com/office/drawing/2014/main" val="2107909686"/>
-                  </a:ext>
-                </a:extLst>
-              </a:tr>
-              <a:tr h="386080">
-                <a:tc>
-                  <a:txBody>
-                    <a:bodyPr/>
-                    <a:lstStyle/>
-                    <a:p>
-                      <a:r>
-                        <a:rPr lang="en-US" altLang="zh-CN" sz="1600" dirty="0" smtClean="0"/>
-                        <a:t>pad1</a:t>
-                      </a:r>
-                      <a:endParaRPr lang="zh-CN" altLang="en-US" sz="1600" dirty="0"/>
-                    </a:p>
-                  </a:txBody>
-                  <a:tcPr>
-                    <a:lnL w="12700" cap="flat" cmpd="sng" algn="ctr">
-                      <a:solidFill>
-                        <a:schemeClr val="tx1"/>
-                      </a:solidFill>
-                      <a:prstDash val="solid"/>
-                      <a:round/>
-                      <a:headEnd type="none" w="med" len="med"/>
-                      <a:tailEnd type="none" w="med" len="med"/>
-                    </a:lnL>
-                    <a:lnR w="12700" cap="flat" cmpd="sng" algn="ctr">
-                      <a:solidFill>
-                        <a:schemeClr val="tx1"/>
-                      </a:solidFill>
-                      <a:prstDash val="solid"/>
-                      <a:round/>
-                      <a:headEnd type="none" w="med" len="med"/>
-                      <a:tailEnd type="none" w="med" len="med"/>
-                    </a:lnR>
-                    <a:lnT w="12700" cap="flat" cmpd="sng" algn="ctr">
-                      <a:solidFill>
-                        <a:schemeClr val="tx1"/>
-                      </a:solidFill>
-                      <a:prstDash val="solid"/>
-                      <a:round/>
-                      <a:headEnd type="none" w="med" len="med"/>
-                      <a:tailEnd type="none" w="med" len="med"/>
-                    </a:lnT>
-                    <a:lnB w="12700" cap="flat" cmpd="sng" algn="ctr">
-                      <a:solidFill>
-                        <a:schemeClr val="tx1"/>
-                      </a:solidFill>
-                      <a:prstDash val="solid"/>
-                      <a:round/>
-                      <a:headEnd type="none" w="med" len="med"/>
-                      <a:tailEnd type="none" w="med" len="med"/>
-                    </a:lnB>
-                    <a:lnTlToBr w="12700" cmpd="sng">
-                      <a:noFill/>
-                      <a:prstDash val="solid"/>
-                    </a:lnTlToBr>
-                    <a:lnBlToTr w="12700" cmpd="sng">
-                      <a:noFill/>
-                      <a:prstDash val="solid"/>
-                    </a:lnBlToTr>
-                    <a:solidFill>
-                      <a:schemeClr val="bg2"/>
-                    </a:solidFill>
-                  </a:tcPr>
-                </a:tc>
-                <a:tc>
-                  <a:txBody>
-                    <a:bodyPr/>
-                    <a:lstStyle/>
-                    <a:p>
-                      <a:r>
-                        <a:rPr lang="en-US" altLang="zh-CN" sz="1600" dirty="0" smtClean="0"/>
-                        <a:t>UINT8</a:t>
-                      </a:r>
-                      <a:endParaRPr lang="zh-CN" altLang="en-US" sz="1600" dirty="0"/>
-                    </a:p>
-                  </a:txBody>
-                  <a:tcPr>
-                    <a:lnL w="12700" cap="flat" cmpd="sng" algn="ctr">
-                      <a:solidFill>
-                        <a:schemeClr val="tx1"/>
-                      </a:solidFill>
-                      <a:prstDash val="solid"/>
-                      <a:round/>
-                      <a:headEnd type="none" w="med" len="med"/>
-                      <a:tailEnd type="none" w="med" len="med"/>
-                    </a:lnL>
-                    <a:lnR w="12700" cap="flat" cmpd="sng" algn="ctr">
-                      <a:solidFill>
-                        <a:schemeClr val="tx1"/>
-                      </a:solidFill>
-                      <a:prstDash val="solid"/>
-                      <a:round/>
-                      <a:headEnd type="none" w="med" len="med"/>
-                      <a:tailEnd type="none" w="med" len="med"/>
-                    </a:lnR>
-                    <a:lnT w="12700" cap="flat" cmpd="sng" algn="ctr">
-                      <a:solidFill>
-                        <a:schemeClr val="tx1"/>
-                      </a:solidFill>
-                      <a:prstDash val="solid"/>
-                      <a:round/>
-                      <a:headEnd type="none" w="med" len="med"/>
-                      <a:tailEnd type="none" w="med" len="med"/>
-                    </a:lnT>
-                    <a:lnB w="12700" cap="flat" cmpd="sng" algn="ctr">
-                      <a:solidFill>
-                        <a:schemeClr val="tx1"/>
-                      </a:solidFill>
-                      <a:prstDash val="solid"/>
-                      <a:round/>
-                      <a:headEnd type="none" w="med" len="med"/>
-                      <a:tailEnd type="none" w="med" len="med"/>
-                    </a:lnB>
-                    <a:lnTlToBr w="12700" cmpd="sng">
-                      <a:noFill/>
-                      <a:prstDash val="solid"/>
-                    </a:lnTlToBr>
-                    <a:lnBlToTr w="12700" cmpd="sng">
-                      <a:noFill/>
-                      <a:prstDash val="solid"/>
-                    </a:lnBlToTr>
-                    <a:solidFill>
-                      <a:schemeClr val="bg2"/>
-                    </a:solidFill>
-                  </a:tcPr>
-                </a:tc>
-                <a:tc>
-                  <a:txBody>
-                    <a:bodyPr/>
-                    <a:lstStyle/>
-                    <a:p>
-                      <a:r>
-                        <a:rPr lang="en-US" altLang="zh-CN" sz="1600" dirty="0" smtClean="0"/>
-                        <a:t>1</a:t>
-                      </a:r>
-                      <a:endParaRPr lang="zh-CN" altLang="en-US" sz="1600" dirty="0"/>
-                    </a:p>
-                  </a:txBody>
-                  <a:tcPr>
-                    <a:lnL w="12700" cap="flat" cmpd="sng" algn="ctr">
-                      <a:solidFill>
-                        <a:schemeClr val="tx1"/>
-                      </a:solidFill>
-                      <a:prstDash val="solid"/>
-                      <a:round/>
-                      <a:headEnd type="none" w="med" len="med"/>
-                      <a:tailEnd type="none" w="med" len="med"/>
-                    </a:lnL>
-                    <a:lnR w="12700" cap="flat" cmpd="sng" algn="ctr">
-                      <a:solidFill>
-                        <a:schemeClr val="tx1"/>
-                      </a:solidFill>
-                      <a:prstDash val="solid"/>
-                      <a:round/>
-                      <a:headEnd type="none" w="med" len="med"/>
-                      <a:tailEnd type="none" w="med" len="med"/>
-                    </a:lnR>
-                    <a:lnT w="12700" cap="flat" cmpd="sng" algn="ctr">
-                      <a:solidFill>
-                        <a:schemeClr val="tx1"/>
-                      </a:solidFill>
-                      <a:prstDash val="solid"/>
-                      <a:round/>
-                      <a:headEnd type="none" w="med" len="med"/>
-                      <a:tailEnd type="none" w="med" len="med"/>
-                    </a:lnT>
-                    <a:lnB w="12700" cap="flat" cmpd="sng" algn="ctr">
-                      <a:solidFill>
-                        <a:schemeClr val="tx1"/>
-                      </a:solidFill>
-                      <a:prstDash val="solid"/>
-                      <a:round/>
-                      <a:headEnd type="none" w="med" len="med"/>
-                      <a:tailEnd type="none" w="med" len="med"/>
-                    </a:lnB>
-                    <a:lnTlToBr w="12700" cmpd="sng">
-                      <a:noFill/>
-                      <a:prstDash val="solid"/>
-                    </a:lnTlToBr>
-                    <a:lnBlToTr w="12700" cmpd="sng">
-                      <a:noFill/>
-                      <a:prstDash val="solid"/>
-                    </a:lnBlToTr>
-                    <a:solidFill>
-                      <a:schemeClr val="bg2"/>
-                    </a:solidFill>
-                  </a:tcPr>
-                </a:tc>
-                <a:tc>
-                  <a:txBody>
-                    <a:bodyPr/>
-                    <a:lstStyle/>
-                    <a:p>
-                      <a:r>
-                        <a:rPr lang="zh-CN" altLang="en-US" sz="1600" baseline="0" dirty="0" smtClean="0"/>
-                        <a:t>填充位</a:t>
-                      </a:r>
-                      <a:endParaRPr lang="en-US" altLang="zh-CN" sz="1600" baseline="0" dirty="0" smtClean="0"/>
-                    </a:p>
-                  </a:txBody>
-                  <a:tcPr>
-                    <a:lnL w="12700" cap="flat" cmpd="sng" algn="ctr">
-                      <a:solidFill>
-                        <a:schemeClr val="tx1"/>
-                      </a:solidFill>
-                      <a:prstDash val="solid"/>
-                      <a:round/>
-                      <a:headEnd type="none" w="med" len="med"/>
-                      <a:tailEnd type="none" w="med" len="med"/>
-                    </a:lnL>
-                    <a:lnR w="12700" cap="flat" cmpd="sng" algn="ctr">
-                      <a:solidFill>
-                        <a:schemeClr val="tx1"/>
-                      </a:solidFill>
-                      <a:prstDash val="solid"/>
-                      <a:round/>
-                      <a:headEnd type="none" w="med" len="med"/>
-                      <a:tailEnd type="none" w="med" len="med"/>
-                    </a:lnR>
-                    <a:lnT w="12700" cap="flat" cmpd="sng" algn="ctr">
-                      <a:solidFill>
-                        <a:schemeClr val="tx1"/>
-                      </a:solidFill>
-                      <a:prstDash val="solid"/>
-                      <a:round/>
-                      <a:headEnd type="none" w="med" len="med"/>
-                      <a:tailEnd type="none" w="med" len="med"/>
-                    </a:lnT>
-                    <a:lnB w="12700" cap="flat" cmpd="sng" algn="ctr">
-                      <a:solidFill>
-                        <a:schemeClr val="tx1"/>
-                      </a:solidFill>
-                      <a:prstDash val="solid"/>
-                      <a:round/>
-                      <a:headEnd type="none" w="med" len="med"/>
-                      <a:tailEnd type="none" w="med" len="med"/>
-                    </a:lnB>
-                    <a:lnTlToBr w="12700" cmpd="sng">
-                      <a:noFill/>
-                      <a:prstDash val="solid"/>
-                    </a:lnTlToBr>
-                    <a:lnBlToTr w="12700" cmpd="sng">
-                      <a:noFill/>
-                      <a:prstDash val="solid"/>
-                    </a:lnBlToTr>
-                    <a:solidFill>
-                      <a:schemeClr val="bg2"/>
-                    </a:solidFill>
-                  </a:tcPr>
-                </a:tc>
-                <a:extLst>
-                  <a:ext uri="{0D108BD9-81ED-4DB2-BD59-A6C34878D82A}">
-                    <a16:rowId xmlns:a16="http://schemas.microsoft.com/office/drawing/2014/main" val="4188804492"/>
-                  </a:ext>
-                </a:extLst>
-              </a:tr>
               <a:tr h="289560">
                 <a:tc>
                   <a:txBody>
@@ -7293,6 +6515,10 @@
                     <a:bodyPr/>
                     <a:lstStyle/>
                     <a:p>
+                      <a:r>
+                        <a:rPr lang="en-US" altLang="zh-CN" sz="1600" dirty="0" smtClean="0"/>
+                        <a:t>reserve</a:t>
+                      </a:r>
                       <a:endParaRPr lang="zh-CN" altLang="en-US" sz="1600" dirty="0"/>
                     </a:p>
                   </a:txBody>
@@ -7351,6 +6577,10 @@
                     <a:bodyPr/>
                     <a:lstStyle/>
                     <a:p>
+                      <a:r>
+                        <a:rPr lang="en-US" altLang="zh-CN" sz="1600" dirty="0" smtClean="0"/>
+                        <a:t>UINT16</a:t>
+                      </a:r>
                       <a:endParaRPr lang="zh-CN" altLang="en-US" sz="1600" dirty="0"/>
                     </a:p>
                   </a:txBody>
@@ -7409,6 +6639,10 @@
                     <a:bodyPr/>
                     <a:lstStyle/>
                     <a:p>
+                      <a:r>
+                        <a:rPr lang="en-US" altLang="zh-CN" sz="1600" dirty="0" smtClean="0"/>
+                        <a:t>4</a:t>
+                      </a:r>
                       <a:endParaRPr lang="zh-CN" altLang="en-US" sz="1600" dirty="0"/>
                     </a:p>
                   </a:txBody>
@@ -7467,6 +6701,10 @@
                     <a:bodyPr/>
                     <a:lstStyle/>
                     <a:p>
+                      <a:r>
+                        <a:rPr lang="zh-CN" altLang="en-US" sz="1600" baseline="0" dirty="0" smtClean="0"/>
+                        <a:t>预留位</a:t>
+                      </a:r>
                       <a:endParaRPr lang="en-US" altLang="zh-CN" sz="1600" baseline="0" dirty="0" smtClean="0"/>
                     </a:p>
                   </a:txBody>
@@ -7599,14 +6837,14 @@
           <p:nvPr>
             <p:extLst>
               <p:ext uri="{D42A27DB-BD31-4B8C-83A1-F6EECF244321}">
-                <p14:modId xmlns:p14="http://schemas.microsoft.com/office/powerpoint/2010/main" val="3138858232"/>
+                <p14:modId xmlns:p14="http://schemas.microsoft.com/office/powerpoint/2010/main" val="1981175772"/>
               </p:ext>
             </p:extLst>
           </p:nvPr>
         </p:nvGraphicFramePr>
         <p:xfrm>
           <a:off x="838200" y="1400535"/>
-          <a:ext cx="6338104" cy="5627612"/>
+          <a:ext cx="6338104" cy="4987532"/>
         </p:xfrm>
         <a:graphic>
           <a:graphicData uri="http://schemas.openxmlformats.org/drawingml/2006/table">
@@ -7652,14 +6890,14 @@
                     <a:p>
                       <a:pPr algn="ctr"/>
                       <a:r>
-                        <a:rPr lang="en-US" altLang="zh-CN" sz="1600" dirty="0" smtClean="0">
+                        <a:rPr lang="en-US" altLang="zh-CN" sz="1400" dirty="0" smtClean="0">
                           <a:solidFill>
                             <a:schemeClr val="tx1"/>
                           </a:solidFill>
                         </a:rPr>
                         <a:t>Data Extent</a:t>
                       </a:r>
-                      <a:endParaRPr lang="zh-CN" altLang="en-US" sz="1600" dirty="0">
+                      <a:endParaRPr lang="zh-CN" altLang="en-US" sz="1400" dirty="0">
                         <a:solidFill>
                           <a:schemeClr val="tx1"/>
                         </a:solidFill>
@@ -7903,10 +7141,10 @@
                     <a:lstStyle/>
                     <a:p>
                       <a:r>
-                        <a:rPr lang="zh-CN" altLang="en-US" sz="1600" dirty="0" smtClean="0"/>
+                        <a:rPr lang="zh-CN" altLang="en-US" sz="1400" dirty="0" smtClean="0"/>
                         <a:t>名称</a:t>
                       </a:r>
-                      <a:endParaRPr lang="zh-CN" altLang="en-US" sz="1600" dirty="0"/>
+                      <a:endParaRPr lang="zh-CN" altLang="en-US" sz="1400" dirty="0"/>
                     </a:p>
                   </a:txBody>
                   <a:tcPr>
@@ -7965,10 +7203,10 @@
                     <a:lstStyle/>
                     <a:p>
                       <a:r>
-                        <a:rPr lang="zh-CN" altLang="en-US" sz="1600" dirty="0" smtClean="0"/>
+                        <a:rPr lang="zh-CN" altLang="en-US" sz="1400" dirty="0" smtClean="0"/>
                         <a:t>类型</a:t>
                       </a:r>
-                      <a:endParaRPr lang="zh-CN" altLang="en-US" sz="1600" dirty="0"/>
+                      <a:endParaRPr lang="zh-CN" altLang="en-US" sz="1400" dirty="0"/>
                     </a:p>
                   </a:txBody>
                   <a:tcPr>
@@ -8027,10 +7265,10 @@
                     <a:lstStyle/>
                     <a:p>
                       <a:r>
-                        <a:rPr lang="zh-CN" altLang="en-US" sz="1600" dirty="0" smtClean="0"/>
+                        <a:rPr lang="zh-CN" altLang="en-US" sz="1400" dirty="0" smtClean="0"/>
                         <a:t>长度</a:t>
                       </a:r>
-                      <a:endParaRPr lang="zh-CN" altLang="en-US" sz="1600" dirty="0"/>
+                      <a:endParaRPr lang="zh-CN" altLang="en-US" sz="1400" dirty="0"/>
                     </a:p>
                   </a:txBody>
                   <a:tcPr>
@@ -8089,10 +7327,10 @@
                     <a:lstStyle/>
                     <a:p>
                       <a:r>
-                        <a:rPr lang="zh-CN" altLang="en-US" sz="1600" dirty="0" smtClean="0"/>
+                        <a:rPr lang="zh-CN" altLang="en-US" sz="1400" dirty="0" smtClean="0"/>
                         <a:t>描述</a:t>
                       </a:r>
-                      <a:endParaRPr lang="zh-CN" altLang="en-US" sz="1600" dirty="0"/>
+                      <a:endParaRPr lang="zh-CN" altLang="en-US" sz="1400" dirty="0"/>
                     </a:p>
                   </a:txBody>
                   <a:tcPr>
@@ -8158,10 +7396,10 @@
                     <a:lstStyle/>
                     <a:p>
                       <a:r>
-                        <a:rPr lang="en-US" altLang="zh-CN" sz="1600" dirty="0" smtClean="0"/>
+                        <a:rPr lang="en-US" altLang="zh-CN" sz="1400" dirty="0" smtClean="0"/>
                         <a:t>Extent Header</a:t>
                       </a:r>
-                      <a:endParaRPr lang="zh-CN" altLang="en-US" sz="1600" dirty="0"/>
+                      <a:endParaRPr lang="zh-CN" altLang="en-US" sz="1400" dirty="0"/>
                     </a:p>
                   </a:txBody>
                   <a:tcPr>
@@ -8220,10 +7458,10 @@
                     <a:lstStyle/>
                     <a:p>
                       <a:r>
-                        <a:rPr lang="en-US" altLang="zh-CN" sz="1600" dirty="0" smtClean="0"/>
+                        <a:rPr lang="en-US" altLang="zh-CN" sz="1400" dirty="0" smtClean="0"/>
                         <a:t>BYTES</a:t>
                       </a:r>
-                      <a:endParaRPr lang="zh-CN" altLang="en-US" sz="1600" dirty="0"/>
+                      <a:endParaRPr lang="zh-CN" altLang="en-US" sz="1400" dirty="0"/>
                     </a:p>
                   </a:txBody>
                   <a:tcPr>
@@ -8282,10 +7520,10 @@
                     <a:lstStyle/>
                     <a:p>
                       <a:r>
-                        <a:rPr lang="en-US" altLang="zh-CN" sz="1600" dirty="0" smtClean="0"/>
+                        <a:rPr lang="en-US" altLang="zh-CN" sz="1400" dirty="0" smtClean="0"/>
                         <a:t>12</a:t>
                       </a:r>
-                      <a:endParaRPr lang="zh-CN" altLang="en-US" sz="1600" dirty="0"/>
+                      <a:endParaRPr lang="zh-CN" altLang="en-US" sz="1400" dirty="0"/>
                     </a:p>
                   </a:txBody>
                   <a:tcPr>
@@ -8343,7 +7581,7 @@
                     <a:bodyPr/>
                     <a:lstStyle/>
                     <a:p>
-                      <a:endParaRPr lang="zh-CN" altLang="en-US" sz="1600" dirty="0"/>
+                      <a:endParaRPr lang="zh-CN" altLang="en-US" sz="1400" dirty="0"/>
                     </a:p>
                   </a:txBody>
                   <a:tcPr>
@@ -8409,14 +7647,10 @@
                     <a:lstStyle/>
                     <a:p>
                       <a:r>
-                        <a:rPr lang="en-US" altLang="zh-CN" sz="1600" dirty="0" smtClean="0"/>
-                        <a:t>Relation </a:t>
-                      </a:r>
-                      <a:r>
-                        <a:rPr lang="en-US" altLang="zh-CN" sz="1600" dirty="0" err="1" smtClean="0"/>
-                        <a:t>recordID</a:t>
-                      </a:r>
-                      <a:endParaRPr lang="zh-CN" altLang="en-US" sz="1600" dirty="0"/>
+                        <a:rPr lang="en-US" altLang="zh-CN" sz="1400" dirty="0" err="1" smtClean="0"/>
+                        <a:t>extentLogicID</a:t>
+                      </a:r>
+                      <a:endParaRPr lang="zh-CN" altLang="en-US" sz="1400" dirty="0"/>
                     </a:p>
                   </a:txBody>
                   <a:tcPr>
@@ -8475,10 +7709,10 @@
                     <a:lstStyle/>
                     <a:p>
                       <a:r>
-                        <a:rPr lang="en-US" altLang="zh-CN" sz="1600" dirty="0" smtClean="0"/>
-                        <a:t>UINT64</a:t>
-                      </a:r>
-                      <a:endParaRPr lang="zh-CN" altLang="en-US" sz="1600" dirty="0"/>
+                        <a:rPr lang="en-US" altLang="zh-CN" sz="1400" dirty="0" smtClean="0"/>
+                        <a:t>UINT32</a:t>
+                      </a:r>
+                      <a:endParaRPr lang="zh-CN" altLang="en-US" sz="1400" dirty="0"/>
                     </a:p>
                   </a:txBody>
                   <a:tcPr>
@@ -8537,10 +7771,10 @@
                     <a:lstStyle/>
                     <a:p>
                       <a:r>
-                        <a:rPr lang="en-US" altLang="zh-CN" sz="1600" dirty="0" smtClean="0"/>
-                        <a:t>8</a:t>
-                      </a:r>
-                      <a:endParaRPr lang="zh-CN" altLang="en-US" sz="1600" dirty="0"/>
+                        <a:rPr lang="en-US" altLang="zh-CN" sz="1400" dirty="0" smtClean="0"/>
+                        <a:t>4</a:t>
+                      </a:r>
+                      <a:endParaRPr lang="zh-CN" altLang="en-US" sz="1400" dirty="0"/>
                     </a:p>
                   </a:txBody>
                   <a:tcPr>
@@ -8599,867 +7833,18 @@
                     <a:lstStyle/>
                     <a:p>
                       <a:r>
-                        <a:rPr lang="zh-CN" altLang="en-US" sz="1600" dirty="0" smtClean="0"/>
-                        <a:t>在关系表中的位置。</a:t>
-                      </a:r>
-                      <a:r>
-                        <a:rPr lang="en-US" altLang="zh-CN" sz="1600" dirty="0" smtClean="0"/>
-                        <a:t>relation</a:t>
-                      </a:r>
-                      <a:r>
-                        <a:rPr lang="en-US" altLang="zh-CN" sz="1600" baseline="0" dirty="0" smtClean="0"/>
-                        <a:t> extent</a:t>
-                      </a:r>
-                      <a:r>
-                        <a:rPr lang="zh-CN" altLang="en-US" sz="1600" baseline="0" dirty="0" smtClean="0"/>
-                        <a:t>的</a:t>
-                      </a:r>
-                      <a:r>
-                        <a:rPr lang="en-US" altLang="zh-CN" sz="1600" baseline="0" dirty="0" smtClean="0"/>
-                        <a:t>id</a:t>
-                      </a:r>
-                      <a:r>
-                        <a:rPr lang="zh-CN" altLang="en-US" sz="1600" baseline="0" dirty="0" smtClean="0"/>
-                        <a:t>和偏移  </a:t>
-                      </a:r>
-                      <a:endParaRPr lang="zh-CN" altLang="en-US" sz="1600" dirty="0"/>
-                    </a:p>
-                  </a:txBody>
-                  <a:tcPr>
-                    <a:lnL w="12700" cap="flat" cmpd="sng" algn="ctr">
-                      <a:solidFill>
-                        <a:schemeClr val="tx1"/>
-                      </a:solidFill>
-                      <a:prstDash val="solid"/>
-                      <a:round/>
-                      <a:headEnd type="none" w="med" len="med"/>
-                      <a:tailEnd type="none" w="med" len="med"/>
-                    </a:lnL>
-                    <a:lnR w="12700" cap="flat" cmpd="sng" algn="ctr">
-                      <a:solidFill>
-                        <a:schemeClr val="tx1"/>
-                      </a:solidFill>
-                      <a:prstDash val="solid"/>
-                      <a:round/>
-                      <a:headEnd type="none" w="med" len="med"/>
-                      <a:tailEnd type="none" w="med" len="med"/>
-                    </a:lnR>
-                    <a:lnT w="12700" cap="flat" cmpd="sng" algn="ctr">
-                      <a:solidFill>
-                        <a:schemeClr val="tx1"/>
-                      </a:solidFill>
-                      <a:prstDash val="solid"/>
-                      <a:round/>
-                      <a:headEnd type="none" w="med" len="med"/>
-                      <a:tailEnd type="none" w="med" len="med"/>
-                    </a:lnT>
-                    <a:lnB w="12700" cap="flat" cmpd="sng" algn="ctr">
-                      <a:solidFill>
-                        <a:schemeClr val="tx1"/>
-                      </a:solidFill>
-                      <a:prstDash val="solid"/>
-                      <a:round/>
-                      <a:headEnd type="none" w="med" len="med"/>
-                      <a:tailEnd type="none" w="med" len="med"/>
-                    </a:lnB>
-                    <a:lnTlToBr w="12700" cmpd="sng">
-                      <a:noFill/>
-                      <a:prstDash val="solid"/>
-                    </a:lnTlToBr>
-                    <a:lnBlToTr w="12700" cmpd="sng">
-                      <a:noFill/>
-                      <a:prstDash val="solid"/>
-                    </a:lnBlToTr>
-                    <a:solidFill>
-                      <a:schemeClr val="bg2"/>
-                    </a:solidFill>
-                  </a:tcPr>
-                </a:tc>
-                <a:extLst>
-                  <a:ext uri="{0D108BD9-81ED-4DB2-BD59-A6C34878D82A}">
-                    <a16:rowId xmlns:a16="http://schemas.microsoft.com/office/drawing/2014/main" val="2020249934"/>
-                  </a:ext>
-                </a:extLst>
-              </a:tr>
-              <a:tr h="167640">
-                <a:tc>
-                  <a:txBody>
-                    <a:bodyPr/>
-                    <a:lstStyle/>
-                    <a:p>
-                      <a:r>
-                        <a:rPr lang="en-US" altLang="zh-CN" sz="1600" dirty="0" smtClean="0"/>
-                        <a:t>record</a:t>
-                      </a:r>
-                      <a:r>
-                        <a:rPr lang="en-US" altLang="zh-CN" sz="1600" baseline="0" dirty="0" smtClean="0"/>
-                        <a:t> count</a:t>
-                      </a:r>
-                      <a:endParaRPr lang="zh-CN" altLang="en-US" sz="1600" dirty="0"/>
-                    </a:p>
-                  </a:txBody>
-                  <a:tcPr>
-                    <a:lnL w="12700" cap="flat" cmpd="sng" algn="ctr">
-                      <a:solidFill>
-                        <a:schemeClr val="tx1"/>
-                      </a:solidFill>
-                      <a:prstDash val="solid"/>
-                      <a:round/>
-                      <a:headEnd type="none" w="med" len="med"/>
-                      <a:tailEnd type="none" w="med" len="med"/>
-                    </a:lnL>
-                    <a:lnR w="12700" cap="flat" cmpd="sng" algn="ctr">
-                      <a:solidFill>
-                        <a:schemeClr val="tx1"/>
-                      </a:solidFill>
-                      <a:prstDash val="solid"/>
-                      <a:round/>
-                      <a:headEnd type="none" w="med" len="med"/>
-                      <a:tailEnd type="none" w="med" len="med"/>
-                    </a:lnR>
-                    <a:lnT w="12700" cap="flat" cmpd="sng" algn="ctr">
-                      <a:solidFill>
-                        <a:schemeClr val="tx1"/>
-                      </a:solidFill>
-                      <a:prstDash val="solid"/>
-                      <a:round/>
-                      <a:headEnd type="none" w="med" len="med"/>
-                      <a:tailEnd type="none" w="med" len="med"/>
-                    </a:lnT>
-                    <a:lnB w="12700" cap="flat" cmpd="sng" algn="ctr">
-                      <a:solidFill>
-                        <a:schemeClr val="tx1"/>
-                      </a:solidFill>
-                      <a:prstDash val="solid"/>
-                      <a:round/>
-                      <a:headEnd type="none" w="med" len="med"/>
-                      <a:tailEnd type="none" w="med" len="med"/>
-                    </a:lnB>
-                    <a:lnTlToBr w="12700" cmpd="sng">
-                      <a:noFill/>
-                      <a:prstDash val="solid"/>
-                    </a:lnTlToBr>
-                    <a:lnBlToTr w="12700" cmpd="sng">
-                      <a:noFill/>
-                      <a:prstDash val="solid"/>
-                    </a:lnBlToTr>
-                    <a:solidFill>
-                      <a:schemeClr val="bg2"/>
-                    </a:solidFill>
-                  </a:tcPr>
-                </a:tc>
-                <a:tc>
-                  <a:txBody>
-                    <a:bodyPr/>
-                    <a:lstStyle/>
-                    <a:p>
-                      <a:r>
-                        <a:rPr lang="en-US" altLang="zh-CN" sz="1600" dirty="0" smtClean="0"/>
-                        <a:t>UINT32</a:t>
-                      </a:r>
-                      <a:endParaRPr lang="zh-CN" altLang="en-US" sz="1600" dirty="0"/>
-                    </a:p>
-                  </a:txBody>
-                  <a:tcPr>
-                    <a:lnL w="12700" cap="flat" cmpd="sng" algn="ctr">
-                      <a:solidFill>
-                        <a:schemeClr val="tx1"/>
-                      </a:solidFill>
-                      <a:prstDash val="solid"/>
-                      <a:round/>
-                      <a:headEnd type="none" w="med" len="med"/>
-                      <a:tailEnd type="none" w="med" len="med"/>
-                    </a:lnL>
-                    <a:lnR w="12700" cap="flat" cmpd="sng" algn="ctr">
-                      <a:solidFill>
-                        <a:schemeClr val="tx1"/>
-                      </a:solidFill>
-                      <a:prstDash val="solid"/>
-                      <a:round/>
-                      <a:headEnd type="none" w="med" len="med"/>
-                      <a:tailEnd type="none" w="med" len="med"/>
-                    </a:lnR>
-                    <a:lnT w="12700" cap="flat" cmpd="sng" algn="ctr">
-                      <a:solidFill>
-                        <a:schemeClr val="tx1"/>
-                      </a:solidFill>
-                      <a:prstDash val="solid"/>
-                      <a:round/>
-                      <a:headEnd type="none" w="med" len="med"/>
-                      <a:tailEnd type="none" w="med" len="med"/>
-                    </a:lnT>
-                    <a:lnB w="12700" cap="flat" cmpd="sng" algn="ctr">
-                      <a:solidFill>
-                        <a:schemeClr val="tx1"/>
-                      </a:solidFill>
-                      <a:prstDash val="solid"/>
-                      <a:round/>
-                      <a:headEnd type="none" w="med" len="med"/>
-                      <a:tailEnd type="none" w="med" len="med"/>
-                    </a:lnB>
-                    <a:lnTlToBr w="12700" cmpd="sng">
-                      <a:noFill/>
-                      <a:prstDash val="solid"/>
-                    </a:lnTlToBr>
-                    <a:lnBlToTr w="12700" cmpd="sng">
-                      <a:noFill/>
-                      <a:prstDash val="solid"/>
-                    </a:lnBlToTr>
-                    <a:solidFill>
-                      <a:schemeClr val="bg2"/>
-                    </a:solidFill>
-                  </a:tcPr>
-                </a:tc>
-                <a:tc>
-                  <a:txBody>
-                    <a:bodyPr/>
-                    <a:lstStyle/>
-                    <a:p>
-                      <a:r>
-                        <a:rPr lang="en-US" altLang="zh-CN" sz="1600" dirty="0" smtClean="0"/>
-                        <a:t>4</a:t>
-                      </a:r>
-                      <a:endParaRPr lang="zh-CN" altLang="en-US" sz="1600" dirty="0"/>
-                    </a:p>
-                  </a:txBody>
-                  <a:tcPr>
-                    <a:lnL w="12700" cap="flat" cmpd="sng" algn="ctr">
-                      <a:solidFill>
-                        <a:schemeClr val="tx1"/>
-                      </a:solidFill>
-                      <a:prstDash val="solid"/>
-                      <a:round/>
-                      <a:headEnd type="none" w="med" len="med"/>
-                      <a:tailEnd type="none" w="med" len="med"/>
-                    </a:lnL>
-                    <a:lnR w="12700" cap="flat" cmpd="sng" algn="ctr">
-                      <a:solidFill>
-                        <a:schemeClr val="tx1"/>
-                      </a:solidFill>
-                      <a:prstDash val="solid"/>
-                      <a:round/>
-                      <a:headEnd type="none" w="med" len="med"/>
-                      <a:tailEnd type="none" w="med" len="med"/>
-                    </a:lnR>
-                    <a:lnT w="12700" cap="flat" cmpd="sng" algn="ctr">
-                      <a:solidFill>
-                        <a:schemeClr val="tx1"/>
-                      </a:solidFill>
-                      <a:prstDash val="solid"/>
-                      <a:round/>
-                      <a:headEnd type="none" w="med" len="med"/>
-                      <a:tailEnd type="none" w="med" len="med"/>
-                    </a:lnT>
-                    <a:lnB w="12700" cap="flat" cmpd="sng" algn="ctr">
-                      <a:solidFill>
-                        <a:schemeClr val="tx1"/>
-                      </a:solidFill>
-                      <a:prstDash val="solid"/>
-                      <a:round/>
-                      <a:headEnd type="none" w="med" len="med"/>
-                      <a:tailEnd type="none" w="med" len="med"/>
-                    </a:lnB>
-                    <a:lnTlToBr w="12700" cmpd="sng">
-                      <a:noFill/>
-                      <a:prstDash val="solid"/>
-                    </a:lnTlToBr>
-                    <a:lnBlToTr w="12700" cmpd="sng">
-                      <a:noFill/>
-                      <a:prstDash val="solid"/>
-                    </a:lnBlToTr>
-                    <a:solidFill>
-                      <a:schemeClr val="bg2"/>
-                    </a:solidFill>
-                  </a:tcPr>
-                </a:tc>
-                <a:tc>
-                  <a:txBody>
-                    <a:bodyPr/>
-                    <a:lstStyle/>
-                    <a:p>
-                      <a:r>
-                        <a:rPr lang="zh-CN" altLang="en-US" sz="1600" dirty="0" smtClean="0"/>
-                        <a:t>记录数</a:t>
-                      </a:r>
-                      <a:endParaRPr lang="zh-CN" altLang="en-US" sz="1600" dirty="0"/>
-                    </a:p>
-                  </a:txBody>
-                  <a:tcPr>
-                    <a:lnL w="12700" cap="flat" cmpd="sng" algn="ctr">
-                      <a:solidFill>
-                        <a:schemeClr val="tx1"/>
-                      </a:solidFill>
-                      <a:prstDash val="solid"/>
-                      <a:round/>
-                      <a:headEnd type="none" w="med" len="med"/>
-                      <a:tailEnd type="none" w="med" len="med"/>
-                    </a:lnL>
-                    <a:lnR w="12700" cap="flat" cmpd="sng" algn="ctr">
-                      <a:solidFill>
-                        <a:schemeClr val="tx1"/>
-                      </a:solidFill>
-                      <a:prstDash val="solid"/>
-                      <a:round/>
-                      <a:headEnd type="none" w="med" len="med"/>
-                      <a:tailEnd type="none" w="med" len="med"/>
-                    </a:lnR>
-                    <a:lnT w="12700" cap="flat" cmpd="sng" algn="ctr">
-                      <a:solidFill>
-                        <a:schemeClr val="tx1"/>
-                      </a:solidFill>
-                      <a:prstDash val="solid"/>
-                      <a:round/>
-                      <a:headEnd type="none" w="med" len="med"/>
-                      <a:tailEnd type="none" w="med" len="med"/>
-                    </a:lnT>
-                    <a:lnB w="12700" cap="flat" cmpd="sng" algn="ctr">
-                      <a:solidFill>
-                        <a:schemeClr val="tx1"/>
-                      </a:solidFill>
-                      <a:prstDash val="solid"/>
-                      <a:round/>
-                      <a:headEnd type="none" w="med" len="med"/>
-                      <a:tailEnd type="none" w="med" len="med"/>
-                    </a:lnB>
-                    <a:lnTlToBr w="12700" cmpd="sng">
-                      <a:noFill/>
-                      <a:prstDash val="solid"/>
-                    </a:lnTlToBr>
-                    <a:lnBlToTr w="12700" cmpd="sng">
-                      <a:noFill/>
-                      <a:prstDash val="solid"/>
-                    </a:lnBlToTr>
-                    <a:solidFill>
-                      <a:schemeClr val="bg2"/>
-                    </a:solidFill>
-                  </a:tcPr>
-                </a:tc>
-                <a:extLst>
-                  <a:ext uri="{0D108BD9-81ED-4DB2-BD59-A6C34878D82A}">
-                    <a16:rowId xmlns:a16="http://schemas.microsoft.com/office/drawing/2014/main" val="3662710841"/>
-                  </a:ext>
-                </a:extLst>
-              </a:tr>
-              <a:tr h="167640">
-                <a:tc>
-                  <a:txBody>
-                    <a:bodyPr/>
-                    <a:lstStyle/>
-                    <a:p>
-                      <a:r>
-                        <a:rPr lang="en-US" altLang="zh-CN" sz="1600" u="none" dirty="0" err="1" smtClean="0">
-                          <a:solidFill>
-                            <a:schemeClr val="bg2">
-                              <a:lumMod val="90000"/>
-                            </a:schemeClr>
-                          </a:solidFill>
-                        </a:rPr>
-                        <a:t>clid</a:t>
-                      </a:r>
-                      <a:endParaRPr lang="zh-CN" altLang="en-US" sz="1600" u="none" dirty="0">
-                        <a:solidFill>
-                          <a:schemeClr val="bg2">
-                            <a:lumMod val="90000"/>
-                          </a:schemeClr>
-                        </a:solidFill>
-                      </a:endParaRPr>
-                    </a:p>
-                  </a:txBody>
-                  <a:tcPr>
-                    <a:lnL w="12700" cap="flat" cmpd="sng" algn="ctr">
-                      <a:solidFill>
-                        <a:schemeClr val="tx1"/>
-                      </a:solidFill>
-                      <a:prstDash val="solid"/>
-                      <a:round/>
-                      <a:headEnd type="none" w="med" len="med"/>
-                      <a:tailEnd type="none" w="med" len="med"/>
-                    </a:lnL>
-                    <a:lnR w="12700" cap="flat" cmpd="sng" algn="ctr">
-                      <a:solidFill>
-                        <a:schemeClr val="tx1"/>
-                      </a:solidFill>
-                      <a:prstDash val="solid"/>
-                      <a:round/>
-                      <a:headEnd type="none" w="med" len="med"/>
-                      <a:tailEnd type="none" w="med" len="med"/>
-                    </a:lnR>
-                    <a:lnT w="12700" cap="flat" cmpd="sng" algn="ctr">
-                      <a:solidFill>
-                        <a:schemeClr val="tx1"/>
-                      </a:solidFill>
-                      <a:prstDash val="solid"/>
-                      <a:round/>
-                      <a:headEnd type="none" w="med" len="med"/>
-                      <a:tailEnd type="none" w="med" len="med"/>
-                    </a:lnT>
-                    <a:lnB w="12700" cap="flat" cmpd="sng" algn="ctr">
-                      <a:solidFill>
-                        <a:schemeClr val="tx1"/>
-                      </a:solidFill>
-                      <a:prstDash val="solid"/>
-                      <a:round/>
-                      <a:headEnd type="none" w="med" len="med"/>
-                      <a:tailEnd type="none" w="med" len="med"/>
-                    </a:lnB>
-                    <a:lnTlToBr w="12700" cmpd="sng">
-                      <a:noFill/>
-                      <a:prstDash val="solid"/>
-                    </a:lnTlToBr>
-                    <a:lnBlToTr w="12700" cmpd="sng">
-                      <a:noFill/>
-                      <a:prstDash val="solid"/>
-                    </a:lnBlToTr>
-                    <a:solidFill>
-                      <a:schemeClr val="bg2"/>
-                    </a:solidFill>
-                  </a:tcPr>
-                </a:tc>
-                <a:tc>
-                  <a:txBody>
-                    <a:bodyPr/>
-                    <a:lstStyle/>
-                    <a:p>
-                      <a:r>
-                        <a:rPr lang="en-US" altLang="zh-CN" sz="1600" u="none" dirty="0" smtClean="0">
-                          <a:solidFill>
-                            <a:schemeClr val="bg2">
-                              <a:lumMod val="90000"/>
-                            </a:schemeClr>
-                          </a:solidFill>
-                        </a:rPr>
-                        <a:t>UINT32</a:t>
-                      </a:r>
-                      <a:endParaRPr lang="zh-CN" altLang="en-US" sz="1600" u="none" dirty="0">
-                        <a:solidFill>
-                          <a:schemeClr val="bg2">
-                            <a:lumMod val="90000"/>
-                          </a:schemeClr>
-                        </a:solidFill>
-                      </a:endParaRPr>
-                    </a:p>
-                  </a:txBody>
-                  <a:tcPr>
-                    <a:lnL w="12700" cap="flat" cmpd="sng" algn="ctr">
-                      <a:solidFill>
-                        <a:schemeClr val="tx1"/>
-                      </a:solidFill>
-                      <a:prstDash val="solid"/>
-                      <a:round/>
-                      <a:headEnd type="none" w="med" len="med"/>
-                      <a:tailEnd type="none" w="med" len="med"/>
-                    </a:lnL>
-                    <a:lnR w="12700" cap="flat" cmpd="sng" algn="ctr">
-                      <a:solidFill>
-                        <a:schemeClr val="tx1"/>
-                      </a:solidFill>
-                      <a:prstDash val="solid"/>
-                      <a:round/>
-                      <a:headEnd type="none" w="med" len="med"/>
-                      <a:tailEnd type="none" w="med" len="med"/>
-                    </a:lnR>
-                    <a:lnT w="12700" cap="flat" cmpd="sng" algn="ctr">
-                      <a:solidFill>
-                        <a:schemeClr val="tx1"/>
-                      </a:solidFill>
-                      <a:prstDash val="solid"/>
-                      <a:round/>
-                      <a:headEnd type="none" w="med" len="med"/>
-                      <a:tailEnd type="none" w="med" len="med"/>
-                    </a:lnT>
-                    <a:lnB w="12700" cap="flat" cmpd="sng" algn="ctr">
-                      <a:solidFill>
-                        <a:schemeClr val="tx1"/>
-                      </a:solidFill>
-                      <a:prstDash val="solid"/>
-                      <a:round/>
-                      <a:headEnd type="none" w="med" len="med"/>
-                      <a:tailEnd type="none" w="med" len="med"/>
-                    </a:lnB>
-                    <a:lnTlToBr w="12700" cmpd="sng">
-                      <a:noFill/>
-                      <a:prstDash val="solid"/>
-                    </a:lnTlToBr>
-                    <a:lnBlToTr w="12700" cmpd="sng">
-                      <a:noFill/>
-                      <a:prstDash val="solid"/>
-                    </a:lnBlToTr>
-                    <a:solidFill>
-                      <a:schemeClr val="bg2"/>
-                    </a:solidFill>
-                  </a:tcPr>
-                </a:tc>
-                <a:tc>
-                  <a:txBody>
-                    <a:bodyPr/>
-                    <a:lstStyle/>
-                    <a:p>
-                      <a:r>
-                        <a:rPr lang="en-US" altLang="zh-CN" sz="1600" u="none" dirty="0" smtClean="0">
-                          <a:solidFill>
-                            <a:schemeClr val="bg2">
-                              <a:lumMod val="90000"/>
-                            </a:schemeClr>
-                          </a:solidFill>
-                        </a:rPr>
-                        <a:t>4</a:t>
-                      </a:r>
-                      <a:endParaRPr lang="zh-CN" altLang="en-US" sz="1600" u="none" dirty="0">
-                        <a:solidFill>
-                          <a:schemeClr val="bg2">
-                            <a:lumMod val="90000"/>
-                          </a:schemeClr>
-                        </a:solidFill>
-                      </a:endParaRPr>
-                    </a:p>
-                  </a:txBody>
-                  <a:tcPr>
-                    <a:lnL w="12700" cap="flat" cmpd="sng" algn="ctr">
-                      <a:solidFill>
-                        <a:schemeClr val="tx1"/>
-                      </a:solidFill>
-                      <a:prstDash val="solid"/>
-                      <a:round/>
-                      <a:headEnd type="none" w="med" len="med"/>
-                      <a:tailEnd type="none" w="med" len="med"/>
-                    </a:lnL>
-                    <a:lnR w="12700" cap="flat" cmpd="sng" algn="ctr">
-                      <a:solidFill>
-                        <a:schemeClr val="tx1"/>
-                      </a:solidFill>
-                      <a:prstDash val="solid"/>
-                      <a:round/>
-                      <a:headEnd type="none" w="med" len="med"/>
-                      <a:tailEnd type="none" w="med" len="med"/>
-                    </a:lnR>
-                    <a:lnT w="12700" cap="flat" cmpd="sng" algn="ctr">
-                      <a:solidFill>
-                        <a:schemeClr val="tx1"/>
-                      </a:solidFill>
-                      <a:prstDash val="solid"/>
-                      <a:round/>
-                      <a:headEnd type="none" w="med" len="med"/>
-                      <a:tailEnd type="none" w="med" len="med"/>
-                    </a:lnT>
-                    <a:lnB w="12700" cap="flat" cmpd="sng" algn="ctr">
-                      <a:solidFill>
-                        <a:schemeClr val="tx1"/>
-                      </a:solidFill>
-                      <a:prstDash val="solid"/>
-                      <a:round/>
-                      <a:headEnd type="none" w="med" len="med"/>
-                      <a:tailEnd type="none" w="med" len="med"/>
-                    </a:lnB>
-                    <a:lnTlToBr w="12700" cmpd="sng">
-                      <a:noFill/>
-                      <a:prstDash val="solid"/>
-                    </a:lnTlToBr>
-                    <a:lnBlToTr w="12700" cmpd="sng">
-                      <a:noFill/>
-                      <a:prstDash val="solid"/>
-                    </a:lnBlToTr>
-                    <a:solidFill>
-                      <a:schemeClr val="bg2"/>
-                    </a:solidFill>
-                  </a:tcPr>
-                </a:tc>
-                <a:tc>
-                  <a:txBody>
-                    <a:bodyPr/>
-                    <a:lstStyle/>
-                    <a:p>
-                      <a:r>
-                        <a:rPr lang="en-US" altLang="zh-CN" sz="1600" u="none" dirty="0" smtClean="0">
-                          <a:solidFill>
-                            <a:schemeClr val="bg2">
-                              <a:lumMod val="90000"/>
-                            </a:schemeClr>
-                          </a:solidFill>
-                        </a:rPr>
-                        <a:t>CL</a:t>
-                      </a:r>
-                      <a:r>
-                        <a:rPr lang="zh-CN" altLang="en-US" sz="1600" u="none" dirty="0" smtClean="0">
-                          <a:solidFill>
-                            <a:schemeClr val="bg2">
-                              <a:lumMod val="90000"/>
-                            </a:schemeClr>
-                          </a:solidFill>
-                        </a:rPr>
-                        <a:t>逻辑</a:t>
-                      </a:r>
-                      <a:r>
-                        <a:rPr lang="en-US" altLang="zh-CN" sz="1600" u="none" dirty="0" smtClean="0">
-                          <a:solidFill>
-                            <a:schemeClr val="bg2">
-                              <a:lumMod val="90000"/>
-                            </a:schemeClr>
-                          </a:solidFill>
-                        </a:rPr>
+                        <a:rPr lang="en-US" altLang="zh-CN" sz="1400" dirty="0" smtClean="0"/>
+                        <a:t>Extent</a:t>
+                      </a:r>
+                      <a:r>
+                        <a:rPr lang="zh-CN" altLang="en-US" sz="1400" dirty="0" smtClean="0"/>
+                        <a:t>的逻辑</a:t>
+                      </a:r>
+                      <a:r>
+                        <a:rPr lang="en-US" altLang="zh-CN" sz="1400" dirty="0" smtClean="0"/>
                         <a:t>ID</a:t>
                       </a:r>
-                      <a:endParaRPr lang="zh-CN" altLang="en-US" sz="1600" u="none" dirty="0">
-                        <a:solidFill>
-                          <a:schemeClr val="bg2">
-                            <a:lumMod val="90000"/>
-                          </a:schemeClr>
-                        </a:solidFill>
-                      </a:endParaRPr>
-                    </a:p>
-                  </a:txBody>
-                  <a:tcPr>
-                    <a:lnL w="12700" cap="flat" cmpd="sng" algn="ctr">
-                      <a:solidFill>
-                        <a:schemeClr val="tx1"/>
-                      </a:solidFill>
-                      <a:prstDash val="solid"/>
-                      <a:round/>
-                      <a:headEnd type="none" w="med" len="med"/>
-                      <a:tailEnd type="none" w="med" len="med"/>
-                    </a:lnL>
-                    <a:lnR w="12700" cap="flat" cmpd="sng" algn="ctr">
-                      <a:solidFill>
-                        <a:schemeClr val="tx1"/>
-                      </a:solidFill>
-                      <a:prstDash val="solid"/>
-                      <a:round/>
-                      <a:headEnd type="none" w="med" len="med"/>
-                      <a:tailEnd type="none" w="med" len="med"/>
-                    </a:lnR>
-                    <a:lnT w="12700" cap="flat" cmpd="sng" algn="ctr">
-                      <a:solidFill>
-                        <a:schemeClr val="tx1"/>
-                      </a:solidFill>
-                      <a:prstDash val="solid"/>
-                      <a:round/>
-                      <a:headEnd type="none" w="med" len="med"/>
-                      <a:tailEnd type="none" w="med" len="med"/>
-                    </a:lnT>
-                    <a:lnB w="12700" cap="flat" cmpd="sng" algn="ctr">
-                      <a:solidFill>
-                        <a:schemeClr val="tx1"/>
-                      </a:solidFill>
-                      <a:prstDash val="solid"/>
-                      <a:round/>
-                      <a:headEnd type="none" w="med" len="med"/>
-                      <a:tailEnd type="none" w="med" len="med"/>
-                    </a:lnB>
-                    <a:lnTlToBr w="12700" cmpd="sng">
-                      <a:noFill/>
-                      <a:prstDash val="solid"/>
-                    </a:lnTlToBr>
-                    <a:lnBlToTr w="12700" cmpd="sng">
-                      <a:noFill/>
-                      <a:prstDash val="solid"/>
-                    </a:lnBlToTr>
-                    <a:solidFill>
-                      <a:schemeClr val="bg2"/>
-                    </a:solidFill>
-                  </a:tcPr>
-                </a:tc>
-                <a:extLst>
-                  <a:ext uri="{0D108BD9-81ED-4DB2-BD59-A6C34878D82A}">
-                    <a16:rowId xmlns:a16="http://schemas.microsoft.com/office/drawing/2014/main" val="984224458"/>
-                  </a:ext>
-                </a:extLst>
-              </a:tr>
-              <a:tr h="167640">
-                <a:tc>
-                  <a:txBody>
-                    <a:bodyPr/>
-                    <a:lstStyle/>
-                    <a:p>
-                      <a:r>
-                        <a:rPr lang="en-US" altLang="zh-CN" sz="1600" dirty="0" err="1" smtClean="0"/>
-                        <a:t>extentLogicID</a:t>
-                      </a:r>
-                      <a:endParaRPr lang="zh-CN" altLang="en-US" sz="1600" dirty="0"/>
-                    </a:p>
-                  </a:txBody>
-                  <a:tcPr>
-                    <a:lnL w="12700" cap="flat" cmpd="sng" algn="ctr">
-                      <a:solidFill>
-                        <a:schemeClr val="tx1"/>
-                      </a:solidFill>
-                      <a:prstDash val="solid"/>
-                      <a:round/>
-                      <a:headEnd type="none" w="med" len="med"/>
-                      <a:tailEnd type="none" w="med" len="med"/>
-                    </a:lnL>
-                    <a:lnR w="12700" cap="flat" cmpd="sng" algn="ctr">
-                      <a:solidFill>
-                        <a:schemeClr val="tx1"/>
-                      </a:solidFill>
-                      <a:prstDash val="solid"/>
-                      <a:round/>
-                      <a:headEnd type="none" w="med" len="med"/>
-                      <a:tailEnd type="none" w="med" len="med"/>
-                    </a:lnR>
-                    <a:lnT w="12700" cap="flat" cmpd="sng" algn="ctr">
-                      <a:solidFill>
-                        <a:schemeClr val="tx1"/>
-                      </a:solidFill>
-                      <a:prstDash val="solid"/>
-                      <a:round/>
-                      <a:headEnd type="none" w="med" len="med"/>
-                      <a:tailEnd type="none" w="med" len="med"/>
-                    </a:lnT>
-                    <a:lnB w="12700" cap="flat" cmpd="sng" algn="ctr">
-                      <a:solidFill>
-                        <a:schemeClr val="tx1"/>
-                      </a:solidFill>
-                      <a:prstDash val="solid"/>
-                      <a:round/>
-                      <a:headEnd type="none" w="med" len="med"/>
-                      <a:tailEnd type="none" w="med" len="med"/>
-                    </a:lnB>
-                    <a:lnTlToBr w="12700" cmpd="sng">
-                      <a:noFill/>
-                      <a:prstDash val="solid"/>
-                    </a:lnTlToBr>
-                    <a:lnBlToTr w="12700" cmpd="sng">
-                      <a:noFill/>
-                      <a:prstDash val="solid"/>
-                    </a:lnBlToTr>
-                    <a:solidFill>
-                      <a:schemeClr val="bg2"/>
-                    </a:solidFill>
-                  </a:tcPr>
-                </a:tc>
-                <a:tc>
-                  <a:txBody>
-                    <a:bodyPr/>
-                    <a:lstStyle/>
-                    <a:p>
-                      <a:r>
-                        <a:rPr lang="en-US" altLang="zh-CN" sz="1600" dirty="0" smtClean="0"/>
-                        <a:t>UINT32</a:t>
-                      </a:r>
-                      <a:endParaRPr lang="zh-CN" altLang="en-US" sz="1600" dirty="0"/>
-                    </a:p>
-                  </a:txBody>
-                  <a:tcPr>
-                    <a:lnL w="12700" cap="flat" cmpd="sng" algn="ctr">
-                      <a:solidFill>
-                        <a:schemeClr val="tx1"/>
-                      </a:solidFill>
-                      <a:prstDash val="solid"/>
-                      <a:round/>
-                      <a:headEnd type="none" w="med" len="med"/>
-                      <a:tailEnd type="none" w="med" len="med"/>
-                    </a:lnL>
-                    <a:lnR w="12700" cap="flat" cmpd="sng" algn="ctr">
-                      <a:solidFill>
-                        <a:schemeClr val="tx1"/>
-                      </a:solidFill>
-                      <a:prstDash val="solid"/>
-                      <a:round/>
-                      <a:headEnd type="none" w="med" len="med"/>
-                      <a:tailEnd type="none" w="med" len="med"/>
-                    </a:lnR>
-                    <a:lnT w="12700" cap="flat" cmpd="sng" algn="ctr">
-                      <a:solidFill>
-                        <a:schemeClr val="tx1"/>
-                      </a:solidFill>
-                      <a:prstDash val="solid"/>
-                      <a:round/>
-                      <a:headEnd type="none" w="med" len="med"/>
-                      <a:tailEnd type="none" w="med" len="med"/>
-                    </a:lnT>
-                    <a:lnB w="12700" cap="flat" cmpd="sng" algn="ctr">
-                      <a:solidFill>
-                        <a:schemeClr val="tx1"/>
-                      </a:solidFill>
-                      <a:prstDash val="solid"/>
-                      <a:round/>
-                      <a:headEnd type="none" w="med" len="med"/>
-                      <a:tailEnd type="none" w="med" len="med"/>
-                    </a:lnB>
-                    <a:lnTlToBr w="12700" cmpd="sng">
-                      <a:noFill/>
-                      <a:prstDash val="solid"/>
-                    </a:lnTlToBr>
-                    <a:lnBlToTr w="12700" cmpd="sng">
-                      <a:noFill/>
-                      <a:prstDash val="solid"/>
-                    </a:lnBlToTr>
-                    <a:solidFill>
-                      <a:schemeClr val="bg2"/>
-                    </a:solidFill>
-                  </a:tcPr>
-                </a:tc>
-                <a:tc>
-                  <a:txBody>
-                    <a:bodyPr/>
-                    <a:lstStyle/>
-                    <a:p>
-                      <a:r>
-                        <a:rPr lang="en-US" altLang="zh-CN" sz="1600" dirty="0" smtClean="0"/>
-                        <a:t>4</a:t>
-                      </a:r>
-                      <a:endParaRPr lang="zh-CN" altLang="en-US" sz="1600" dirty="0"/>
-                    </a:p>
-                  </a:txBody>
-                  <a:tcPr>
-                    <a:lnL w="12700" cap="flat" cmpd="sng" algn="ctr">
-                      <a:solidFill>
-                        <a:schemeClr val="tx1"/>
-                      </a:solidFill>
-                      <a:prstDash val="solid"/>
-                      <a:round/>
-                      <a:headEnd type="none" w="med" len="med"/>
-                      <a:tailEnd type="none" w="med" len="med"/>
-                    </a:lnL>
-                    <a:lnR w="12700" cap="flat" cmpd="sng" algn="ctr">
-                      <a:solidFill>
-                        <a:schemeClr val="tx1"/>
-                      </a:solidFill>
-                      <a:prstDash val="solid"/>
-                      <a:round/>
-                      <a:headEnd type="none" w="med" len="med"/>
-                      <a:tailEnd type="none" w="med" len="med"/>
-                    </a:lnR>
-                    <a:lnT w="12700" cap="flat" cmpd="sng" algn="ctr">
-                      <a:solidFill>
-                        <a:schemeClr val="tx1"/>
-                      </a:solidFill>
-                      <a:prstDash val="solid"/>
-                      <a:round/>
-                      <a:headEnd type="none" w="med" len="med"/>
-                      <a:tailEnd type="none" w="med" len="med"/>
-                    </a:lnT>
-                    <a:lnB w="12700" cap="flat" cmpd="sng" algn="ctr">
-                      <a:solidFill>
-                        <a:schemeClr val="tx1"/>
-                      </a:solidFill>
-                      <a:prstDash val="solid"/>
-                      <a:round/>
-                      <a:headEnd type="none" w="med" len="med"/>
-                      <a:tailEnd type="none" w="med" len="med"/>
-                    </a:lnB>
-                    <a:lnTlToBr w="12700" cmpd="sng">
-                      <a:noFill/>
-                      <a:prstDash val="solid"/>
-                    </a:lnTlToBr>
-                    <a:lnBlToTr w="12700" cmpd="sng">
-                      <a:noFill/>
-                      <a:prstDash val="solid"/>
-                    </a:lnBlToTr>
-                    <a:solidFill>
-                      <a:schemeClr val="bg2"/>
-                    </a:solidFill>
-                  </a:tcPr>
-                </a:tc>
-                <a:tc>
-                  <a:txBody>
-                    <a:bodyPr/>
-                    <a:lstStyle/>
-                    <a:p>
-                      <a:r>
-                        <a:rPr lang="en-US" altLang="zh-CN" sz="1600" dirty="0" smtClean="0"/>
-                        <a:t>extent</a:t>
-                      </a:r>
-                      <a:endParaRPr lang="zh-CN" altLang="en-US" sz="1600" dirty="0"/>
+                      <a:endParaRPr lang="zh-CN" altLang="en-US" sz="1400" dirty="0"/>
                     </a:p>
                   </a:txBody>
                   <a:tcPr>
@@ -9525,10 +7910,10 @@
                     <a:lstStyle/>
                     <a:p>
                       <a:r>
-                        <a:rPr lang="en-US" altLang="zh-CN" sz="1600" dirty="0" smtClean="0"/>
+                        <a:rPr lang="en-US" altLang="zh-CN" sz="1400" dirty="0" smtClean="0"/>
                         <a:t>Free space</a:t>
                       </a:r>
-                      <a:endParaRPr lang="zh-CN" altLang="en-US" sz="1600" dirty="0"/>
+                      <a:endParaRPr lang="zh-CN" altLang="en-US" sz="1400" dirty="0"/>
                     </a:p>
                   </a:txBody>
                   <a:tcPr>
@@ -9587,10 +7972,10 @@
                     <a:lstStyle/>
                     <a:p>
                       <a:r>
-                        <a:rPr lang="en-US" altLang="zh-CN" sz="1600" dirty="0" smtClean="0"/>
+                        <a:rPr lang="en-US" altLang="zh-CN" sz="1400" dirty="0" smtClean="0"/>
                         <a:t>UINT32</a:t>
                       </a:r>
-                      <a:endParaRPr lang="zh-CN" altLang="en-US" sz="1600" dirty="0"/>
+                      <a:endParaRPr lang="zh-CN" altLang="en-US" sz="1400" dirty="0"/>
                     </a:p>
                   </a:txBody>
                   <a:tcPr>
@@ -9649,10 +8034,10 @@
                     <a:lstStyle/>
                     <a:p>
                       <a:r>
-                        <a:rPr lang="en-US" altLang="zh-CN" sz="1600" dirty="0" smtClean="0"/>
+                        <a:rPr lang="en-US" altLang="zh-CN" sz="1400" dirty="0" smtClean="0"/>
                         <a:t>4</a:t>
                       </a:r>
-                      <a:endParaRPr lang="zh-CN" altLang="en-US" sz="1600" dirty="0"/>
+                      <a:endParaRPr lang="zh-CN" altLang="en-US" sz="1400" dirty="0"/>
                     </a:p>
                   </a:txBody>
                   <a:tcPr>
@@ -9711,10 +8096,10 @@
                     <a:lstStyle/>
                     <a:p>
                       <a:r>
-                        <a:rPr lang="zh-CN" altLang="en-US" sz="1600" baseline="0" dirty="0" smtClean="0"/>
+                        <a:rPr lang="zh-CN" altLang="en-US" sz="1400" baseline="0" dirty="0" smtClean="0"/>
                         <a:t>总的剩余空间</a:t>
                       </a:r>
-                      <a:endParaRPr lang="en-US" altLang="zh-CN" sz="1600" baseline="0" dirty="0" smtClean="0"/>
+                      <a:endParaRPr lang="en-US" altLang="zh-CN" sz="1400" baseline="0" dirty="0" smtClean="0"/>
                     </a:p>
                   </a:txBody>
                   <a:tcPr>
@@ -9773,21 +8158,17 @@
                   </a:ext>
                 </a:extLst>
               </a:tr>
-              <a:tr h="177779">
-                <a:tc>
-                  <a:txBody>
-                    <a:bodyPr/>
-                    <a:lstStyle/>
-                    <a:p>
-                      <a:r>
-                        <a:rPr lang="en-US" altLang="zh-CN" sz="1600" dirty="0" smtClean="0"/>
-                        <a:t>Max free continuous</a:t>
-                      </a:r>
-                      <a:r>
-                        <a:rPr lang="en-US" altLang="zh-CN" sz="1600" baseline="0" dirty="0" smtClean="0"/>
-                        <a:t> space</a:t>
-                      </a:r>
-                      <a:endParaRPr lang="zh-CN" altLang="en-US" sz="1600" dirty="0"/>
+              <a:tr h="289560">
+                <a:tc>
+                  <a:txBody>
+                    <a:bodyPr/>
+                    <a:lstStyle/>
+                    <a:p>
+                      <a:r>
+                        <a:rPr lang="en-US" altLang="zh-CN" sz="1400" dirty="0" smtClean="0"/>
+                        <a:t>Begin Free Offset</a:t>
+                      </a:r>
+                      <a:endParaRPr lang="zh-CN" altLang="en-US" sz="1400" dirty="0"/>
                     </a:p>
                   </a:txBody>
                   <a:tcPr>
@@ -9846,10 +8227,10 @@
                     <a:lstStyle/>
                     <a:p>
                       <a:r>
-                        <a:rPr lang="en-US" altLang="zh-CN" sz="1600" dirty="0" smtClean="0"/>
+                        <a:rPr lang="en-US" altLang="zh-CN" sz="1400" dirty="0" smtClean="0"/>
                         <a:t>UINT32</a:t>
                       </a:r>
-                      <a:endParaRPr lang="zh-CN" altLang="en-US" sz="1600" dirty="0"/>
+                      <a:endParaRPr lang="zh-CN" altLang="en-US" sz="1400" dirty="0"/>
                     </a:p>
                   </a:txBody>
                   <a:tcPr>
@@ -9908,10 +8289,10 @@
                     <a:lstStyle/>
                     <a:p>
                       <a:r>
-                        <a:rPr lang="en-US" altLang="zh-CN" sz="1600" dirty="0" smtClean="0"/>
+                        <a:rPr lang="en-US" altLang="zh-CN" sz="1400" dirty="0" smtClean="0"/>
                         <a:t>4</a:t>
                       </a:r>
-                      <a:endParaRPr lang="zh-CN" altLang="en-US" sz="1600" dirty="0"/>
+                      <a:endParaRPr lang="zh-CN" altLang="en-US" sz="1400" dirty="0"/>
                     </a:p>
                   </a:txBody>
                   <a:tcPr>
@@ -9970,10 +8351,62 @@
                     <a:lstStyle/>
                     <a:p>
                       <a:r>
-                        <a:rPr lang="zh-CN" altLang="en-US" sz="1600" baseline="0" dirty="0" smtClean="0"/>
-                        <a:t>最大连续的剩余空间</a:t>
-                      </a:r>
-                      <a:endParaRPr lang="en-US" altLang="zh-CN" sz="1600" baseline="0" dirty="0" smtClean="0"/>
+                        <a:rPr lang="zh-CN" altLang="en-US" sz="1400" baseline="0" dirty="0" smtClean="0"/>
+                        <a:t>空闲空间开始位置偏移（从末尾往前推移）</a:t>
+                      </a:r>
+                      <a:endParaRPr lang="en-US" altLang="zh-CN" sz="1400" baseline="0" dirty="0" smtClean="0"/>
+                    </a:p>
+                    <a:p>
+                      <a:pPr marL="0" marR="0" indent="0" algn="l" defTabSz="914400" rtl="0" eaLnBrk="1" fontAlgn="auto" latinLnBrk="0" hangingPunct="1">
+                        <a:lnSpc>
+                          <a:spcPct val="100000"/>
+                        </a:lnSpc>
+                        <a:spcBef>
+                          <a:spcPts val="0"/>
+                        </a:spcBef>
+                        <a:spcAft>
+                          <a:spcPts val="0"/>
+                        </a:spcAft>
+                        <a:buClrTx/>
+                        <a:buSzTx/>
+                        <a:buFontTx/>
+                        <a:buNone/>
+                        <a:tabLst/>
+                        <a:defRPr/>
+                      </a:pPr>
+                      <a:r>
+                        <a:rPr lang="zh-CN" altLang="en-US" sz="1400" baseline="0" dirty="0" smtClean="0"/>
+                        <a:t>连续空闲空间</a:t>
+                      </a:r>
+                      <a:r>
+                        <a:rPr lang="en-US" altLang="zh-CN" sz="1400" baseline="0" dirty="0" smtClean="0"/>
+                        <a:t>=</a:t>
+                      </a:r>
+                      <a:r>
+                        <a:rPr lang="en-US" altLang="zh-CN" sz="1400" dirty="0" smtClean="0"/>
+                        <a:t>Begin Free Offset</a:t>
+                      </a:r>
+                      <a:r>
+                        <a:rPr lang="en-US" altLang="zh-CN" sz="1400" baseline="0" dirty="0" smtClean="0"/>
+                        <a:t> – </a:t>
+                      </a:r>
+                      <a:r>
+                        <a:rPr lang="en-US" altLang="zh-CN" sz="1400" baseline="0" dirty="0" err="1" smtClean="0"/>
+                        <a:t>DataExtentHeader</a:t>
+                      </a:r>
+                      <a:r>
+                        <a:rPr lang="en-US" altLang="zh-CN" sz="1400" baseline="0" dirty="0" smtClean="0"/>
+                        <a:t> – 4 </a:t>
+                      </a:r>
+                      <a:r>
+                        <a:rPr lang="zh-CN" altLang="en-US" sz="1400" baseline="0" dirty="0" smtClean="0"/>
+                        <a:t>* </a:t>
+                      </a:r>
+                      <a:r>
+                        <a:rPr lang="en-US" altLang="zh-CN" sz="1400" baseline="0" dirty="0" err="1" smtClean="0"/>
+                        <a:t>Slotnum</a:t>
+                      </a:r>
+                      <a:endParaRPr lang="zh-CN" altLang="en-US" sz="1400" dirty="0" smtClean="0"/>
                     </a:p>
                   </a:txBody>
                   <a:tcPr>
@@ -10039,10 +8472,14 @@
                     <a:lstStyle/>
                     <a:p>
                       <a:r>
-                        <a:rPr lang="en-US" altLang="zh-CN" sz="1600" dirty="0" smtClean="0"/>
-                        <a:t>reserved</a:t>
-                      </a:r>
-                      <a:endParaRPr lang="zh-CN" altLang="en-US" sz="1600" dirty="0"/>
+                        <a:rPr lang="en-US" altLang="zh-CN" sz="1400" dirty="0" smtClean="0"/>
+                        <a:t>record</a:t>
+                      </a:r>
+                      <a:r>
+                        <a:rPr lang="en-US" altLang="zh-CN" sz="1400" baseline="0" dirty="0" smtClean="0"/>
+                        <a:t> count</a:t>
+                      </a:r>
+                      <a:endParaRPr lang="zh-CN" altLang="en-US" sz="1400" dirty="0"/>
                     </a:p>
                   </a:txBody>
                   <a:tcPr>
@@ -10101,10 +8538,10 @@
                     <a:lstStyle/>
                     <a:p>
                       <a:r>
-                        <a:rPr lang="en-US" altLang="zh-CN" sz="1600" dirty="0" smtClean="0"/>
-                        <a:t>CHAR</a:t>
-                      </a:r>
-                      <a:endParaRPr lang="zh-CN" altLang="en-US" sz="1600" dirty="0"/>
+                        <a:rPr lang="en-US" altLang="zh-CN" sz="1400" dirty="0" smtClean="0"/>
+                        <a:t>UINT16</a:t>
+                      </a:r>
+                      <a:endParaRPr lang="zh-CN" altLang="en-US" sz="1400" dirty="0"/>
                     </a:p>
                   </a:txBody>
                   <a:tcPr>
@@ -10163,10 +8600,10 @@
                     <a:lstStyle/>
                     <a:p>
                       <a:r>
-                        <a:rPr lang="en-US" altLang="zh-CN" sz="1600" dirty="0" smtClean="0"/>
-                        <a:t>8</a:t>
-                      </a:r>
-                      <a:endParaRPr lang="zh-CN" altLang="en-US" sz="1600" dirty="0"/>
+                        <a:rPr lang="en-US" altLang="zh-CN" sz="1400" dirty="0" smtClean="0"/>
+                        <a:t>2</a:t>
+                      </a:r>
+                      <a:endParaRPr lang="zh-CN" altLang="en-US" sz="1400" dirty="0"/>
                     </a:p>
                   </a:txBody>
                   <a:tcPr>
@@ -10225,10 +8662,10 @@
                     <a:lstStyle/>
                     <a:p>
                       <a:r>
-                        <a:rPr lang="zh-CN" altLang="en-US" sz="1600" baseline="0" dirty="0" smtClean="0"/>
-                        <a:t>预留位</a:t>
-                      </a:r>
-                      <a:endParaRPr lang="en-US" altLang="zh-CN" sz="1600" baseline="0" dirty="0" smtClean="0"/>
+                        <a:rPr lang="zh-CN" altLang="en-US" sz="1400" dirty="0" smtClean="0"/>
+                        <a:t>记录数</a:t>
+                      </a:r>
+                      <a:endParaRPr lang="zh-CN" altLang="en-US" sz="1400" dirty="0"/>
                     </a:p>
                   </a:txBody>
                   <a:tcPr>
@@ -10287,21 +8724,21 @@
                   </a:ext>
                 </a:extLst>
               </a:tr>
-              <a:tr h="193040">
-                <a:tc>
-                  <a:txBody>
-                    <a:bodyPr/>
-                    <a:lstStyle/>
-                    <a:p>
-                      <a:r>
-                        <a:rPr lang="en-US" altLang="zh-CN" sz="1600" dirty="0" smtClean="0"/>
+              <a:tr h="167640">
+                <a:tc>
+                  <a:txBody>
+                    <a:bodyPr/>
+                    <a:lstStyle/>
+                    <a:p>
+                      <a:r>
+                        <a:rPr lang="en-US" altLang="zh-CN" sz="1400" dirty="0" smtClean="0"/>
                         <a:t>Slot </a:t>
                       </a:r>
                       <a:r>
-                        <a:rPr lang="en-US" altLang="zh-CN" sz="1600" dirty="0" err="1" smtClean="0"/>
+                        <a:rPr lang="en-US" altLang="zh-CN" sz="1400" dirty="0" err="1" smtClean="0"/>
                         <a:t>num</a:t>
                       </a:r>
-                      <a:endParaRPr lang="zh-CN" altLang="en-US" sz="1600" dirty="0"/>
+                      <a:endParaRPr lang="zh-CN" altLang="en-US" sz="1400" dirty="0"/>
                     </a:p>
                   </a:txBody>
                   <a:tcPr>
@@ -10360,10 +8797,10 @@
                     <a:lstStyle/>
                     <a:p>
                       <a:r>
-                        <a:rPr lang="en-US" altLang="zh-CN" sz="1600" dirty="0" smtClean="0"/>
-                        <a:t>UINT32</a:t>
-                      </a:r>
-                      <a:endParaRPr lang="zh-CN" altLang="en-US" sz="1600" dirty="0"/>
+                        <a:rPr lang="en-US" altLang="zh-CN" sz="1400" dirty="0" smtClean="0"/>
+                        <a:t>UINT16</a:t>
+                      </a:r>
+                      <a:endParaRPr lang="zh-CN" altLang="en-US" sz="1400" dirty="0"/>
                     </a:p>
                   </a:txBody>
                   <a:tcPr>
@@ -10422,10 +8859,10 @@
                     <a:lstStyle/>
                     <a:p>
                       <a:r>
-                        <a:rPr lang="en-US" altLang="zh-CN" sz="1600" dirty="0" smtClean="0"/>
-                        <a:t>4</a:t>
-                      </a:r>
-                      <a:endParaRPr lang="zh-CN" altLang="en-US" sz="1600" dirty="0"/>
+                        <a:rPr lang="en-US" altLang="zh-CN" sz="1400" dirty="0" smtClean="0"/>
+                        <a:t>2</a:t>
+                      </a:r>
+                      <a:endParaRPr lang="zh-CN" altLang="en-US" sz="1400" dirty="0"/>
                     </a:p>
                   </a:txBody>
                   <a:tcPr>
@@ -10484,18 +8921,18 @@
                     <a:lstStyle/>
                     <a:p>
                       <a:r>
-                        <a:rPr lang="zh-CN" altLang="en-US" sz="1600" baseline="0" dirty="0" smtClean="0"/>
+                        <a:rPr lang="zh-CN" altLang="en-US" sz="1400" baseline="0" dirty="0" smtClean="0"/>
                         <a:t>当前已分配</a:t>
                       </a:r>
                       <a:r>
-                        <a:rPr lang="en-US" altLang="zh-CN" sz="1600" baseline="0" dirty="0" smtClean="0"/>
+                        <a:rPr lang="en-US" altLang="zh-CN" sz="1400" baseline="0" dirty="0" smtClean="0"/>
                         <a:t>slot</a:t>
                       </a:r>
                       <a:r>
-                        <a:rPr lang="zh-CN" altLang="en-US" sz="1600" baseline="0" dirty="0" smtClean="0"/>
+                        <a:rPr lang="zh-CN" altLang="en-US" sz="1400" baseline="0" dirty="0" smtClean="0"/>
                         <a:t>个数</a:t>
                       </a:r>
-                      <a:endParaRPr lang="en-US" altLang="zh-CN" sz="1600" baseline="0" dirty="0" smtClean="0"/>
+                      <a:endParaRPr lang="en-US" altLang="zh-CN" sz="1400" baseline="0" dirty="0" smtClean="0"/>
                     </a:p>
                   </a:txBody>
                   <a:tcPr>
@@ -10554,17 +8991,17 @@
                   </a:ext>
                 </a:extLst>
               </a:tr>
-              <a:tr h="289560">
-                <a:tc>
-                  <a:txBody>
-                    <a:bodyPr/>
-                    <a:lstStyle/>
-                    <a:p>
-                      <a:r>
-                        <a:rPr lang="en-US" altLang="zh-CN" sz="1600" dirty="0" smtClean="0"/>
-                        <a:t>slots</a:t>
-                      </a:r>
-                      <a:endParaRPr lang="zh-CN" altLang="en-US" sz="1600" dirty="0"/>
+              <a:tr h="167640">
+                <a:tc>
+                  <a:txBody>
+                    <a:bodyPr/>
+                    <a:lstStyle/>
+                    <a:p>
+                      <a:r>
+                        <a:rPr lang="en-US" altLang="zh-CN" sz="1400" dirty="0" err="1" smtClean="0"/>
+                        <a:t>First_deleted_slot_idx</a:t>
+                      </a:r>
+                      <a:endParaRPr lang="zh-CN" altLang="en-US" sz="1400" dirty="0"/>
                     </a:p>
                   </a:txBody>
                   <a:tcPr>
@@ -10623,10 +9060,10 @@
                     <a:lstStyle/>
                     <a:p>
                       <a:r>
-                        <a:rPr lang="en-US" altLang="zh-CN" sz="1600" dirty="0" smtClean="0"/>
-                        <a:t>UINT32</a:t>
-                      </a:r>
-                      <a:endParaRPr lang="zh-CN" altLang="en-US" sz="1600" dirty="0"/>
+                        <a:rPr lang="en-US" altLang="zh-CN" sz="1400" dirty="0" smtClean="0"/>
+                        <a:t>UINT16</a:t>
+                      </a:r>
+                      <a:endParaRPr lang="zh-CN" altLang="en-US" sz="1400" dirty="0"/>
                     </a:p>
                   </a:txBody>
                   <a:tcPr>
@@ -10685,10 +9122,10 @@
                     <a:lstStyle/>
                     <a:p>
                       <a:r>
-                        <a:rPr lang="en-US" altLang="zh-CN" sz="1600" dirty="0" smtClean="0"/>
-                        <a:t>4 * N</a:t>
-                      </a:r>
-                      <a:endParaRPr lang="zh-CN" altLang="en-US" sz="1600" dirty="0"/>
+                        <a:rPr lang="en-US" altLang="zh-CN" sz="1400" dirty="0" smtClean="0"/>
+                        <a:t>2</a:t>
+                      </a:r>
+                      <a:endParaRPr lang="zh-CN" altLang="en-US" sz="1400" dirty="0"/>
                     </a:p>
                   </a:txBody>
                   <a:tcPr>
@@ -10747,19 +9184,282 @@
                     <a:lstStyle/>
                     <a:p>
                       <a:r>
-                        <a:rPr lang="zh-CN" altLang="en-US" sz="1600" baseline="0" dirty="0" smtClean="0"/>
+                        <a:rPr lang="zh-CN" altLang="en-US" sz="1400" baseline="0" dirty="0" smtClean="0"/>
+                        <a:t>第一个被删除的</a:t>
+                      </a:r>
+                      <a:r>
+                        <a:rPr lang="en-US" altLang="zh-CN" sz="1400" baseline="0" dirty="0" smtClean="0"/>
+                        <a:t>slot</a:t>
+                      </a:r>
+                      <a:r>
+                        <a:rPr lang="zh-CN" altLang="en-US" sz="1400" baseline="0" dirty="0" smtClean="0"/>
+                        <a:t>下标</a:t>
+                      </a:r>
+                      <a:endParaRPr lang="en-US" altLang="zh-CN" sz="1400" baseline="0" dirty="0" smtClean="0"/>
+                    </a:p>
+                  </a:txBody>
+                  <a:tcPr>
+                    <a:lnL w="12700" cap="flat" cmpd="sng" algn="ctr">
+                      <a:solidFill>
+                        <a:schemeClr val="tx1"/>
+                      </a:solidFill>
+                      <a:prstDash val="solid"/>
+                      <a:round/>
+                      <a:headEnd type="none" w="med" len="med"/>
+                      <a:tailEnd type="none" w="med" len="med"/>
+                    </a:lnL>
+                    <a:lnR w="12700" cap="flat" cmpd="sng" algn="ctr">
+                      <a:solidFill>
+                        <a:schemeClr val="tx1"/>
+                      </a:solidFill>
+                      <a:prstDash val="solid"/>
+                      <a:round/>
+                      <a:headEnd type="none" w="med" len="med"/>
+                      <a:tailEnd type="none" w="med" len="med"/>
+                    </a:lnR>
+                    <a:lnT w="12700" cap="flat" cmpd="sng" algn="ctr">
+                      <a:solidFill>
+                        <a:schemeClr val="tx1"/>
+                      </a:solidFill>
+                      <a:prstDash val="solid"/>
+                      <a:round/>
+                      <a:headEnd type="none" w="med" len="med"/>
+                      <a:tailEnd type="none" w="med" len="med"/>
+                    </a:lnT>
+                    <a:lnB w="12700" cap="flat" cmpd="sng" algn="ctr">
+                      <a:solidFill>
+                        <a:schemeClr val="tx1"/>
+                      </a:solidFill>
+                      <a:prstDash val="solid"/>
+                      <a:round/>
+                      <a:headEnd type="none" w="med" len="med"/>
+                      <a:tailEnd type="none" w="med" len="med"/>
+                    </a:lnB>
+                    <a:lnTlToBr w="12700" cmpd="sng">
+                      <a:noFill/>
+                      <a:prstDash val="solid"/>
+                    </a:lnTlToBr>
+                    <a:lnBlToTr w="12700" cmpd="sng">
+                      <a:noFill/>
+                      <a:prstDash val="solid"/>
+                    </a:lnBlToTr>
+                    <a:solidFill>
+                      <a:schemeClr val="bg2"/>
+                    </a:solidFill>
+                  </a:tcPr>
+                </a:tc>
+                <a:extLst>
+                  <a:ext uri="{0D108BD9-81ED-4DB2-BD59-A6C34878D82A}">
+                    <a16:rowId xmlns:a16="http://schemas.microsoft.com/office/drawing/2014/main" val="2002923265"/>
+                  </a:ext>
+                </a:extLst>
+              </a:tr>
+              <a:tr h="289560">
+                <a:tc>
+                  <a:txBody>
+                    <a:bodyPr/>
+                    <a:lstStyle/>
+                    <a:p>
+                      <a:r>
+                        <a:rPr lang="en-US" altLang="zh-CN" sz="1400" dirty="0" smtClean="0"/>
+                        <a:t>slots</a:t>
+                      </a:r>
+                      <a:endParaRPr lang="zh-CN" altLang="en-US" sz="1400" dirty="0"/>
+                    </a:p>
+                  </a:txBody>
+                  <a:tcPr>
+                    <a:lnL w="12700" cap="flat" cmpd="sng" algn="ctr">
+                      <a:solidFill>
+                        <a:schemeClr val="tx1"/>
+                      </a:solidFill>
+                      <a:prstDash val="solid"/>
+                      <a:round/>
+                      <a:headEnd type="none" w="med" len="med"/>
+                      <a:tailEnd type="none" w="med" len="med"/>
+                    </a:lnL>
+                    <a:lnR w="12700" cap="flat" cmpd="sng" algn="ctr">
+                      <a:solidFill>
+                        <a:schemeClr val="tx1"/>
+                      </a:solidFill>
+                      <a:prstDash val="solid"/>
+                      <a:round/>
+                      <a:headEnd type="none" w="med" len="med"/>
+                      <a:tailEnd type="none" w="med" len="med"/>
+                    </a:lnR>
+                    <a:lnT w="12700" cap="flat" cmpd="sng" algn="ctr">
+                      <a:solidFill>
+                        <a:schemeClr val="tx1"/>
+                      </a:solidFill>
+                      <a:prstDash val="solid"/>
+                      <a:round/>
+                      <a:headEnd type="none" w="med" len="med"/>
+                      <a:tailEnd type="none" w="med" len="med"/>
+                    </a:lnT>
+                    <a:lnB w="12700" cap="flat" cmpd="sng" algn="ctr">
+                      <a:solidFill>
+                        <a:schemeClr val="tx1"/>
+                      </a:solidFill>
+                      <a:prstDash val="solid"/>
+                      <a:round/>
+                      <a:headEnd type="none" w="med" len="med"/>
+                      <a:tailEnd type="none" w="med" len="med"/>
+                    </a:lnB>
+                    <a:lnTlToBr w="12700" cmpd="sng">
+                      <a:noFill/>
+                      <a:prstDash val="solid"/>
+                    </a:lnTlToBr>
+                    <a:lnBlToTr w="12700" cmpd="sng">
+                      <a:noFill/>
+                      <a:prstDash val="solid"/>
+                    </a:lnBlToTr>
+                    <a:solidFill>
+                      <a:schemeClr val="bg2"/>
+                    </a:solidFill>
+                  </a:tcPr>
+                </a:tc>
+                <a:tc>
+                  <a:txBody>
+                    <a:bodyPr/>
+                    <a:lstStyle/>
+                    <a:p>
+                      <a:r>
+                        <a:rPr lang="en-US" altLang="zh-CN" sz="1400" dirty="0" smtClean="0"/>
+                        <a:t>UINT32</a:t>
+                      </a:r>
+                      <a:endParaRPr lang="zh-CN" altLang="en-US" sz="1400" dirty="0"/>
+                    </a:p>
+                  </a:txBody>
+                  <a:tcPr>
+                    <a:lnL w="12700" cap="flat" cmpd="sng" algn="ctr">
+                      <a:solidFill>
+                        <a:schemeClr val="tx1"/>
+                      </a:solidFill>
+                      <a:prstDash val="solid"/>
+                      <a:round/>
+                      <a:headEnd type="none" w="med" len="med"/>
+                      <a:tailEnd type="none" w="med" len="med"/>
+                    </a:lnL>
+                    <a:lnR w="12700" cap="flat" cmpd="sng" algn="ctr">
+                      <a:solidFill>
+                        <a:schemeClr val="tx1"/>
+                      </a:solidFill>
+                      <a:prstDash val="solid"/>
+                      <a:round/>
+                      <a:headEnd type="none" w="med" len="med"/>
+                      <a:tailEnd type="none" w="med" len="med"/>
+                    </a:lnR>
+                    <a:lnT w="12700" cap="flat" cmpd="sng" algn="ctr">
+                      <a:solidFill>
+                        <a:schemeClr val="tx1"/>
+                      </a:solidFill>
+                      <a:prstDash val="solid"/>
+                      <a:round/>
+                      <a:headEnd type="none" w="med" len="med"/>
+                      <a:tailEnd type="none" w="med" len="med"/>
+                    </a:lnT>
+                    <a:lnB w="12700" cap="flat" cmpd="sng" algn="ctr">
+                      <a:solidFill>
+                        <a:schemeClr val="tx1"/>
+                      </a:solidFill>
+                      <a:prstDash val="solid"/>
+                      <a:round/>
+                      <a:headEnd type="none" w="med" len="med"/>
+                      <a:tailEnd type="none" w="med" len="med"/>
+                    </a:lnB>
+                    <a:lnTlToBr w="12700" cmpd="sng">
+                      <a:noFill/>
+                      <a:prstDash val="solid"/>
+                    </a:lnTlToBr>
+                    <a:lnBlToTr w="12700" cmpd="sng">
+                      <a:noFill/>
+                      <a:prstDash val="solid"/>
+                    </a:lnBlToTr>
+                    <a:solidFill>
+                      <a:schemeClr val="bg2"/>
+                    </a:solidFill>
+                  </a:tcPr>
+                </a:tc>
+                <a:tc>
+                  <a:txBody>
+                    <a:bodyPr/>
+                    <a:lstStyle/>
+                    <a:p>
+                      <a:r>
+                        <a:rPr lang="en-US" altLang="zh-CN" sz="1400" dirty="0" smtClean="0"/>
+                        <a:t>4 * N</a:t>
+                      </a:r>
+                      <a:endParaRPr lang="zh-CN" altLang="en-US" sz="1400" dirty="0"/>
+                    </a:p>
+                  </a:txBody>
+                  <a:tcPr>
+                    <a:lnL w="12700" cap="flat" cmpd="sng" algn="ctr">
+                      <a:solidFill>
+                        <a:schemeClr val="tx1"/>
+                      </a:solidFill>
+                      <a:prstDash val="solid"/>
+                      <a:round/>
+                      <a:headEnd type="none" w="med" len="med"/>
+                      <a:tailEnd type="none" w="med" len="med"/>
+                    </a:lnL>
+                    <a:lnR w="12700" cap="flat" cmpd="sng" algn="ctr">
+                      <a:solidFill>
+                        <a:schemeClr val="tx1"/>
+                      </a:solidFill>
+                      <a:prstDash val="solid"/>
+                      <a:round/>
+                      <a:headEnd type="none" w="med" len="med"/>
+                      <a:tailEnd type="none" w="med" len="med"/>
+                    </a:lnR>
+                    <a:lnT w="12700" cap="flat" cmpd="sng" algn="ctr">
+                      <a:solidFill>
+                        <a:schemeClr val="tx1"/>
+                      </a:solidFill>
+                      <a:prstDash val="solid"/>
+                      <a:round/>
+                      <a:headEnd type="none" w="med" len="med"/>
+                      <a:tailEnd type="none" w="med" len="med"/>
+                    </a:lnT>
+                    <a:lnB w="12700" cap="flat" cmpd="sng" algn="ctr">
+                      <a:solidFill>
+                        <a:schemeClr val="tx1"/>
+                      </a:solidFill>
+                      <a:prstDash val="solid"/>
+                      <a:round/>
+                      <a:headEnd type="none" w="med" len="med"/>
+                      <a:tailEnd type="none" w="med" len="med"/>
+                    </a:lnB>
+                    <a:lnTlToBr w="12700" cmpd="sng">
+                      <a:noFill/>
+                      <a:prstDash val="solid"/>
+                    </a:lnTlToBr>
+                    <a:lnBlToTr w="12700" cmpd="sng">
+                      <a:noFill/>
+                      <a:prstDash val="solid"/>
+                    </a:lnBlToTr>
+                    <a:solidFill>
+                      <a:schemeClr val="bg2"/>
+                    </a:solidFill>
+                  </a:tcPr>
+                </a:tc>
+                <a:tc>
+                  <a:txBody>
+                    <a:bodyPr/>
+                    <a:lstStyle/>
+                    <a:p>
+                      <a:r>
+                        <a:rPr lang="zh-CN" altLang="en-US" sz="1400" baseline="0" dirty="0" smtClean="0"/>
                         <a:t>记录</a:t>
                       </a:r>
                       <a:r>
-                        <a:rPr lang="en-US" altLang="zh-CN" sz="1600" baseline="0" dirty="0" smtClean="0"/>
+                        <a:rPr lang="en-US" altLang="zh-CN" sz="1400" baseline="0" dirty="0" smtClean="0"/>
                         <a:t>Extent</a:t>
                       </a:r>
                       <a:r>
-                        <a:rPr lang="zh-CN" altLang="en-US" sz="1600" baseline="0" dirty="0" smtClean="0"/>
+                        <a:rPr lang="zh-CN" altLang="en-US" sz="1400" baseline="0" dirty="0" smtClean="0"/>
                         <a:t>内偏移地址。有几条记录则记录几个</a:t>
                       </a:r>
                       <a:r>
-                        <a:rPr lang="en-US" altLang="zh-CN" sz="1600" baseline="0" dirty="0" smtClean="0"/>
+                        <a:rPr lang="en-US" altLang="zh-CN" sz="1400" baseline="0" dirty="0" smtClean="0"/>
                         <a:t>slot</a:t>
                       </a:r>
                     </a:p>
@@ -10827,10 +9527,10 @@
                     <a:lstStyle/>
                     <a:p>
                       <a:r>
-                        <a:rPr lang="en-US" altLang="zh-CN" sz="1600" dirty="0" smtClean="0"/>
+                        <a:rPr lang="en-US" altLang="zh-CN" sz="1400" dirty="0" smtClean="0"/>
                         <a:t>data</a:t>
                       </a:r>
-                      <a:endParaRPr lang="zh-CN" altLang="en-US" sz="1600" dirty="0"/>
+                      <a:endParaRPr lang="zh-CN" altLang="en-US" sz="1400" dirty="0"/>
                     </a:p>
                   </a:txBody>
                   <a:tcPr>
@@ -10889,10 +9589,10 @@
                     <a:lstStyle/>
                     <a:p>
                       <a:r>
-                        <a:rPr lang="en-US" altLang="zh-CN" sz="1600" dirty="0" smtClean="0"/>
+                        <a:rPr lang="en-US" altLang="zh-CN" sz="1400" dirty="0" smtClean="0"/>
                         <a:t>BYTES</a:t>
                       </a:r>
-                      <a:endParaRPr lang="zh-CN" altLang="en-US" sz="1600" dirty="0"/>
+                      <a:endParaRPr lang="zh-CN" altLang="en-US" sz="1400" dirty="0"/>
                     </a:p>
                   </a:txBody>
                   <a:tcPr>
@@ -10950,7 +9650,7 @@
                     <a:bodyPr/>
                     <a:lstStyle/>
                     <a:p>
-                      <a:endParaRPr lang="zh-CN" altLang="en-US" sz="1600" dirty="0"/>
+                      <a:endParaRPr lang="zh-CN" altLang="en-US" sz="1400" dirty="0"/>
                     </a:p>
                   </a:txBody>
                   <a:tcPr>
@@ -11009,10 +9709,10 @@
                     <a:lstStyle/>
                     <a:p>
                       <a:r>
-                        <a:rPr lang="zh-CN" altLang="en-US" sz="1600" baseline="0" dirty="0" smtClean="0"/>
+                        <a:rPr lang="zh-CN" altLang="en-US" sz="1400" baseline="0" dirty="0" smtClean="0"/>
                         <a:t>数据</a:t>
                       </a:r>
-                      <a:endParaRPr lang="en-US" altLang="zh-CN" sz="1600" baseline="0" dirty="0" smtClean="0"/>
+                      <a:endParaRPr lang="en-US" altLang="zh-CN" sz="1400" baseline="0" dirty="0" smtClean="0"/>
                     </a:p>
                   </a:txBody>
                   <a:tcPr>
@@ -11084,7 +9784,7 @@
           <p:nvPr>
             <p:extLst>
               <p:ext uri="{D42A27DB-BD31-4B8C-83A1-F6EECF244321}">
-                <p14:modId xmlns:p14="http://schemas.microsoft.com/office/powerpoint/2010/main" val="516339406"/>
+                <p14:modId xmlns:p14="http://schemas.microsoft.com/office/powerpoint/2010/main" val="4103650086"/>
               </p:ext>
             </p:extLst>
           </p:nvPr>
@@ -11321,6 +10021,14 @@
                     <a:lstStyle/>
                     <a:p>
                       <a:pPr algn="ctr"/>
+                      <a:r>
+                        <a:rPr lang="zh-CN" altLang="en-US" sz="1600" b="0" dirty="0" smtClean="0">
+                          <a:solidFill>
+                            <a:schemeClr val="tx1"/>
+                          </a:solidFill>
+                        </a:rPr>
+                        <a:t>空闲空间</a:t>
+                      </a:r>
                       <a:endParaRPr lang="zh-CN" altLang="en-US" sz="1600" b="0" dirty="0">
                         <a:solidFill>
                           <a:schemeClr val="tx1"/>
@@ -11752,6 +10460,73 @@
           </a:fontRef>
         </p:style>
       </p:cxnSp>
+      <p:cxnSp>
+        <p:nvCxnSpPr>
+          <p:cNvPr id="6" name="直接箭头连接符 5"/>
+          <p:cNvCxnSpPr/>
+          <p:nvPr/>
+        </p:nvCxnSpPr>
+        <p:spPr>
+          <a:xfrm flipV="1">
+            <a:off x="8538358" y="4429673"/>
+            <a:ext cx="0" cy="807345"/>
+          </a:xfrm>
+          <a:prstGeom prst="straightConnector1">
+            <a:avLst/>
+          </a:prstGeom>
+          <a:ln>
+            <a:tailEnd type="triangle"/>
+          </a:ln>
+        </p:spPr>
+        <p:style>
+          <a:lnRef idx="1">
+            <a:schemeClr val="accent1"/>
+          </a:lnRef>
+          <a:fillRef idx="0">
+            <a:schemeClr val="accent1"/>
+          </a:fillRef>
+          <a:effectRef idx="0">
+            <a:schemeClr val="accent1"/>
+          </a:effectRef>
+          <a:fontRef idx="minor">
+            <a:schemeClr val="tx1"/>
+          </a:fontRef>
+        </p:style>
+      </p:cxnSp>
+      <p:sp>
+        <p:nvSpPr>
+          <p:cNvPr id="8" name="文本框 7"/>
+          <p:cNvSpPr txBox="1"/>
+          <p:nvPr/>
+        </p:nvSpPr>
+        <p:spPr>
+          <a:xfrm>
+            <a:off x="8464847" y="4867686"/>
+            <a:ext cx="1805302" cy="369332"/>
+          </a:xfrm>
+          <a:prstGeom prst="rect">
+            <a:avLst/>
+          </a:prstGeom>
+          <a:noFill/>
+        </p:spPr>
+        <p:txBody>
+          <a:bodyPr wrap="none" rtlCol="0">
+            <a:spAutoFit/>
+          </a:bodyPr>
+          <a:lstStyle/>
+          <a:p>
+            <a:r>
+              <a:rPr lang="en-US" altLang="zh-CN" dirty="0"/>
+              <a:t>Begin</a:t>
+            </a:r>
+            <a:r>
+              <a:rPr lang="en-US" altLang="zh-CN" dirty="0" smtClean="0"/>
+              <a:t> free offset</a:t>
+            </a:r>
+            <a:endParaRPr lang="zh-CN" altLang="en-US" dirty="0"/>
+          </a:p>
+        </p:txBody>
+      </p:sp>
     </p:spTree>
     <p:extLst>
       <p:ext uri="{BB962C8B-B14F-4D97-AF65-F5344CB8AC3E}">
@@ -11806,6 +10581,2071 @@
           <a:p>
             <a:r>
               <a:rPr lang="en-US" altLang="zh-CN" dirty="0" smtClean="0"/>
+              <a:t>Data Extent</a:t>
+            </a:r>
+            <a:r>
+              <a:rPr lang="zh-CN" altLang="en-US" dirty="0" smtClean="0"/>
+              <a:t>空间</a:t>
+            </a:r>
+            <a:r>
+              <a:rPr lang="en-US" altLang="zh-CN" smtClean="0"/>
+              <a:t>compact</a:t>
+            </a:r>
+            <a:endParaRPr lang="zh-CN" altLang="en-US" dirty="0"/>
+          </a:p>
+        </p:txBody>
+      </p:sp>
+      <p:graphicFrame>
+        <p:nvGraphicFramePr>
+          <p:cNvPr id="4" name="表格 3"/>
+          <p:cNvGraphicFramePr>
+            <a:graphicFrameLocks noGrp="1"/>
+          </p:cNvGraphicFramePr>
+          <p:nvPr>
+            <p:extLst>
+              <p:ext uri="{D42A27DB-BD31-4B8C-83A1-F6EECF244321}">
+                <p14:modId xmlns:p14="http://schemas.microsoft.com/office/powerpoint/2010/main" val="1050735036"/>
+              </p:ext>
+            </p:extLst>
+          </p:nvPr>
+        </p:nvGraphicFramePr>
+        <p:xfrm>
+          <a:off x="838200" y="2035313"/>
+          <a:ext cx="3761772" cy="1732014"/>
+        </p:xfrm>
+        <a:graphic>
+          <a:graphicData uri="http://schemas.openxmlformats.org/drawingml/2006/table">
+            <a:tbl>
+              <a:tblPr firstRow="1" bandRow="1">
+                <a:tableStyleId>{5C22544A-7EE6-4342-B048-85BDC9FD1C3A}</a:tableStyleId>
+              </a:tblPr>
+              <a:tblGrid>
+                <a:gridCol w="940443">
+                  <a:extLst>
+                    <a:ext uri="{9D8B030D-6E8A-4147-A177-3AD203B41FA5}">
+                      <a16:colId xmlns:a16="http://schemas.microsoft.com/office/drawing/2014/main" val="226489393"/>
+                    </a:ext>
+                  </a:extLst>
+                </a:gridCol>
+                <a:gridCol w="940443">
+                  <a:extLst>
+                    <a:ext uri="{9D8B030D-6E8A-4147-A177-3AD203B41FA5}">
+                      <a16:colId xmlns:a16="http://schemas.microsoft.com/office/drawing/2014/main" val="3315947240"/>
+                    </a:ext>
+                  </a:extLst>
+                </a:gridCol>
+                <a:gridCol w="940443">
+                  <a:extLst>
+                    <a:ext uri="{9D8B030D-6E8A-4147-A177-3AD203B41FA5}">
+                      <a16:colId xmlns:a16="http://schemas.microsoft.com/office/drawing/2014/main" val="4175610667"/>
+                    </a:ext>
+                  </a:extLst>
+                </a:gridCol>
+                <a:gridCol w="940443">
+                  <a:extLst>
+                    <a:ext uri="{9D8B030D-6E8A-4147-A177-3AD203B41FA5}">
+                      <a16:colId xmlns:a16="http://schemas.microsoft.com/office/drawing/2014/main" val="3198216487"/>
+                    </a:ext>
+                  </a:extLst>
+                </a:gridCol>
+              </a:tblGrid>
+              <a:tr h="576447">
+                <a:tc>
+                  <a:txBody>
+                    <a:bodyPr/>
+                    <a:lstStyle/>
+                    <a:p>
+                      <a:pPr algn="ctr"/>
+                      <a:r>
+                        <a:rPr lang="en-US" altLang="zh-CN" sz="1600" b="0" dirty="0" smtClean="0">
+                          <a:solidFill>
+                            <a:schemeClr val="tx1"/>
+                          </a:solidFill>
+                        </a:rPr>
+                        <a:t>-1</a:t>
+                      </a:r>
+                      <a:endParaRPr lang="zh-CN" altLang="en-US" sz="1600" b="0" dirty="0">
+                        <a:solidFill>
+                          <a:schemeClr val="tx1"/>
+                        </a:solidFill>
+                      </a:endParaRPr>
+                    </a:p>
+                  </a:txBody>
+                  <a:tcPr>
+                    <a:lnL w="12700" cap="flat" cmpd="sng" algn="ctr">
+                      <a:solidFill>
+                        <a:schemeClr val="tx1"/>
+                      </a:solidFill>
+                      <a:prstDash val="solid"/>
+                      <a:round/>
+                      <a:headEnd type="none" w="med" len="med"/>
+                      <a:tailEnd type="none" w="med" len="med"/>
+                    </a:lnL>
+                    <a:lnR w="12700" cap="flat" cmpd="sng" algn="ctr">
+                      <a:solidFill>
+                        <a:schemeClr val="tx1"/>
+                      </a:solidFill>
+                      <a:prstDash val="solid"/>
+                      <a:round/>
+                      <a:headEnd type="none" w="med" len="med"/>
+                      <a:tailEnd type="none" w="med" len="med"/>
+                    </a:lnR>
+                    <a:lnT w="12700" cap="flat" cmpd="sng" algn="ctr">
+                      <a:solidFill>
+                        <a:schemeClr val="tx1"/>
+                      </a:solidFill>
+                      <a:prstDash val="solid"/>
+                      <a:round/>
+                      <a:headEnd type="none" w="med" len="med"/>
+                      <a:tailEnd type="none" w="med" len="med"/>
+                    </a:lnT>
+                    <a:lnB w="12700" cap="flat" cmpd="sng" algn="ctr">
+                      <a:solidFill>
+                        <a:schemeClr val="tx1"/>
+                      </a:solidFill>
+                      <a:prstDash val="solid"/>
+                      <a:round/>
+                      <a:headEnd type="none" w="med" len="med"/>
+                      <a:tailEnd type="none" w="med" len="med"/>
+                    </a:lnB>
+                    <a:solidFill>
+                      <a:srgbClr val="FF0000"/>
+                    </a:solidFill>
+                  </a:tcPr>
+                </a:tc>
+                <a:tc>
+                  <a:txBody>
+                    <a:bodyPr/>
+                    <a:lstStyle/>
+                    <a:p>
+                      <a:pPr algn="ctr"/>
+                      <a:r>
+                        <a:rPr lang="en-US" altLang="zh-CN" sz="1600" b="0" dirty="0" smtClean="0">
+                          <a:solidFill>
+                            <a:schemeClr val="tx1"/>
+                          </a:solidFill>
+                        </a:rPr>
+                        <a:t>offset1</a:t>
+                      </a:r>
+                      <a:endParaRPr lang="zh-CN" altLang="en-US" sz="1600" b="0" dirty="0">
+                        <a:solidFill>
+                          <a:schemeClr val="tx1"/>
+                        </a:solidFill>
+                      </a:endParaRPr>
+                    </a:p>
+                  </a:txBody>
+                  <a:tcPr>
+                    <a:lnL w="12700" cap="flat" cmpd="sng" algn="ctr">
+                      <a:solidFill>
+                        <a:schemeClr val="tx1"/>
+                      </a:solidFill>
+                      <a:prstDash val="solid"/>
+                      <a:round/>
+                      <a:headEnd type="none" w="med" len="med"/>
+                      <a:tailEnd type="none" w="med" len="med"/>
+                    </a:lnL>
+                    <a:lnR w="12700" cap="flat" cmpd="sng" algn="ctr">
+                      <a:solidFill>
+                        <a:schemeClr val="tx1"/>
+                      </a:solidFill>
+                      <a:prstDash val="solid"/>
+                      <a:round/>
+                      <a:headEnd type="none" w="med" len="med"/>
+                      <a:tailEnd type="none" w="med" len="med"/>
+                    </a:lnR>
+                    <a:lnT w="12700" cap="flat" cmpd="sng" algn="ctr">
+                      <a:solidFill>
+                        <a:schemeClr val="tx1"/>
+                      </a:solidFill>
+                      <a:prstDash val="solid"/>
+                      <a:round/>
+                      <a:headEnd type="none" w="med" len="med"/>
+                      <a:tailEnd type="none" w="med" len="med"/>
+                    </a:lnT>
+                    <a:lnB w="12700" cap="flat" cmpd="sng" algn="ctr">
+                      <a:solidFill>
+                        <a:schemeClr val="tx1"/>
+                      </a:solidFill>
+                      <a:prstDash val="solid"/>
+                      <a:round/>
+                      <a:headEnd type="none" w="med" len="med"/>
+                      <a:tailEnd type="none" w="med" len="med"/>
+                    </a:lnB>
+                    <a:solidFill>
+                      <a:schemeClr val="accent4">
+                        <a:lumMod val="60000"/>
+                        <a:lumOff val="40000"/>
+                      </a:schemeClr>
+                    </a:solidFill>
+                  </a:tcPr>
+                </a:tc>
+                <a:tc>
+                  <a:txBody>
+                    <a:bodyPr/>
+                    <a:lstStyle/>
+                    <a:p>
+                      <a:pPr algn="ctr"/>
+                      <a:r>
+                        <a:rPr lang="en-US" altLang="zh-CN" sz="1600" b="0" dirty="0" smtClean="0">
+                          <a:solidFill>
+                            <a:schemeClr val="tx1"/>
+                          </a:solidFill>
+                        </a:rPr>
+                        <a:t>offset2</a:t>
+                      </a:r>
+                      <a:endParaRPr lang="zh-CN" altLang="en-US" sz="1600" b="0" dirty="0">
+                        <a:solidFill>
+                          <a:schemeClr val="tx1"/>
+                        </a:solidFill>
+                      </a:endParaRPr>
+                    </a:p>
+                  </a:txBody>
+                  <a:tcPr>
+                    <a:lnL w="12700" cap="flat" cmpd="sng" algn="ctr">
+                      <a:solidFill>
+                        <a:schemeClr val="tx1"/>
+                      </a:solidFill>
+                      <a:prstDash val="solid"/>
+                      <a:round/>
+                      <a:headEnd type="none" w="med" len="med"/>
+                      <a:tailEnd type="none" w="med" len="med"/>
+                    </a:lnL>
+                    <a:lnR w="12700" cap="flat" cmpd="sng" algn="ctr">
+                      <a:solidFill>
+                        <a:schemeClr val="tx1"/>
+                      </a:solidFill>
+                      <a:prstDash val="solid"/>
+                      <a:round/>
+                      <a:headEnd type="none" w="med" len="med"/>
+                      <a:tailEnd type="none" w="med" len="med"/>
+                    </a:lnR>
+                    <a:lnT w="12700" cap="flat" cmpd="sng" algn="ctr">
+                      <a:solidFill>
+                        <a:schemeClr val="tx1"/>
+                      </a:solidFill>
+                      <a:prstDash val="solid"/>
+                      <a:round/>
+                      <a:headEnd type="none" w="med" len="med"/>
+                      <a:tailEnd type="none" w="med" len="med"/>
+                    </a:lnT>
+                    <a:lnB w="12700" cap="flat" cmpd="sng" algn="ctr">
+                      <a:solidFill>
+                        <a:schemeClr val="tx1"/>
+                      </a:solidFill>
+                      <a:prstDash val="solid"/>
+                      <a:round/>
+                      <a:headEnd type="none" w="med" len="med"/>
+                      <a:tailEnd type="none" w="med" len="med"/>
+                    </a:lnB>
+                    <a:solidFill>
+                      <a:schemeClr val="accent2"/>
+                    </a:solidFill>
+                  </a:tcPr>
+                </a:tc>
+                <a:tc>
+                  <a:txBody>
+                    <a:bodyPr/>
+                    <a:lstStyle/>
+                    <a:p>
+                      <a:pPr algn="ctr"/>
+                      <a:endParaRPr lang="zh-CN" altLang="en-US" sz="1600" b="0" dirty="0">
+                        <a:solidFill>
+                          <a:schemeClr val="tx1"/>
+                        </a:solidFill>
+                      </a:endParaRPr>
+                    </a:p>
+                  </a:txBody>
+                  <a:tcPr>
+                    <a:lnL w="12700" cap="flat" cmpd="sng" algn="ctr">
+                      <a:solidFill>
+                        <a:schemeClr val="tx1"/>
+                      </a:solidFill>
+                      <a:prstDash val="solid"/>
+                      <a:round/>
+                      <a:headEnd type="none" w="med" len="med"/>
+                      <a:tailEnd type="none" w="med" len="med"/>
+                    </a:lnL>
+                    <a:lnR w="12700" cap="flat" cmpd="sng" algn="ctr">
+                      <a:solidFill>
+                        <a:schemeClr val="tx1"/>
+                      </a:solidFill>
+                      <a:prstDash val="solid"/>
+                      <a:round/>
+                      <a:headEnd type="none" w="med" len="med"/>
+                      <a:tailEnd type="none" w="med" len="med"/>
+                    </a:lnR>
+                    <a:lnT w="12700" cap="flat" cmpd="sng" algn="ctr">
+                      <a:solidFill>
+                        <a:schemeClr val="tx1"/>
+                      </a:solidFill>
+                      <a:prstDash val="solid"/>
+                      <a:round/>
+                      <a:headEnd type="none" w="med" len="med"/>
+                      <a:tailEnd type="none" w="med" len="med"/>
+                    </a:lnT>
+                    <a:lnB w="12700" cap="flat" cmpd="sng" algn="ctr">
+                      <a:solidFill>
+                        <a:schemeClr val="tx1"/>
+                      </a:solidFill>
+                      <a:prstDash val="solid"/>
+                      <a:round/>
+                      <a:headEnd type="none" w="med" len="med"/>
+                      <a:tailEnd type="none" w="med" len="med"/>
+                    </a:lnB>
+                    <a:solidFill>
+                      <a:schemeClr val="accent5"/>
+                    </a:solidFill>
+                  </a:tcPr>
+                </a:tc>
+                <a:extLst>
+                  <a:ext uri="{0D108BD9-81ED-4DB2-BD59-A6C34878D82A}">
+                    <a16:rowId xmlns:a16="http://schemas.microsoft.com/office/drawing/2014/main" val="621460894"/>
+                  </a:ext>
+                </a:extLst>
+              </a:tr>
+              <a:tr h="576447">
+                <a:tc gridSpan="3">
+                  <a:txBody>
+                    <a:bodyPr/>
+                    <a:lstStyle/>
+                    <a:p>
+                      <a:pPr algn="ctr"/>
+                      <a:r>
+                        <a:rPr lang="zh-CN" altLang="en-US" sz="1600" b="0" dirty="0" smtClean="0">
+                          <a:solidFill>
+                            <a:schemeClr val="tx1"/>
+                          </a:solidFill>
+                        </a:rPr>
+                        <a:t>空闲空间</a:t>
+                      </a:r>
+                      <a:endParaRPr lang="zh-CN" altLang="en-US" sz="1600" b="0" dirty="0">
+                        <a:solidFill>
+                          <a:schemeClr val="tx1"/>
+                        </a:solidFill>
+                      </a:endParaRPr>
+                    </a:p>
+                  </a:txBody>
+                  <a:tcPr>
+                    <a:lnL w="12700" cap="flat" cmpd="sng" algn="ctr">
+                      <a:solidFill>
+                        <a:schemeClr val="tx1"/>
+                      </a:solidFill>
+                      <a:prstDash val="solid"/>
+                      <a:round/>
+                      <a:headEnd type="none" w="med" len="med"/>
+                      <a:tailEnd type="none" w="med" len="med"/>
+                    </a:lnL>
+                    <a:lnR w="12700" cap="flat" cmpd="sng" algn="ctr">
+                      <a:solidFill>
+                        <a:schemeClr val="tx1"/>
+                      </a:solidFill>
+                      <a:prstDash val="solid"/>
+                      <a:round/>
+                      <a:headEnd type="none" w="med" len="med"/>
+                      <a:tailEnd type="none" w="med" len="med"/>
+                    </a:lnR>
+                    <a:lnT w="12700" cap="flat" cmpd="sng" algn="ctr">
+                      <a:solidFill>
+                        <a:schemeClr val="tx1"/>
+                      </a:solidFill>
+                      <a:prstDash val="solid"/>
+                      <a:round/>
+                      <a:headEnd type="none" w="med" len="med"/>
+                      <a:tailEnd type="none" w="med" len="med"/>
+                    </a:lnT>
+                    <a:lnB w="12700" cap="flat" cmpd="sng" algn="ctr">
+                      <a:solidFill>
+                        <a:schemeClr val="tx1"/>
+                      </a:solidFill>
+                      <a:prstDash val="solid"/>
+                      <a:round/>
+                      <a:headEnd type="none" w="med" len="med"/>
+                      <a:tailEnd type="none" w="med" len="med"/>
+                    </a:lnB>
+                    <a:solidFill>
+                      <a:schemeClr val="accent5"/>
+                    </a:solidFill>
+                  </a:tcPr>
+                </a:tc>
+                <a:tc hMerge="1">
+                  <a:txBody>
+                    <a:bodyPr/>
+                    <a:lstStyle/>
+                    <a:p>
+                      <a:pPr algn="ctr"/>
+                      <a:endParaRPr lang="zh-CN" altLang="en-US" sz="1600" b="0" dirty="0">
+                        <a:solidFill>
+                          <a:schemeClr val="tx1"/>
+                        </a:solidFill>
+                      </a:endParaRPr>
+                    </a:p>
+                  </a:txBody>
+                  <a:tcPr>
+                    <a:lnL w="12700" cap="flat" cmpd="sng" algn="ctr">
+                      <a:solidFill>
+                        <a:schemeClr val="tx1"/>
+                      </a:solidFill>
+                      <a:prstDash val="solid"/>
+                      <a:round/>
+                      <a:headEnd type="none" w="med" len="med"/>
+                      <a:tailEnd type="none" w="med" len="med"/>
+                    </a:lnL>
+                    <a:lnR w="12700" cap="flat" cmpd="sng" algn="ctr">
+                      <a:solidFill>
+                        <a:schemeClr val="tx1"/>
+                      </a:solidFill>
+                      <a:prstDash val="solid"/>
+                      <a:round/>
+                      <a:headEnd type="none" w="med" len="med"/>
+                      <a:tailEnd type="none" w="med" len="med"/>
+                    </a:lnR>
+                    <a:lnT w="12700" cap="flat" cmpd="sng" algn="ctr">
+                      <a:solidFill>
+                        <a:schemeClr val="tx1"/>
+                      </a:solidFill>
+                      <a:prstDash val="solid"/>
+                      <a:round/>
+                      <a:headEnd type="none" w="med" len="med"/>
+                      <a:tailEnd type="none" w="med" len="med"/>
+                    </a:lnT>
+                    <a:lnB w="12700" cap="flat" cmpd="sng" algn="ctr">
+                      <a:solidFill>
+                        <a:schemeClr val="tx1"/>
+                      </a:solidFill>
+                      <a:prstDash val="solid"/>
+                      <a:round/>
+                      <a:headEnd type="none" w="med" len="med"/>
+                      <a:tailEnd type="none" w="med" len="med"/>
+                    </a:lnB>
+                    <a:solidFill>
+                      <a:schemeClr val="accent5"/>
+                    </a:solidFill>
+                  </a:tcPr>
+                </a:tc>
+                <a:tc hMerge="1">
+                  <a:txBody>
+                    <a:bodyPr/>
+                    <a:lstStyle/>
+                    <a:p>
+                      <a:pPr algn="ctr"/>
+                      <a:endParaRPr lang="zh-CN" altLang="en-US" sz="1600" b="0" dirty="0">
+                        <a:solidFill>
+                          <a:schemeClr val="tx1"/>
+                        </a:solidFill>
+                      </a:endParaRPr>
+                    </a:p>
+                  </a:txBody>
+                  <a:tcPr>
+                    <a:lnL w="12700" cap="flat" cmpd="sng" algn="ctr">
+                      <a:solidFill>
+                        <a:schemeClr val="tx1"/>
+                      </a:solidFill>
+                      <a:prstDash val="solid"/>
+                      <a:round/>
+                      <a:headEnd type="none" w="med" len="med"/>
+                      <a:tailEnd type="none" w="med" len="med"/>
+                    </a:lnL>
+                    <a:lnR w="12700" cap="flat" cmpd="sng" algn="ctr">
+                      <a:solidFill>
+                        <a:schemeClr val="tx1"/>
+                      </a:solidFill>
+                      <a:prstDash val="solid"/>
+                      <a:round/>
+                      <a:headEnd type="none" w="med" len="med"/>
+                      <a:tailEnd type="none" w="med" len="med"/>
+                    </a:lnR>
+                    <a:lnT w="12700" cap="flat" cmpd="sng" algn="ctr">
+                      <a:solidFill>
+                        <a:schemeClr val="tx1"/>
+                      </a:solidFill>
+                      <a:prstDash val="solid"/>
+                      <a:round/>
+                      <a:headEnd type="none" w="med" len="med"/>
+                      <a:tailEnd type="none" w="med" len="med"/>
+                    </a:lnT>
+                    <a:lnB w="12700" cap="flat" cmpd="sng" algn="ctr">
+                      <a:solidFill>
+                        <a:schemeClr val="tx1"/>
+                      </a:solidFill>
+                      <a:prstDash val="solid"/>
+                      <a:round/>
+                      <a:headEnd type="none" w="med" len="med"/>
+                      <a:tailEnd type="none" w="med" len="med"/>
+                    </a:lnB>
+                    <a:solidFill>
+                      <a:schemeClr val="accent5"/>
+                    </a:solidFill>
+                  </a:tcPr>
+                </a:tc>
+                <a:tc>
+                  <a:txBody>
+                    <a:bodyPr/>
+                    <a:lstStyle/>
+                    <a:p>
+                      <a:pPr marL="0" marR="0" indent="0" algn="ctr" defTabSz="914400" rtl="0" eaLnBrk="1" fontAlgn="auto" latinLnBrk="0" hangingPunct="1">
+                        <a:lnSpc>
+                          <a:spcPct val="100000"/>
+                        </a:lnSpc>
+                        <a:spcBef>
+                          <a:spcPts val="0"/>
+                        </a:spcBef>
+                        <a:spcAft>
+                          <a:spcPts val="0"/>
+                        </a:spcAft>
+                        <a:buClrTx/>
+                        <a:buSzTx/>
+                        <a:buFontTx/>
+                        <a:buNone/>
+                        <a:tabLst/>
+                        <a:defRPr/>
+                      </a:pPr>
+                      <a:r>
+                        <a:rPr lang="en-US" altLang="zh-CN" sz="1600" b="0" dirty="0" smtClean="0">
+                          <a:solidFill>
+                            <a:schemeClr val="tx1"/>
+                          </a:solidFill>
+                        </a:rPr>
+                        <a:t>data2</a:t>
+                      </a:r>
+                      <a:endParaRPr lang="zh-CN" altLang="en-US" sz="1600" b="0" dirty="0" smtClean="0">
+                        <a:solidFill>
+                          <a:schemeClr val="tx1"/>
+                        </a:solidFill>
+                      </a:endParaRPr>
+                    </a:p>
+                    <a:p>
+                      <a:pPr algn="ctr"/>
+                      <a:endParaRPr lang="zh-CN" altLang="en-US" sz="1600" b="0" dirty="0">
+                        <a:solidFill>
+                          <a:schemeClr val="tx1"/>
+                        </a:solidFill>
+                      </a:endParaRPr>
+                    </a:p>
+                  </a:txBody>
+                  <a:tcPr>
+                    <a:lnL w="12700" cap="flat" cmpd="sng" algn="ctr">
+                      <a:solidFill>
+                        <a:schemeClr val="tx1"/>
+                      </a:solidFill>
+                      <a:prstDash val="solid"/>
+                      <a:round/>
+                      <a:headEnd type="none" w="med" len="med"/>
+                      <a:tailEnd type="none" w="med" len="med"/>
+                    </a:lnL>
+                    <a:lnR w="12700" cap="flat" cmpd="sng" algn="ctr">
+                      <a:solidFill>
+                        <a:schemeClr val="tx1"/>
+                      </a:solidFill>
+                      <a:prstDash val="solid"/>
+                      <a:round/>
+                      <a:headEnd type="none" w="med" len="med"/>
+                      <a:tailEnd type="none" w="med" len="med"/>
+                    </a:lnR>
+                    <a:lnT w="12700" cap="flat" cmpd="sng" algn="ctr">
+                      <a:solidFill>
+                        <a:schemeClr val="tx1"/>
+                      </a:solidFill>
+                      <a:prstDash val="solid"/>
+                      <a:round/>
+                      <a:headEnd type="none" w="med" len="med"/>
+                      <a:tailEnd type="none" w="med" len="med"/>
+                    </a:lnT>
+                    <a:lnB w="12700" cap="flat" cmpd="sng" algn="ctr">
+                      <a:solidFill>
+                        <a:schemeClr val="tx1"/>
+                      </a:solidFill>
+                      <a:prstDash val="solid"/>
+                      <a:round/>
+                      <a:headEnd type="none" w="med" len="med"/>
+                      <a:tailEnd type="none" w="med" len="med"/>
+                    </a:lnB>
+                    <a:solidFill>
+                      <a:schemeClr val="accent2"/>
+                    </a:solidFill>
+                  </a:tcPr>
+                </a:tc>
+                <a:extLst>
+                  <a:ext uri="{0D108BD9-81ED-4DB2-BD59-A6C34878D82A}">
+                    <a16:rowId xmlns:a16="http://schemas.microsoft.com/office/drawing/2014/main" val="547524138"/>
+                  </a:ext>
+                </a:extLst>
+              </a:tr>
+              <a:tr h="576447">
+                <a:tc>
+                  <a:txBody>
+                    <a:bodyPr/>
+                    <a:lstStyle/>
+                    <a:p>
+                      <a:pPr algn="ctr"/>
+                      <a:endParaRPr lang="zh-CN" altLang="en-US" sz="1600" b="0" dirty="0">
+                        <a:solidFill>
+                          <a:schemeClr val="tx1"/>
+                        </a:solidFill>
+                      </a:endParaRPr>
+                    </a:p>
+                  </a:txBody>
+                  <a:tcPr>
+                    <a:lnL w="12700" cap="flat" cmpd="sng" algn="ctr">
+                      <a:solidFill>
+                        <a:schemeClr val="tx1"/>
+                      </a:solidFill>
+                      <a:prstDash val="solid"/>
+                      <a:round/>
+                      <a:headEnd type="none" w="med" len="med"/>
+                      <a:tailEnd type="none" w="med" len="med"/>
+                    </a:lnL>
+                    <a:lnR w="12700" cap="flat" cmpd="sng" algn="ctr">
+                      <a:solidFill>
+                        <a:schemeClr val="tx1"/>
+                      </a:solidFill>
+                      <a:prstDash val="solid"/>
+                      <a:round/>
+                      <a:headEnd type="none" w="med" len="med"/>
+                      <a:tailEnd type="none" w="med" len="med"/>
+                    </a:lnR>
+                    <a:lnT w="12700" cap="flat" cmpd="sng" algn="ctr">
+                      <a:solidFill>
+                        <a:schemeClr val="tx1"/>
+                      </a:solidFill>
+                      <a:prstDash val="solid"/>
+                      <a:round/>
+                      <a:headEnd type="none" w="med" len="med"/>
+                      <a:tailEnd type="none" w="med" len="med"/>
+                    </a:lnT>
+                    <a:lnB w="12700" cap="flat" cmpd="sng" algn="ctr">
+                      <a:solidFill>
+                        <a:schemeClr val="tx1"/>
+                      </a:solidFill>
+                      <a:prstDash val="solid"/>
+                      <a:round/>
+                      <a:headEnd type="none" w="med" len="med"/>
+                      <a:tailEnd type="none" w="med" len="med"/>
+                    </a:lnB>
+                    <a:solidFill>
+                      <a:srgbClr val="FF0000"/>
+                    </a:solidFill>
+                  </a:tcPr>
+                </a:tc>
+                <a:tc>
+                  <a:txBody>
+                    <a:bodyPr/>
+                    <a:lstStyle/>
+                    <a:p>
+                      <a:pPr algn="ctr"/>
+                      <a:r>
+                        <a:rPr lang="en-US" altLang="zh-CN" sz="1600" b="0" dirty="0" smtClean="0">
+                          <a:solidFill>
+                            <a:schemeClr val="tx1"/>
+                          </a:solidFill>
+                        </a:rPr>
+                        <a:t>data1</a:t>
+                      </a:r>
+                      <a:endParaRPr lang="zh-CN" altLang="en-US" sz="1600" b="0" dirty="0">
+                        <a:solidFill>
+                          <a:schemeClr val="tx1"/>
+                        </a:solidFill>
+                      </a:endParaRPr>
+                    </a:p>
+                  </a:txBody>
+                  <a:tcPr>
+                    <a:lnL w="12700" cap="flat" cmpd="sng" algn="ctr">
+                      <a:solidFill>
+                        <a:schemeClr val="tx1"/>
+                      </a:solidFill>
+                      <a:prstDash val="solid"/>
+                      <a:round/>
+                      <a:headEnd type="none" w="med" len="med"/>
+                      <a:tailEnd type="none" w="med" len="med"/>
+                    </a:lnL>
+                    <a:lnR w="12700" cap="flat" cmpd="sng" algn="ctr">
+                      <a:solidFill>
+                        <a:schemeClr val="tx1"/>
+                      </a:solidFill>
+                      <a:prstDash val="solid"/>
+                      <a:round/>
+                      <a:headEnd type="none" w="med" len="med"/>
+                      <a:tailEnd type="none" w="med" len="med"/>
+                    </a:lnR>
+                    <a:lnT w="12700" cap="flat" cmpd="sng" algn="ctr">
+                      <a:solidFill>
+                        <a:schemeClr val="tx1"/>
+                      </a:solidFill>
+                      <a:prstDash val="solid"/>
+                      <a:round/>
+                      <a:headEnd type="none" w="med" len="med"/>
+                      <a:tailEnd type="none" w="med" len="med"/>
+                    </a:lnT>
+                    <a:lnB w="12700" cap="flat" cmpd="sng" algn="ctr">
+                      <a:solidFill>
+                        <a:schemeClr val="tx1"/>
+                      </a:solidFill>
+                      <a:prstDash val="solid"/>
+                      <a:round/>
+                      <a:headEnd type="none" w="med" len="med"/>
+                      <a:tailEnd type="none" w="med" len="med"/>
+                    </a:lnB>
+                    <a:solidFill>
+                      <a:srgbClr val="FFC000"/>
+                    </a:solidFill>
+                  </a:tcPr>
+                </a:tc>
+                <a:tc gridSpan="2">
+                  <a:txBody>
+                    <a:bodyPr/>
+                    <a:lstStyle/>
+                    <a:p>
+                      <a:pPr algn="ctr"/>
+                      <a:endParaRPr lang="zh-CN" altLang="en-US" sz="1600" b="0" dirty="0">
+                        <a:solidFill>
+                          <a:schemeClr val="tx1"/>
+                        </a:solidFill>
+                      </a:endParaRPr>
+                    </a:p>
+                  </a:txBody>
+                  <a:tcPr>
+                    <a:lnL w="12700" cap="flat" cmpd="sng" algn="ctr">
+                      <a:solidFill>
+                        <a:schemeClr val="tx1"/>
+                      </a:solidFill>
+                      <a:prstDash val="solid"/>
+                      <a:round/>
+                      <a:headEnd type="none" w="med" len="med"/>
+                      <a:tailEnd type="none" w="med" len="med"/>
+                    </a:lnL>
+                    <a:lnR w="12700" cap="flat" cmpd="sng" algn="ctr">
+                      <a:solidFill>
+                        <a:schemeClr val="tx1"/>
+                      </a:solidFill>
+                      <a:prstDash val="solid"/>
+                      <a:round/>
+                      <a:headEnd type="none" w="med" len="med"/>
+                      <a:tailEnd type="none" w="med" len="med"/>
+                    </a:lnR>
+                    <a:lnT w="12700" cap="flat" cmpd="sng" algn="ctr">
+                      <a:solidFill>
+                        <a:schemeClr val="tx1"/>
+                      </a:solidFill>
+                      <a:prstDash val="solid"/>
+                      <a:round/>
+                      <a:headEnd type="none" w="med" len="med"/>
+                      <a:tailEnd type="none" w="med" len="med"/>
+                    </a:lnT>
+                    <a:lnB w="12700" cap="flat" cmpd="sng" algn="ctr">
+                      <a:solidFill>
+                        <a:schemeClr val="tx1"/>
+                      </a:solidFill>
+                      <a:prstDash val="solid"/>
+                      <a:round/>
+                      <a:headEnd type="none" w="med" len="med"/>
+                      <a:tailEnd type="none" w="med" len="med"/>
+                    </a:lnB>
+                    <a:solidFill>
+                      <a:srgbClr val="FF0000"/>
+                    </a:solidFill>
+                  </a:tcPr>
+                </a:tc>
+                <a:tc hMerge="1">
+                  <a:txBody>
+                    <a:bodyPr/>
+                    <a:lstStyle/>
+                    <a:p>
+                      <a:endParaRPr lang="zh-CN" altLang="en-US"/>
+                    </a:p>
+                  </a:txBody>
+                  <a:tcPr/>
+                </a:tc>
+                <a:extLst>
+                  <a:ext uri="{0D108BD9-81ED-4DB2-BD59-A6C34878D82A}">
+                    <a16:rowId xmlns:a16="http://schemas.microsoft.com/office/drawing/2014/main" val="4207742222"/>
+                  </a:ext>
+                </a:extLst>
+              </a:tr>
+            </a:tbl>
+          </a:graphicData>
+        </a:graphic>
+      </p:graphicFrame>
+      <p:graphicFrame>
+        <p:nvGraphicFramePr>
+          <p:cNvPr id="6" name="表格 5"/>
+          <p:cNvGraphicFramePr>
+            <a:graphicFrameLocks noGrp="1"/>
+          </p:cNvGraphicFramePr>
+          <p:nvPr>
+            <p:extLst>
+              <p:ext uri="{D42A27DB-BD31-4B8C-83A1-F6EECF244321}">
+                <p14:modId xmlns:p14="http://schemas.microsoft.com/office/powerpoint/2010/main" val="1838278970"/>
+              </p:ext>
+            </p:extLst>
+          </p:nvPr>
+        </p:nvGraphicFramePr>
+        <p:xfrm>
+          <a:off x="6894616" y="2035313"/>
+          <a:ext cx="3761772" cy="1732014"/>
+        </p:xfrm>
+        <a:graphic>
+          <a:graphicData uri="http://schemas.openxmlformats.org/drawingml/2006/table">
+            <a:tbl>
+              <a:tblPr firstRow="1" bandRow="1">
+                <a:tableStyleId>{5C22544A-7EE6-4342-B048-85BDC9FD1C3A}</a:tableStyleId>
+              </a:tblPr>
+              <a:tblGrid>
+                <a:gridCol w="940443">
+                  <a:extLst>
+                    <a:ext uri="{9D8B030D-6E8A-4147-A177-3AD203B41FA5}">
+                      <a16:colId xmlns:a16="http://schemas.microsoft.com/office/drawing/2014/main" val="226489393"/>
+                    </a:ext>
+                  </a:extLst>
+                </a:gridCol>
+                <a:gridCol w="940443">
+                  <a:extLst>
+                    <a:ext uri="{9D8B030D-6E8A-4147-A177-3AD203B41FA5}">
+                      <a16:colId xmlns:a16="http://schemas.microsoft.com/office/drawing/2014/main" val="3315947240"/>
+                    </a:ext>
+                  </a:extLst>
+                </a:gridCol>
+                <a:gridCol w="940443">
+                  <a:extLst>
+                    <a:ext uri="{9D8B030D-6E8A-4147-A177-3AD203B41FA5}">
+                      <a16:colId xmlns:a16="http://schemas.microsoft.com/office/drawing/2014/main" val="4175610667"/>
+                    </a:ext>
+                  </a:extLst>
+                </a:gridCol>
+                <a:gridCol w="940443">
+                  <a:extLst>
+                    <a:ext uri="{9D8B030D-6E8A-4147-A177-3AD203B41FA5}">
+                      <a16:colId xmlns:a16="http://schemas.microsoft.com/office/drawing/2014/main" val="3198216487"/>
+                    </a:ext>
+                  </a:extLst>
+                </a:gridCol>
+              </a:tblGrid>
+              <a:tr h="576447">
+                <a:tc>
+                  <a:txBody>
+                    <a:bodyPr/>
+                    <a:lstStyle/>
+                    <a:p>
+                      <a:pPr algn="ctr"/>
+                      <a:r>
+                        <a:rPr lang="en-US" altLang="zh-CN" sz="1600" b="0" dirty="0" smtClean="0">
+                          <a:solidFill>
+                            <a:schemeClr val="tx1"/>
+                          </a:solidFill>
+                        </a:rPr>
+                        <a:t>-1</a:t>
+                      </a:r>
+                      <a:endParaRPr lang="zh-CN" altLang="en-US" sz="1600" b="0" dirty="0">
+                        <a:solidFill>
+                          <a:schemeClr val="tx1"/>
+                        </a:solidFill>
+                      </a:endParaRPr>
+                    </a:p>
+                  </a:txBody>
+                  <a:tcPr>
+                    <a:lnL w="12700" cap="flat" cmpd="sng" algn="ctr">
+                      <a:solidFill>
+                        <a:schemeClr val="tx1"/>
+                      </a:solidFill>
+                      <a:prstDash val="solid"/>
+                      <a:round/>
+                      <a:headEnd type="none" w="med" len="med"/>
+                      <a:tailEnd type="none" w="med" len="med"/>
+                    </a:lnL>
+                    <a:lnR w="12700" cap="flat" cmpd="sng" algn="ctr">
+                      <a:solidFill>
+                        <a:schemeClr val="tx1"/>
+                      </a:solidFill>
+                      <a:prstDash val="solid"/>
+                      <a:round/>
+                      <a:headEnd type="none" w="med" len="med"/>
+                      <a:tailEnd type="none" w="med" len="med"/>
+                    </a:lnR>
+                    <a:lnT w="12700" cap="flat" cmpd="sng" algn="ctr">
+                      <a:solidFill>
+                        <a:schemeClr val="tx1"/>
+                      </a:solidFill>
+                      <a:prstDash val="solid"/>
+                      <a:round/>
+                      <a:headEnd type="none" w="med" len="med"/>
+                      <a:tailEnd type="none" w="med" len="med"/>
+                    </a:lnT>
+                    <a:lnB w="12700" cap="flat" cmpd="sng" algn="ctr">
+                      <a:solidFill>
+                        <a:schemeClr val="tx1"/>
+                      </a:solidFill>
+                      <a:prstDash val="solid"/>
+                      <a:round/>
+                      <a:headEnd type="none" w="med" len="med"/>
+                      <a:tailEnd type="none" w="med" len="med"/>
+                    </a:lnB>
+                    <a:solidFill>
+                      <a:srgbClr val="FF0000"/>
+                    </a:solidFill>
+                  </a:tcPr>
+                </a:tc>
+                <a:tc>
+                  <a:txBody>
+                    <a:bodyPr/>
+                    <a:lstStyle/>
+                    <a:p>
+                      <a:pPr algn="ctr"/>
+                      <a:r>
+                        <a:rPr lang="en-US" altLang="zh-CN" sz="1600" b="0" dirty="0" smtClean="0">
+                          <a:solidFill>
+                            <a:schemeClr val="tx1"/>
+                          </a:solidFill>
+                        </a:rPr>
+                        <a:t>offset1</a:t>
+                      </a:r>
+                      <a:endParaRPr lang="zh-CN" altLang="en-US" sz="1600" b="0" dirty="0">
+                        <a:solidFill>
+                          <a:schemeClr val="tx1"/>
+                        </a:solidFill>
+                      </a:endParaRPr>
+                    </a:p>
+                  </a:txBody>
+                  <a:tcPr>
+                    <a:lnL w="12700" cap="flat" cmpd="sng" algn="ctr">
+                      <a:solidFill>
+                        <a:schemeClr val="tx1"/>
+                      </a:solidFill>
+                      <a:prstDash val="solid"/>
+                      <a:round/>
+                      <a:headEnd type="none" w="med" len="med"/>
+                      <a:tailEnd type="none" w="med" len="med"/>
+                    </a:lnL>
+                    <a:lnR w="12700" cap="flat" cmpd="sng" algn="ctr">
+                      <a:solidFill>
+                        <a:schemeClr val="tx1"/>
+                      </a:solidFill>
+                      <a:prstDash val="solid"/>
+                      <a:round/>
+                      <a:headEnd type="none" w="med" len="med"/>
+                      <a:tailEnd type="none" w="med" len="med"/>
+                    </a:lnR>
+                    <a:lnT w="12700" cap="flat" cmpd="sng" algn="ctr">
+                      <a:solidFill>
+                        <a:schemeClr val="tx1"/>
+                      </a:solidFill>
+                      <a:prstDash val="solid"/>
+                      <a:round/>
+                      <a:headEnd type="none" w="med" len="med"/>
+                      <a:tailEnd type="none" w="med" len="med"/>
+                    </a:lnT>
+                    <a:lnB w="12700" cap="flat" cmpd="sng" algn="ctr">
+                      <a:solidFill>
+                        <a:schemeClr val="tx1"/>
+                      </a:solidFill>
+                      <a:prstDash val="solid"/>
+                      <a:round/>
+                      <a:headEnd type="none" w="med" len="med"/>
+                      <a:tailEnd type="none" w="med" len="med"/>
+                    </a:lnB>
+                    <a:solidFill>
+                      <a:schemeClr val="accent4">
+                        <a:lumMod val="60000"/>
+                        <a:lumOff val="40000"/>
+                      </a:schemeClr>
+                    </a:solidFill>
+                  </a:tcPr>
+                </a:tc>
+                <a:tc>
+                  <a:txBody>
+                    <a:bodyPr/>
+                    <a:lstStyle/>
+                    <a:p>
+                      <a:pPr algn="ctr"/>
+                      <a:r>
+                        <a:rPr lang="en-US" altLang="zh-CN" sz="1600" b="0" dirty="0" smtClean="0">
+                          <a:solidFill>
+                            <a:schemeClr val="tx1"/>
+                          </a:solidFill>
+                        </a:rPr>
+                        <a:t>offset2</a:t>
+                      </a:r>
+                      <a:endParaRPr lang="zh-CN" altLang="en-US" sz="1600" b="0" dirty="0">
+                        <a:solidFill>
+                          <a:schemeClr val="tx1"/>
+                        </a:solidFill>
+                      </a:endParaRPr>
+                    </a:p>
+                  </a:txBody>
+                  <a:tcPr>
+                    <a:lnL w="12700" cap="flat" cmpd="sng" algn="ctr">
+                      <a:solidFill>
+                        <a:schemeClr val="tx1"/>
+                      </a:solidFill>
+                      <a:prstDash val="solid"/>
+                      <a:round/>
+                      <a:headEnd type="none" w="med" len="med"/>
+                      <a:tailEnd type="none" w="med" len="med"/>
+                    </a:lnL>
+                    <a:lnR w="12700" cap="flat" cmpd="sng" algn="ctr">
+                      <a:solidFill>
+                        <a:schemeClr val="tx1"/>
+                      </a:solidFill>
+                      <a:prstDash val="solid"/>
+                      <a:round/>
+                      <a:headEnd type="none" w="med" len="med"/>
+                      <a:tailEnd type="none" w="med" len="med"/>
+                    </a:lnR>
+                    <a:lnT w="12700" cap="flat" cmpd="sng" algn="ctr">
+                      <a:solidFill>
+                        <a:schemeClr val="tx1"/>
+                      </a:solidFill>
+                      <a:prstDash val="solid"/>
+                      <a:round/>
+                      <a:headEnd type="none" w="med" len="med"/>
+                      <a:tailEnd type="none" w="med" len="med"/>
+                    </a:lnT>
+                    <a:lnB w="12700" cap="flat" cmpd="sng" algn="ctr">
+                      <a:solidFill>
+                        <a:schemeClr val="tx1"/>
+                      </a:solidFill>
+                      <a:prstDash val="solid"/>
+                      <a:round/>
+                      <a:headEnd type="none" w="med" len="med"/>
+                      <a:tailEnd type="none" w="med" len="med"/>
+                    </a:lnB>
+                    <a:solidFill>
+                      <a:schemeClr val="accent2"/>
+                    </a:solidFill>
+                  </a:tcPr>
+                </a:tc>
+                <a:tc>
+                  <a:txBody>
+                    <a:bodyPr/>
+                    <a:lstStyle/>
+                    <a:p>
+                      <a:pPr algn="ctr"/>
+                      <a:endParaRPr lang="zh-CN" altLang="en-US" sz="1600" b="0" dirty="0">
+                        <a:solidFill>
+                          <a:schemeClr val="tx1"/>
+                        </a:solidFill>
+                      </a:endParaRPr>
+                    </a:p>
+                  </a:txBody>
+                  <a:tcPr>
+                    <a:lnL w="12700" cap="flat" cmpd="sng" algn="ctr">
+                      <a:solidFill>
+                        <a:schemeClr val="tx1"/>
+                      </a:solidFill>
+                      <a:prstDash val="solid"/>
+                      <a:round/>
+                      <a:headEnd type="none" w="med" len="med"/>
+                      <a:tailEnd type="none" w="med" len="med"/>
+                    </a:lnL>
+                    <a:lnR w="12700" cap="flat" cmpd="sng" algn="ctr">
+                      <a:solidFill>
+                        <a:schemeClr val="tx1"/>
+                      </a:solidFill>
+                      <a:prstDash val="solid"/>
+                      <a:round/>
+                      <a:headEnd type="none" w="med" len="med"/>
+                      <a:tailEnd type="none" w="med" len="med"/>
+                    </a:lnR>
+                    <a:lnT w="12700" cap="flat" cmpd="sng" algn="ctr">
+                      <a:solidFill>
+                        <a:schemeClr val="tx1"/>
+                      </a:solidFill>
+                      <a:prstDash val="solid"/>
+                      <a:round/>
+                      <a:headEnd type="none" w="med" len="med"/>
+                      <a:tailEnd type="none" w="med" len="med"/>
+                    </a:lnT>
+                    <a:lnB w="12700" cap="flat" cmpd="sng" algn="ctr">
+                      <a:solidFill>
+                        <a:schemeClr val="tx1"/>
+                      </a:solidFill>
+                      <a:prstDash val="solid"/>
+                      <a:round/>
+                      <a:headEnd type="none" w="med" len="med"/>
+                      <a:tailEnd type="none" w="med" len="med"/>
+                    </a:lnB>
+                    <a:solidFill>
+                      <a:schemeClr val="accent5"/>
+                    </a:solidFill>
+                  </a:tcPr>
+                </a:tc>
+                <a:extLst>
+                  <a:ext uri="{0D108BD9-81ED-4DB2-BD59-A6C34878D82A}">
+                    <a16:rowId xmlns:a16="http://schemas.microsoft.com/office/drawing/2014/main" val="621460894"/>
+                  </a:ext>
+                </a:extLst>
+              </a:tr>
+              <a:tr h="576447">
+                <a:tc gridSpan="4">
+                  <a:txBody>
+                    <a:bodyPr/>
+                    <a:lstStyle/>
+                    <a:p>
+                      <a:pPr algn="ctr"/>
+                      <a:r>
+                        <a:rPr lang="zh-CN" altLang="en-US" sz="1600" b="0" dirty="0" smtClean="0">
+                          <a:solidFill>
+                            <a:schemeClr val="tx1"/>
+                          </a:solidFill>
+                        </a:rPr>
+                        <a:t>空闲空间</a:t>
+                      </a:r>
+                      <a:endParaRPr lang="zh-CN" altLang="en-US" sz="1600" b="0" dirty="0">
+                        <a:solidFill>
+                          <a:schemeClr val="tx1"/>
+                        </a:solidFill>
+                      </a:endParaRPr>
+                    </a:p>
+                  </a:txBody>
+                  <a:tcPr>
+                    <a:lnL w="12700" cap="flat" cmpd="sng" algn="ctr">
+                      <a:solidFill>
+                        <a:schemeClr val="tx1"/>
+                      </a:solidFill>
+                      <a:prstDash val="solid"/>
+                      <a:round/>
+                      <a:headEnd type="none" w="med" len="med"/>
+                      <a:tailEnd type="none" w="med" len="med"/>
+                    </a:lnL>
+                    <a:lnR w="12700" cap="flat" cmpd="sng" algn="ctr">
+                      <a:solidFill>
+                        <a:schemeClr val="tx1"/>
+                      </a:solidFill>
+                      <a:prstDash val="solid"/>
+                      <a:round/>
+                      <a:headEnd type="none" w="med" len="med"/>
+                      <a:tailEnd type="none" w="med" len="med"/>
+                    </a:lnR>
+                    <a:lnT w="12700" cap="flat" cmpd="sng" algn="ctr">
+                      <a:solidFill>
+                        <a:schemeClr val="tx1"/>
+                      </a:solidFill>
+                      <a:prstDash val="solid"/>
+                      <a:round/>
+                      <a:headEnd type="none" w="med" len="med"/>
+                      <a:tailEnd type="none" w="med" len="med"/>
+                    </a:lnT>
+                    <a:lnB w="12700" cap="flat" cmpd="sng" algn="ctr">
+                      <a:solidFill>
+                        <a:schemeClr val="tx1"/>
+                      </a:solidFill>
+                      <a:prstDash val="solid"/>
+                      <a:round/>
+                      <a:headEnd type="none" w="med" len="med"/>
+                      <a:tailEnd type="none" w="med" len="med"/>
+                    </a:lnB>
+                    <a:solidFill>
+                      <a:schemeClr val="accent5"/>
+                    </a:solidFill>
+                  </a:tcPr>
+                </a:tc>
+                <a:tc hMerge="1">
+                  <a:txBody>
+                    <a:bodyPr/>
+                    <a:lstStyle/>
+                    <a:p>
+                      <a:pPr algn="ctr"/>
+                      <a:endParaRPr lang="zh-CN" altLang="en-US" sz="1600" b="0" dirty="0">
+                        <a:solidFill>
+                          <a:schemeClr val="tx1"/>
+                        </a:solidFill>
+                      </a:endParaRPr>
+                    </a:p>
+                  </a:txBody>
+                  <a:tcPr>
+                    <a:lnL w="12700" cap="flat" cmpd="sng" algn="ctr">
+                      <a:solidFill>
+                        <a:schemeClr val="tx1"/>
+                      </a:solidFill>
+                      <a:prstDash val="solid"/>
+                      <a:round/>
+                      <a:headEnd type="none" w="med" len="med"/>
+                      <a:tailEnd type="none" w="med" len="med"/>
+                    </a:lnL>
+                    <a:lnR w="12700" cap="flat" cmpd="sng" algn="ctr">
+                      <a:solidFill>
+                        <a:schemeClr val="tx1"/>
+                      </a:solidFill>
+                      <a:prstDash val="solid"/>
+                      <a:round/>
+                      <a:headEnd type="none" w="med" len="med"/>
+                      <a:tailEnd type="none" w="med" len="med"/>
+                    </a:lnR>
+                    <a:lnT w="12700" cap="flat" cmpd="sng" algn="ctr">
+                      <a:solidFill>
+                        <a:schemeClr val="tx1"/>
+                      </a:solidFill>
+                      <a:prstDash val="solid"/>
+                      <a:round/>
+                      <a:headEnd type="none" w="med" len="med"/>
+                      <a:tailEnd type="none" w="med" len="med"/>
+                    </a:lnT>
+                    <a:lnB w="12700" cap="flat" cmpd="sng" algn="ctr">
+                      <a:solidFill>
+                        <a:schemeClr val="tx1"/>
+                      </a:solidFill>
+                      <a:prstDash val="solid"/>
+                      <a:round/>
+                      <a:headEnd type="none" w="med" len="med"/>
+                      <a:tailEnd type="none" w="med" len="med"/>
+                    </a:lnB>
+                    <a:solidFill>
+                      <a:schemeClr val="accent5"/>
+                    </a:solidFill>
+                  </a:tcPr>
+                </a:tc>
+                <a:tc hMerge="1">
+                  <a:txBody>
+                    <a:bodyPr/>
+                    <a:lstStyle/>
+                    <a:p>
+                      <a:pPr algn="ctr"/>
+                      <a:endParaRPr lang="zh-CN" altLang="en-US" sz="1600" b="0" dirty="0">
+                        <a:solidFill>
+                          <a:schemeClr val="tx1"/>
+                        </a:solidFill>
+                      </a:endParaRPr>
+                    </a:p>
+                  </a:txBody>
+                  <a:tcPr>
+                    <a:lnL w="12700" cap="flat" cmpd="sng" algn="ctr">
+                      <a:solidFill>
+                        <a:schemeClr val="tx1"/>
+                      </a:solidFill>
+                      <a:prstDash val="solid"/>
+                      <a:round/>
+                      <a:headEnd type="none" w="med" len="med"/>
+                      <a:tailEnd type="none" w="med" len="med"/>
+                    </a:lnL>
+                    <a:lnR w="12700" cap="flat" cmpd="sng" algn="ctr">
+                      <a:solidFill>
+                        <a:schemeClr val="tx1"/>
+                      </a:solidFill>
+                      <a:prstDash val="solid"/>
+                      <a:round/>
+                      <a:headEnd type="none" w="med" len="med"/>
+                      <a:tailEnd type="none" w="med" len="med"/>
+                    </a:lnR>
+                    <a:lnT w="12700" cap="flat" cmpd="sng" algn="ctr">
+                      <a:solidFill>
+                        <a:schemeClr val="tx1"/>
+                      </a:solidFill>
+                      <a:prstDash val="solid"/>
+                      <a:round/>
+                      <a:headEnd type="none" w="med" len="med"/>
+                      <a:tailEnd type="none" w="med" len="med"/>
+                    </a:lnT>
+                    <a:lnB w="12700" cap="flat" cmpd="sng" algn="ctr">
+                      <a:solidFill>
+                        <a:schemeClr val="tx1"/>
+                      </a:solidFill>
+                      <a:prstDash val="solid"/>
+                      <a:round/>
+                      <a:headEnd type="none" w="med" len="med"/>
+                      <a:tailEnd type="none" w="med" len="med"/>
+                    </a:lnB>
+                    <a:solidFill>
+                      <a:schemeClr val="accent5"/>
+                    </a:solidFill>
+                  </a:tcPr>
+                </a:tc>
+                <a:tc hMerge="1">
+                  <a:txBody>
+                    <a:bodyPr/>
+                    <a:lstStyle/>
+                    <a:p>
+                      <a:pPr algn="ctr"/>
+                      <a:endParaRPr lang="zh-CN" altLang="en-US" sz="1600" b="0" dirty="0">
+                        <a:solidFill>
+                          <a:schemeClr val="tx1"/>
+                        </a:solidFill>
+                      </a:endParaRPr>
+                    </a:p>
+                  </a:txBody>
+                  <a:tcPr>
+                    <a:lnL w="12700" cap="flat" cmpd="sng" algn="ctr">
+                      <a:solidFill>
+                        <a:schemeClr val="tx1"/>
+                      </a:solidFill>
+                      <a:prstDash val="solid"/>
+                      <a:round/>
+                      <a:headEnd type="none" w="med" len="med"/>
+                      <a:tailEnd type="none" w="med" len="med"/>
+                    </a:lnL>
+                    <a:lnR w="12700" cap="flat" cmpd="sng" algn="ctr">
+                      <a:solidFill>
+                        <a:schemeClr val="tx1"/>
+                      </a:solidFill>
+                      <a:prstDash val="solid"/>
+                      <a:round/>
+                      <a:headEnd type="none" w="med" len="med"/>
+                      <a:tailEnd type="none" w="med" len="med"/>
+                    </a:lnR>
+                    <a:lnT w="12700" cap="flat" cmpd="sng" algn="ctr">
+                      <a:solidFill>
+                        <a:schemeClr val="tx1"/>
+                      </a:solidFill>
+                      <a:prstDash val="solid"/>
+                      <a:round/>
+                      <a:headEnd type="none" w="med" len="med"/>
+                      <a:tailEnd type="none" w="med" len="med"/>
+                    </a:lnT>
+                    <a:lnB w="12700" cap="flat" cmpd="sng" algn="ctr">
+                      <a:solidFill>
+                        <a:schemeClr val="tx1"/>
+                      </a:solidFill>
+                      <a:prstDash val="solid"/>
+                      <a:round/>
+                      <a:headEnd type="none" w="med" len="med"/>
+                      <a:tailEnd type="none" w="med" len="med"/>
+                    </a:lnB>
+                    <a:solidFill>
+                      <a:schemeClr val="accent5"/>
+                    </a:solidFill>
+                  </a:tcPr>
+                </a:tc>
+                <a:extLst>
+                  <a:ext uri="{0D108BD9-81ED-4DB2-BD59-A6C34878D82A}">
+                    <a16:rowId xmlns:a16="http://schemas.microsoft.com/office/drawing/2014/main" val="547524138"/>
+                  </a:ext>
+                </a:extLst>
+              </a:tr>
+              <a:tr h="576447">
+                <a:tc gridSpan="2">
+                  <a:txBody>
+                    <a:bodyPr/>
+                    <a:lstStyle/>
+                    <a:p>
+                      <a:pPr algn="ctr"/>
+                      <a:endParaRPr lang="zh-CN" altLang="en-US" sz="1600" b="0" dirty="0">
+                        <a:solidFill>
+                          <a:schemeClr val="tx1"/>
+                        </a:solidFill>
+                      </a:endParaRPr>
+                    </a:p>
+                  </a:txBody>
+                  <a:tcPr>
+                    <a:lnL w="12700" cap="flat" cmpd="sng" algn="ctr">
+                      <a:solidFill>
+                        <a:schemeClr val="tx1"/>
+                      </a:solidFill>
+                      <a:prstDash val="solid"/>
+                      <a:round/>
+                      <a:headEnd type="none" w="med" len="med"/>
+                      <a:tailEnd type="none" w="med" len="med"/>
+                    </a:lnL>
+                    <a:lnR w="12700" cap="flat" cmpd="sng" algn="ctr">
+                      <a:solidFill>
+                        <a:schemeClr val="tx1"/>
+                      </a:solidFill>
+                      <a:prstDash val="solid"/>
+                      <a:round/>
+                      <a:headEnd type="none" w="med" len="med"/>
+                      <a:tailEnd type="none" w="med" len="med"/>
+                    </a:lnR>
+                    <a:lnT w="12700" cap="flat" cmpd="sng" algn="ctr">
+                      <a:solidFill>
+                        <a:schemeClr val="tx1"/>
+                      </a:solidFill>
+                      <a:prstDash val="solid"/>
+                      <a:round/>
+                      <a:headEnd type="none" w="med" len="med"/>
+                      <a:tailEnd type="none" w="med" len="med"/>
+                    </a:lnT>
+                    <a:lnB w="12700" cap="flat" cmpd="sng" algn="ctr">
+                      <a:solidFill>
+                        <a:schemeClr val="tx1"/>
+                      </a:solidFill>
+                      <a:prstDash val="solid"/>
+                      <a:round/>
+                      <a:headEnd type="none" w="med" len="med"/>
+                      <a:tailEnd type="none" w="med" len="med"/>
+                    </a:lnB>
+                    <a:solidFill>
+                      <a:schemeClr val="accent5"/>
+                    </a:solidFill>
+                  </a:tcPr>
+                </a:tc>
+                <a:tc hMerge="1">
+                  <a:txBody>
+                    <a:bodyPr/>
+                    <a:lstStyle/>
+                    <a:p>
+                      <a:pPr algn="ctr"/>
+                      <a:endParaRPr lang="zh-CN" altLang="en-US" sz="1600" b="0" dirty="0">
+                        <a:solidFill>
+                          <a:schemeClr val="tx1"/>
+                        </a:solidFill>
+                      </a:endParaRPr>
+                    </a:p>
+                  </a:txBody>
+                  <a:tcPr>
+                    <a:lnL w="12700" cap="flat" cmpd="sng" algn="ctr">
+                      <a:solidFill>
+                        <a:schemeClr val="tx1"/>
+                      </a:solidFill>
+                      <a:prstDash val="solid"/>
+                      <a:round/>
+                      <a:headEnd type="none" w="med" len="med"/>
+                      <a:tailEnd type="none" w="med" len="med"/>
+                    </a:lnL>
+                    <a:lnR w="12700" cap="flat" cmpd="sng" algn="ctr">
+                      <a:solidFill>
+                        <a:schemeClr val="tx1"/>
+                      </a:solidFill>
+                      <a:prstDash val="solid"/>
+                      <a:round/>
+                      <a:headEnd type="none" w="med" len="med"/>
+                      <a:tailEnd type="none" w="med" len="med"/>
+                    </a:lnR>
+                    <a:lnT w="12700" cap="flat" cmpd="sng" algn="ctr">
+                      <a:solidFill>
+                        <a:schemeClr val="tx1"/>
+                      </a:solidFill>
+                      <a:prstDash val="solid"/>
+                      <a:round/>
+                      <a:headEnd type="none" w="med" len="med"/>
+                      <a:tailEnd type="none" w="med" len="med"/>
+                    </a:lnT>
+                    <a:lnB w="12700" cap="flat" cmpd="sng" algn="ctr">
+                      <a:solidFill>
+                        <a:schemeClr val="tx1"/>
+                      </a:solidFill>
+                      <a:prstDash val="solid"/>
+                      <a:round/>
+                      <a:headEnd type="none" w="med" len="med"/>
+                      <a:tailEnd type="none" w="med" len="med"/>
+                    </a:lnB>
+                    <a:solidFill>
+                      <a:schemeClr val="accent5"/>
+                    </a:solidFill>
+                  </a:tcPr>
+                </a:tc>
+                <a:tc>
+                  <a:txBody>
+                    <a:bodyPr/>
+                    <a:lstStyle/>
+                    <a:p>
+                      <a:pPr marL="0" marR="0" indent="0" algn="ctr" defTabSz="914400" rtl="0" eaLnBrk="1" fontAlgn="auto" latinLnBrk="0" hangingPunct="1">
+                        <a:lnSpc>
+                          <a:spcPct val="100000"/>
+                        </a:lnSpc>
+                        <a:spcBef>
+                          <a:spcPts val="0"/>
+                        </a:spcBef>
+                        <a:spcAft>
+                          <a:spcPts val="0"/>
+                        </a:spcAft>
+                        <a:buClrTx/>
+                        <a:buSzTx/>
+                        <a:buFontTx/>
+                        <a:buNone/>
+                        <a:tabLst/>
+                        <a:defRPr/>
+                      </a:pPr>
+                      <a:r>
+                        <a:rPr lang="en-US" altLang="zh-CN" sz="1600" b="0" dirty="0" smtClean="0">
+                          <a:solidFill>
+                            <a:schemeClr val="tx1"/>
+                          </a:solidFill>
+                        </a:rPr>
+                        <a:t>data2</a:t>
+                      </a:r>
+                      <a:endParaRPr lang="zh-CN" altLang="en-US" sz="1600" b="0" dirty="0" smtClean="0">
+                        <a:solidFill>
+                          <a:schemeClr val="tx1"/>
+                        </a:solidFill>
+                      </a:endParaRPr>
+                    </a:p>
+                  </a:txBody>
+                  <a:tcPr>
+                    <a:lnL w="12700" cap="flat" cmpd="sng" algn="ctr">
+                      <a:solidFill>
+                        <a:schemeClr val="tx1"/>
+                      </a:solidFill>
+                      <a:prstDash val="solid"/>
+                      <a:round/>
+                      <a:headEnd type="none" w="med" len="med"/>
+                      <a:tailEnd type="none" w="med" len="med"/>
+                    </a:lnL>
+                    <a:lnR w="12700" cap="flat" cmpd="sng" algn="ctr">
+                      <a:solidFill>
+                        <a:schemeClr val="tx1"/>
+                      </a:solidFill>
+                      <a:prstDash val="solid"/>
+                      <a:round/>
+                      <a:headEnd type="none" w="med" len="med"/>
+                      <a:tailEnd type="none" w="med" len="med"/>
+                    </a:lnR>
+                    <a:lnT w="12700" cap="flat" cmpd="sng" algn="ctr">
+                      <a:solidFill>
+                        <a:schemeClr val="tx1"/>
+                      </a:solidFill>
+                      <a:prstDash val="solid"/>
+                      <a:round/>
+                      <a:headEnd type="none" w="med" len="med"/>
+                      <a:tailEnd type="none" w="med" len="med"/>
+                    </a:lnT>
+                    <a:lnB w="12700" cap="flat" cmpd="sng" algn="ctr">
+                      <a:solidFill>
+                        <a:schemeClr val="tx1"/>
+                      </a:solidFill>
+                      <a:prstDash val="solid"/>
+                      <a:round/>
+                      <a:headEnd type="none" w="med" len="med"/>
+                      <a:tailEnd type="none" w="med" len="med"/>
+                    </a:lnB>
+                    <a:solidFill>
+                      <a:schemeClr val="accent2"/>
+                    </a:solidFill>
+                  </a:tcPr>
+                </a:tc>
+                <a:tc>
+                  <a:txBody>
+                    <a:bodyPr/>
+                    <a:lstStyle/>
+                    <a:p>
+                      <a:pPr marL="0" marR="0" indent="0" algn="ctr" defTabSz="914400" rtl="0" eaLnBrk="1" fontAlgn="auto" latinLnBrk="0" hangingPunct="1">
+                        <a:lnSpc>
+                          <a:spcPct val="100000"/>
+                        </a:lnSpc>
+                        <a:spcBef>
+                          <a:spcPts val="0"/>
+                        </a:spcBef>
+                        <a:spcAft>
+                          <a:spcPts val="0"/>
+                        </a:spcAft>
+                        <a:buClrTx/>
+                        <a:buSzTx/>
+                        <a:buFontTx/>
+                        <a:buNone/>
+                        <a:tabLst/>
+                        <a:defRPr/>
+                      </a:pPr>
+                      <a:r>
+                        <a:rPr lang="en-US" altLang="zh-CN" sz="1600" b="0" dirty="0" smtClean="0">
+                          <a:solidFill>
+                            <a:schemeClr val="tx1"/>
+                          </a:solidFill>
+                        </a:rPr>
+                        <a:t>data1</a:t>
+                      </a:r>
+                      <a:endParaRPr lang="zh-CN" altLang="en-US" sz="1600" b="0" dirty="0" smtClean="0">
+                        <a:solidFill>
+                          <a:schemeClr val="tx1"/>
+                        </a:solidFill>
+                      </a:endParaRPr>
+                    </a:p>
+                    <a:p>
+                      <a:pPr algn="ctr"/>
+                      <a:endParaRPr lang="zh-CN" altLang="en-US" sz="1600" b="0" dirty="0">
+                        <a:solidFill>
+                          <a:schemeClr val="tx1"/>
+                        </a:solidFill>
+                      </a:endParaRPr>
+                    </a:p>
+                  </a:txBody>
+                  <a:tcPr>
+                    <a:lnL w="12700" cap="flat" cmpd="sng" algn="ctr">
+                      <a:solidFill>
+                        <a:schemeClr val="tx1"/>
+                      </a:solidFill>
+                      <a:prstDash val="solid"/>
+                      <a:round/>
+                      <a:headEnd type="none" w="med" len="med"/>
+                      <a:tailEnd type="none" w="med" len="med"/>
+                    </a:lnL>
+                    <a:lnR w="12700" cap="flat" cmpd="sng" algn="ctr">
+                      <a:solidFill>
+                        <a:schemeClr val="tx1"/>
+                      </a:solidFill>
+                      <a:prstDash val="solid"/>
+                      <a:round/>
+                      <a:headEnd type="none" w="med" len="med"/>
+                      <a:tailEnd type="none" w="med" len="med"/>
+                    </a:lnR>
+                    <a:lnT w="12700" cap="flat" cmpd="sng" algn="ctr">
+                      <a:solidFill>
+                        <a:schemeClr val="tx1"/>
+                      </a:solidFill>
+                      <a:prstDash val="solid"/>
+                      <a:round/>
+                      <a:headEnd type="none" w="med" len="med"/>
+                      <a:tailEnd type="none" w="med" len="med"/>
+                    </a:lnT>
+                    <a:lnB w="12700" cap="flat" cmpd="sng" algn="ctr">
+                      <a:solidFill>
+                        <a:schemeClr val="tx1"/>
+                      </a:solidFill>
+                      <a:prstDash val="solid"/>
+                      <a:round/>
+                      <a:headEnd type="none" w="med" len="med"/>
+                      <a:tailEnd type="none" w="med" len="med"/>
+                    </a:lnB>
+                    <a:solidFill>
+                      <a:schemeClr val="accent4"/>
+                    </a:solidFill>
+                  </a:tcPr>
+                </a:tc>
+                <a:extLst>
+                  <a:ext uri="{0D108BD9-81ED-4DB2-BD59-A6C34878D82A}">
+                    <a16:rowId xmlns:a16="http://schemas.microsoft.com/office/drawing/2014/main" val="4207742222"/>
+                  </a:ext>
+                </a:extLst>
+              </a:tr>
+            </a:tbl>
+          </a:graphicData>
+        </a:graphic>
+      </p:graphicFrame>
+      <p:cxnSp>
+        <p:nvCxnSpPr>
+          <p:cNvPr id="8" name="直接箭头连接符 7"/>
+          <p:cNvCxnSpPr/>
+          <p:nvPr/>
+        </p:nvCxnSpPr>
+        <p:spPr>
+          <a:xfrm flipV="1">
+            <a:off x="3657600" y="3206338"/>
+            <a:ext cx="1" cy="905614"/>
+          </a:xfrm>
+          <a:prstGeom prst="straightConnector1">
+            <a:avLst/>
+          </a:prstGeom>
+          <a:ln w="50800">
+            <a:tailEnd type="triangle"/>
+          </a:ln>
+        </p:spPr>
+        <p:style>
+          <a:lnRef idx="1">
+            <a:schemeClr val="accent1"/>
+          </a:lnRef>
+          <a:fillRef idx="0">
+            <a:schemeClr val="accent1"/>
+          </a:fillRef>
+          <a:effectRef idx="0">
+            <a:schemeClr val="accent1"/>
+          </a:effectRef>
+          <a:fontRef idx="minor">
+            <a:schemeClr val="tx1"/>
+          </a:fontRef>
+        </p:style>
+      </p:cxnSp>
+      <p:sp>
+        <p:nvSpPr>
+          <p:cNvPr id="12" name="文本框 11"/>
+          <p:cNvSpPr txBox="1"/>
+          <p:nvPr/>
+        </p:nvSpPr>
+        <p:spPr>
+          <a:xfrm>
+            <a:off x="2027025" y="3785154"/>
+            <a:ext cx="1630575" cy="338554"/>
+          </a:xfrm>
+          <a:prstGeom prst="rect">
+            <a:avLst/>
+          </a:prstGeom>
+          <a:noFill/>
+        </p:spPr>
+        <p:txBody>
+          <a:bodyPr wrap="none" rtlCol="0">
+            <a:spAutoFit/>
+          </a:bodyPr>
+          <a:lstStyle/>
+          <a:p>
+            <a:r>
+              <a:rPr lang="en-US" altLang="zh-CN" sz="1600" dirty="0"/>
+              <a:t>Begin free </a:t>
+            </a:r>
+            <a:r>
+              <a:rPr lang="en-US" altLang="zh-CN" sz="1600" dirty="0" smtClean="0"/>
+              <a:t>offset</a:t>
+            </a:r>
+            <a:endParaRPr lang="zh-CN" altLang="en-US" sz="1600" dirty="0"/>
+          </a:p>
+        </p:txBody>
+      </p:sp>
+      <p:cxnSp>
+        <p:nvCxnSpPr>
+          <p:cNvPr id="13" name="直接箭头连接符 12"/>
+          <p:cNvCxnSpPr/>
+          <p:nvPr/>
+        </p:nvCxnSpPr>
+        <p:spPr>
+          <a:xfrm flipV="1">
+            <a:off x="8775502" y="3767327"/>
+            <a:ext cx="1" cy="590917"/>
+          </a:xfrm>
+          <a:prstGeom prst="straightConnector1">
+            <a:avLst/>
+          </a:prstGeom>
+          <a:ln w="50800">
+            <a:tailEnd type="triangle"/>
+          </a:ln>
+        </p:spPr>
+        <p:style>
+          <a:lnRef idx="1">
+            <a:schemeClr val="accent1"/>
+          </a:lnRef>
+          <a:fillRef idx="0">
+            <a:schemeClr val="accent1"/>
+          </a:fillRef>
+          <a:effectRef idx="0">
+            <a:schemeClr val="accent1"/>
+          </a:effectRef>
+          <a:fontRef idx="minor">
+            <a:schemeClr val="tx1"/>
+          </a:fontRef>
+        </p:style>
+      </p:cxnSp>
+      <p:sp>
+        <p:nvSpPr>
+          <p:cNvPr id="15" name="文本框 14"/>
+          <p:cNvSpPr txBox="1"/>
+          <p:nvPr/>
+        </p:nvSpPr>
+        <p:spPr>
+          <a:xfrm>
+            <a:off x="8775502" y="3893508"/>
+            <a:ext cx="1630575" cy="338554"/>
+          </a:xfrm>
+          <a:prstGeom prst="rect">
+            <a:avLst/>
+          </a:prstGeom>
+          <a:noFill/>
+        </p:spPr>
+        <p:txBody>
+          <a:bodyPr wrap="none" rtlCol="0">
+            <a:spAutoFit/>
+          </a:bodyPr>
+          <a:lstStyle/>
+          <a:p>
+            <a:r>
+              <a:rPr lang="en-US" altLang="zh-CN" sz="1600" dirty="0"/>
+              <a:t>Begin free </a:t>
+            </a:r>
+            <a:r>
+              <a:rPr lang="en-US" altLang="zh-CN" sz="1600" dirty="0" smtClean="0"/>
+              <a:t>offset</a:t>
+            </a:r>
+            <a:endParaRPr lang="zh-CN" altLang="en-US" sz="1600" dirty="0"/>
+          </a:p>
+        </p:txBody>
+      </p:sp>
+      <p:sp>
+        <p:nvSpPr>
+          <p:cNvPr id="16" name="文本框 15"/>
+          <p:cNvSpPr txBox="1"/>
+          <p:nvPr/>
+        </p:nvSpPr>
+        <p:spPr>
+          <a:xfrm>
+            <a:off x="842566" y="4474018"/>
+            <a:ext cx="5020926" cy="2308324"/>
+          </a:xfrm>
+          <a:prstGeom prst="rect">
+            <a:avLst/>
+          </a:prstGeom>
+          <a:noFill/>
+        </p:spPr>
+        <p:txBody>
+          <a:bodyPr wrap="none" rtlCol="0">
+            <a:spAutoFit/>
+          </a:bodyPr>
+          <a:lstStyle/>
+          <a:p>
+            <a:r>
+              <a:rPr lang="en-US" altLang="zh-CN" sz="1600" dirty="0" err="1"/>
+              <a:t>D</a:t>
+            </a:r>
+            <a:r>
+              <a:rPr lang="en-US" altLang="zh-CN" sz="1600" dirty="0" err="1" smtClean="0"/>
+              <a:t>ataList</a:t>
+            </a:r>
+            <a:r>
+              <a:rPr lang="zh-CN" altLang="en-US" sz="1600" dirty="0" smtClean="0"/>
+              <a:t>： </a:t>
+            </a:r>
+            <a:r>
+              <a:rPr lang="en-US" altLang="zh-CN" sz="1600" dirty="0" smtClean="0"/>
+              <a:t>(offset1,len1), (offset2,len2),… (</a:t>
+            </a:r>
+            <a:r>
+              <a:rPr lang="en-US" altLang="zh-CN" sz="1600" dirty="0" err="1" smtClean="0"/>
+              <a:t>offsetN</a:t>
+            </a:r>
+            <a:r>
+              <a:rPr lang="en-US" altLang="zh-CN" sz="1600" dirty="0" smtClean="0"/>
+              <a:t>, </a:t>
+            </a:r>
+            <a:r>
+              <a:rPr lang="en-US" altLang="zh-CN" sz="1600" dirty="0" err="1" smtClean="0"/>
+              <a:t>lenN</a:t>
+            </a:r>
+            <a:r>
+              <a:rPr lang="en-US" altLang="zh-CN" sz="1600" dirty="0" smtClean="0"/>
+              <a:t>)</a:t>
+            </a:r>
+          </a:p>
+          <a:p>
+            <a:r>
+              <a:rPr lang="en-US" altLang="zh-CN" sz="1600" dirty="0"/>
+              <a:t>D</a:t>
+            </a:r>
+            <a:r>
+              <a:rPr lang="en-US" altLang="zh-CN" sz="1600" dirty="0" smtClean="0"/>
+              <a:t>ata </a:t>
+            </a:r>
+            <a:r>
+              <a:rPr lang="en-US" altLang="zh-CN" sz="1600" dirty="0" smtClean="0"/>
+              <a:t>offset</a:t>
+            </a:r>
+            <a:r>
+              <a:rPr lang="zh-CN" altLang="en-US" sz="1600" dirty="0" smtClean="0"/>
+              <a:t>：</a:t>
+            </a:r>
+            <a:r>
+              <a:rPr lang="en-US" altLang="zh-CN" sz="1600" dirty="0" err="1" smtClean="0"/>
+              <a:t>dataExtent</a:t>
+            </a:r>
+            <a:r>
+              <a:rPr lang="en-US" altLang="zh-CN" sz="1600" dirty="0" smtClean="0"/>
+              <a:t> length – data extent header</a:t>
+            </a:r>
+          </a:p>
+          <a:p>
+            <a:endParaRPr lang="en-US" altLang="zh-CN" sz="1600" dirty="0"/>
+          </a:p>
+          <a:p>
+            <a:r>
+              <a:rPr lang="en-US" altLang="zh-CN" sz="1600" dirty="0" smtClean="0"/>
+              <a:t>Loop </a:t>
+            </a:r>
+            <a:r>
+              <a:rPr lang="en-US" altLang="zh-CN" sz="1600" dirty="0" err="1" smtClean="0"/>
+              <a:t>i</a:t>
+            </a:r>
+            <a:r>
+              <a:rPr lang="en-US" altLang="zh-CN" sz="1600" dirty="0" smtClean="0"/>
+              <a:t> = N; </a:t>
+            </a:r>
+            <a:r>
+              <a:rPr lang="en-US" altLang="zh-CN" sz="1600" dirty="0" err="1" smtClean="0"/>
+              <a:t>i</a:t>
+            </a:r>
+            <a:r>
+              <a:rPr lang="en-US" altLang="zh-CN" sz="1600" dirty="0" smtClean="0"/>
+              <a:t> &gt;= 1; </a:t>
+            </a:r>
+            <a:r>
+              <a:rPr lang="en-US" altLang="zh-CN" sz="1600" dirty="0" err="1" smtClean="0"/>
+              <a:t>i</a:t>
+            </a:r>
+            <a:r>
+              <a:rPr lang="en-US" altLang="zh-CN" sz="1600" dirty="0" smtClean="0"/>
+              <a:t>++:</a:t>
+            </a:r>
+          </a:p>
+          <a:p>
+            <a:r>
+              <a:rPr lang="en-US" altLang="zh-CN" sz="1600" dirty="0"/>
+              <a:t> </a:t>
+            </a:r>
+            <a:r>
+              <a:rPr lang="en-US" altLang="zh-CN" sz="1600" dirty="0" smtClean="0"/>
+              <a:t>   if (</a:t>
+            </a:r>
+            <a:r>
+              <a:rPr lang="en-US" altLang="zh-CN" sz="1600" dirty="0" err="1" smtClean="0"/>
+              <a:t>offseti</a:t>
+            </a:r>
+            <a:r>
+              <a:rPr lang="en-US" altLang="zh-CN" sz="1600" dirty="0" smtClean="0"/>
+              <a:t> + </a:t>
+            </a:r>
+            <a:r>
+              <a:rPr lang="en-US" altLang="zh-CN" sz="1600" dirty="0" err="1" smtClean="0"/>
+              <a:t>leni</a:t>
+            </a:r>
+            <a:r>
+              <a:rPr lang="en-US" altLang="zh-CN" sz="1600" dirty="0" smtClean="0"/>
+              <a:t> != data offset):</a:t>
+            </a:r>
+          </a:p>
+          <a:p>
+            <a:r>
+              <a:rPr lang="en-US" altLang="zh-CN" sz="1600" dirty="0"/>
+              <a:t> </a:t>
+            </a:r>
+            <a:r>
+              <a:rPr lang="en-US" altLang="zh-CN" sz="1600" dirty="0" smtClean="0"/>
+              <a:t>      </a:t>
+            </a:r>
+            <a:r>
+              <a:rPr lang="en-US" altLang="zh-CN" sz="1600" dirty="0" err="1" smtClean="0"/>
+              <a:t>memmov</a:t>
+            </a:r>
+            <a:r>
+              <a:rPr lang="en-US" altLang="zh-CN" sz="1600" dirty="0" smtClean="0"/>
+              <a:t>(</a:t>
+            </a:r>
+            <a:r>
+              <a:rPr lang="en-US" altLang="zh-CN" sz="1600" dirty="0" err="1" smtClean="0"/>
+              <a:t>offseti</a:t>
+            </a:r>
+            <a:r>
+              <a:rPr lang="en-US" altLang="zh-CN" sz="1600" dirty="0" smtClean="0"/>
+              <a:t>, data offset – </a:t>
+            </a:r>
+            <a:r>
+              <a:rPr lang="en-US" altLang="zh-CN" sz="1600" dirty="0" err="1" smtClean="0"/>
+              <a:t>leni</a:t>
+            </a:r>
+            <a:r>
+              <a:rPr lang="en-US" altLang="zh-CN" sz="1600" dirty="0" smtClean="0"/>
+              <a:t>, </a:t>
+            </a:r>
+            <a:r>
+              <a:rPr lang="en-US" altLang="zh-CN" sz="1600" dirty="0" err="1" smtClean="0"/>
+              <a:t>leni</a:t>
+            </a:r>
+            <a:r>
+              <a:rPr lang="en-US" altLang="zh-CN" sz="1600" dirty="0" smtClean="0"/>
+              <a:t>)</a:t>
+            </a:r>
+          </a:p>
+          <a:p>
+            <a:endParaRPr lang="en-US" altLang="zh-CN" sz="1600" dirty="0"/>
+          </a:p>
+          <a:p>
+            <a:r>
+              <a:rPr lang="en-US" altLang="zh-CN" sz="1600" dirty="0" smtClean="0"/>
+              <a:t>    data offset -= </a:t>
+            </a:r>
+            <a:r>
+              <a:rPr lang="en-US" altLang="zh-CN" sz="1600" dirty="0" err="1" smtClean="0"/>
+              <a:t>leni</a:t>
+            </a:r>
+            <a:r>
+              <a:rPr lang="en-US" altLang="zh-CN" sz="1600" dirty="0" smtClean="0"/>
+              <a:t>;</a:t>
+            </a:r>
+          </a:p>
+          <a:p>
+            <a:r>
+              <a:rPr lang="en-US" altLang="zh-CN" sz="1600" dirty="0" smtClean="0"/>
+              <a:t>End loop;</a:t>
+            </a:r>
+            <a:endParaRPr lang="zh-CN" altLang="en-US" sz="1600" dirty="0"/>
+          </a:p>
+        </p:txBody>
+      </p:sp>
+      <p:cxnSp>
+        <p:nvCxnSpPr>
+          <p:cNvPr id="17" name="直接箭头连接符 16"/>
+          <p:cNvCxnSpPr/>
+          <p:nvPr/>
+        </p:nvCxnSpPr>
+        <p:spPr>
+          <a:xfrm flipV="1">
+            <a:off x="4586166" y="3767328"/>
+            <a:ext cx="2" cy="464734"/>
+          </a:xfrm>
+          <a:prstGeom prst="straightConnector1">
+            <a:avLst/>
+          </a:prstGeom>
+          <a:ln w="50800">
+            <a:tailEnd type="triangle"/>
+          </a:ln>
+        </p:spPr>
+        <p:style>
+          <a:lnRef idx="1">
+            <a:schemeClr val="accent1"/>
+          </a:lnRef>
+          <a:fillRef idx="0">
+            <a:schemeClr val="accent1"/>
+          </a:fillRef>
+          <a:effectRef idx="0">
+            <a:schemeClr val="accent1"/>
+          </a:effectRef>
+          <a:fontRef idx="minor">
+            <a:schemeClr val="tx1"/>
+          </a:fontRef>
+        </p:style>
+      </p:cxnSp>
+      <p:sp>
+        <p:nvSpPr>
+          <p:cNvPr id="21" name="文本框 20"/>
+          <p:cNvSpPr txBox="1"/>
+          <p:nvPr/>
+        </p:nvSpPr>
+        <p:spPr>
+          <a:xfrm>
+            <a:off x="4581387" y="3773398"/>
+            <a:ext cx="1146468" cy="338554"/>
+          </a:xfrm>
+          <a:prstGeom prst="rect">
+            <a:avLst/>
+          </a:prstGeom>
+          <a:noFill/>
+        </p:spPr>
+        <p:txBody>
+          <a:bodyPr wrap="none" rtlCol="0">
+            <a:spAutoFit/>
+          </a:bodyPr>
+          <a:lstStyle/>
+          <a:p>
+            <a:r>
+              <a:rPr lang="en-US" altLang="zh-CN" sz="1600" dirty="0" smtClean="0"/>
+              <a:t>Data offset</a:t>
+            </a:r>
+            <a:endParaRPr lang="zh-CN" altLang="en-US" sz="1600" dirty="0"/>
+          </a:p>
+        </p:txBody>
+      </p:sp>
+    </p:spTree>
+    <p:extLst>
+      <p:ext uri="{BB962C8B-B14F-4D97-AF65-F5344CB8AC3E}">
+        <p14:creationId xmlns:p14="http://schemas.microsoft.com/office/powerpoint/2010/main" val="3172504042"/>
+      </p:ext>
+    </p:extLst>
+  </p:cSld>
+  <p:clrMapOvr>
+    <a:masterClrMapping/>
+  </p:clrMapOvr>
+</p:sld>
+</file>
+
+<file path=ppt/slides/slide13.xml><?xml version="1.0" encoding="utf-8"?>
+<p:sld xmlns:a="http://schemas.openxmlformats.org/drawingml/2006/main" xmlns:r="http://schemas.openxmlformats.org/officeDocument/2006/relationships" xmlns:p="http://schemas.openxmlformats.org/presentationml/2006/main">
+  <p:cSld>
+    <p:spTree>
+      <p:nvGrpSpPr>
+        <p:cNvPr id="1" name=""/>
+        <p:cNvGrpSpPr/>
+        <p:nvPr/>
+      </p:nvGrpSpPr>
+      <p:grpSpPr>
+        <a:xfrm>
+          <a:off x="0" y="0"/>
+          <a:ext cx="0" cy="0"/>
+          <a:chOff x="0" y="0"/>
+          <a:chExt cx="0" cy="0"/>
+        </a:xfrm>
+      </p:grpSpPr>
+      <p:sp>
+        <p:nvSpPr>
+          <p:cNvPr id="2" name="标题 1"/>
+          <p:cNvSpPr>
+            <a:spLocks noGrp="1"/>
+          </p:cNvSpPr>
+          <p:nvPr>
+            <p:ph type="title"/>
+          </p:nvPr>
+        </p:nvSpPr>
+        <p:spPr/>
+        <p:txBody>
+          <a:bodyPr/>
+          <a:lstStyle/>
+          <a:p>
+            <a:r>
+              <a:rPr lang="en-US" altLang="zh-CN" dirty="0" smtClean="0"/>
               <a:t>Relation extent</a:t>
             </a:r>
             <a:endParaRPr lang="zh-CN" altLang="en-US" dirty="0"/>
@@ -11821,14 +12661,14 @@
           <p:nvPr>
             <p:extLst>
               <p:ext uri="{D42A27DB-BD31-4B8C-83A1-F6EECF244321}">
-                <p14:modId xmlns:p14="http://schemas.microsoft.com/office/powerpoint/2010/main" val="1266192036"/>
+                <p14:modId xmlns:p14="http://schemas.microsoft.com/office/powerpoint/2010/main" val="102586341"/>
               </p:ext>
             </p:extLst>
           </p:nvPr>
         </p:nvGraphicFramePr>
         <p:xfrm>
-          <a:off x="554862" y="1761140"/>
-          <a:ext cx="6902006" cy="4803203"/>
+          <a:off x="554862" y="1761141"/>
+          <a:ext cx="6902006" cy="4979008"/>
         </p:xfrm>
         <a:graphic>
           <a:graphicData uri="http://schemas.openxmlformats.org/drawingml/2006/table">
@@ -11866,7 +12706,7 @@
                   </a:extLst>
                 </a:gridCol>
               </a:tblGrid>
-              <a:tr h="310169">
+              <a:tr h="296523">
                 <a:tc gridSpan="4">
                   <a:txBody>
                     <a:bodyPr/>
@@ -11874,14 +12714,14 @@
                     <a:p>
                       <a:pPr algn="ctr"/>
                       <a:r>
-                        <a:rPr lang="en-US" altLang="zh-CN" sz="1600" dirty="0" smtClean="0">
+                        <a:rPr lang="en-US" altLang="zh-CN" sz="1400" dirty="0" smtClean="0">
                           <a:solidFill>
                             <a:schemeClr val="tx1"/>
                           </a:solidFill>
                         </a:rPr>
                         <a:t>Relation Extent·</a:t>
                       </a:r>
-                      <a:endParaRPr lang="zh-CN" altLang="en-US" sz="1600" dirty="0">
+                      <a:endParaRPr lang="zh-CN" altLang="en-US" sz="1400" dirty="0">
                         <a:solidFill>
                           <a:schemeClr val="tx1"/>
                         </a:solidFill>
@@ -12118,17 +12958,17 @@
                   </a:ext>
                 </a:extLst>
               </a:tr>
-              <a:tr h="310169">
-                <a:tc>
-                  <a:txBody>
-                    <a:bodyPr/>
-                    <a:lstStyle/>
-                    <a:p>
-                      <a:r>
-                        <a:rPr lang="zh-CN" altLang="en-US" sz="1600" dirty="0" smtClean="0"/>
+              <a:tr h="296523">
+                <a:tc>
+                  <a:txBody>
+                    <a:bodyPr/>
+                    <a:lstStyle/>
+                    <a:p>
+                      <a:r>
+                        <a:rPr lang="zh-CN" altLang="en-US" sz="1400" dirty="0" smtClean="0"/>
                         <a:t>名称</a:t>
                       </a:r>
-                      <a:endParaRPr lang="zh-CN" altLang="en-US" sz="1600" dirty="0"/>
+                      <a:endParaRPr lang="zh-CN" altLang="en-US" sz="1400" dirty="0"/>
                     </a:p>
                   </a:txBody>
                   <a:tcPr>
@@ -12187,10 +13027,10 @@
                     <a:lstStyle/>
                     <a:p>
                       <a:r>
-                        <a:rPr lang="zh-CN" altLang="en-US" sz="1600" dirty="0" smtClean="0"/>
+                        <a:rPr lang="zh-CN" altLang="en-US" sz="1400" dirty="0" smtClean="0"/>
                         <a:t>类型</a:t>
                       </a:r>
-                      <a:endParaRPr lang="zh-CN" altLang="en-US" sz="1600" dirty="0"/>
+                      <a:endParaRPr lang="zh-CN" altLang="en-US" sz="1400" dirty="0"/>
                     </a:p>
                   </a:txBody>
                   <a:tcPr>
@@ -12249,10 +13089,10 @@
                     <a:lstStyle/>
                     <a:p>
                       <a:r>
-                        <a:rPr lang="zh-CN" altLang="en-US" sz="1600" dirty="0" smtClean="0"/>
+                        <a:rPr lang="zh-CN" altLang="en-US" sz="1400" dirty="0" smtClean="0"/>
                         <a:t>长度</a:t>
                       </a:r>
-                      <a:endParaRPr lang="zh-CN" altLang="en-US" sz="1600" dirty="0"/>
+                      <a:endParaRPr lang="zh-CN" altLang="en-US" sz="1400" dirty="0"/>
                     </a:p>
                   </a:txBody>
                   <a:tcPr>
@@ -12311,10 +13151,10 @@
                     <a:lstStyle/>
                     <a:p>
                       <a:r>
-                        <a:rPr lang="zh-CN" altLang="en-US" sz="1600" dirty="0" smtClean="0"/>
+                        <a:rPr lang="zh-CN" altLang="en-US" sz="1400" dirty="0" smtClean="0"/>
                         <a:t>描述</a:t>
                       </a:r>
-                      <a:endParaRPr lang="zh-CN" altLang="en-US" sz="1600" dirty="0"/>
+                      <a:endParaRPr lang="zh-CN" altLang="en-US" sz="1400" dirty="0"/>
                     </a:p>
                   </a:txBody>
                   <a:tcPr>
@@ -12373,17 +13213,17 @@
                   </a:ext>
                 </a:extLst>
               </a:tr>
-              <a:tr h="310169">
-                <a:tc>
-                  <a:txBody>
-                    <a:bodyPr/>
-                    <a:lstStyle/>
-                    <a:p>
-                      <a:r>
-                        <a:rPr lang="en-US" altLang="zh-CN" sz="1600" dirty="0" smtClean="0"/>
+              <a:tr h="296523">
+                <a:tc>
+                  <a:txBody>
+                    <a:bodyPr/>
+                    <a:lstStyle/>
+                    <a:p>
+                      <a:r>
+                        <a:rPr lang="en-US" altLang="zh-CN" sz="1400" dirty="0" smtClean="0"/>
                         <a:t>Extent Header</a:t>
                       </a:r>
-                      <a:endParaRPr lang="zh-CN" altLang="en-US" sz="1600" dirty="0"/>
+                      <a:endParaRPr lang="zh-CN" altLang="en-US" sz="1400" dirty="0"/>
                     </a:p>
                   </a:txBody>
                   <a:tcPr>
@@ -12442,10 +13282,10 @@
                     <a:lstStyle/>
                     <a:p>
                       <a:r>
-                        <a:rPr lang="en-US" altLang="zh-CN" sz="1600" dirty="0" smtClean="0"/>
+                        <a:rPr lang="en-US" altLang="zh-CN" sz="1400" dirty="0" smtClean="0"/>
                         <a:t>BYTES</a:t>
                       </a:r>
-                      <a:endParaRPr lang="zh-CN" altLang="en-US" sz="1600" dirty="0"/>
+                      <a:endParaRPr lang="zh-CN" altLang="en-US" sz="1400" dirty="0"/>
                     </a:p>
                   </a:txBody>
                   <a:tcPr>
@@ -12504,10 +13344,10 @@
                     <a:lstStyle/>
                     <a:p>
                       <a:r>
-                        <a:rPr lang="en-US" altLang="zh-CN" sz="1600" dirty="0" smtClean="0"/>
+                        <a:rPr lang="en-US" altLang="zh-CN" sz="1400" dirty="0" smtClean="0"/>
                         <a:t>12</a:t>
                       </a:r>
-                      <a:endParaRPr lang="zh-CN" altLang="en-US" sz="1600" dirty="0"/>
+                      <a:endParaRPr lang="zh-CN" altLang="en-US" sz="1400" dirty="0"/>
                     </a:p>
                   </a:txBody>
                   <a:tcPr>
@@ -12565,7 +13405,7 @@
                     <a:bodyPr/>
                     <a:lstStyle/>
                     <a:p>
-                      <a:endParaRPr lang="zh-CN" altLang="en-US" sz="1600" dirty="0"/>
+                      <a:endParaRPr lang="zh-CN" altLang="en-US" sz="1400" dirty="0"/>
                     </a:p>
                   </a:txBody>
                   <a:tcPr>
@@ -12624,17 +13464,17 @@
                   </a:ext>
                 </a:extLst>
               </a:tr>
-              <a:tr h="310169">
-                <a:tc>
-                  <a:txBody>
-                    <a:bodyPr/>
-                    <a:lstStyle/>
-                    <a:p>
-                      <a:r>
-                        <a:rPr lang="en-US" altLang="zh-CN" sz="1600" dirty="0" err="1" smtClean="0"/>
+              <a:tr h="296523">
+                <a:tc>
+                  <a:txBody>
+                    <a:bodyPr/>
+                    <a:lstStyle/>
+                    <a:p>
+                      <a:r>
+                        <a:rPr lang="en-US" altLang="zh-CN" sz="1400" dirty="0" err="1" smtClean="0"/>
                         <a:t>clid</a:t>
                       </a:r>
-                      <a:endParaRPr lang="zh-CN" altLang="en-US" sz="1600" dirty="0"/>
+                      <a:endParaRPr lang="zh-CN" altLang="en-US" sz="1400" dirty="0"/>
                     </a:p>
                   </a:txBody>
                   <a:tcPr>
@@ -12693,10 +13533,10 @@
                     <a:lstStyle/>
                     <a:p>
                       <a:r>
-                        <a:rPr lang="en-US" altLang="zh-CN" sz="1600" dirty="0" smtClean="0"/>
+                        <a:rPr lang="en-US" altLang="zh-CN" sz="1400" dirty="0" smtClean="0"/>
                         <a:t>UINT32</a:t>
                       </a:r>
-                      <a:endParaRPr lang="zh-CN" altLang="en-US" sz="1600" dirty="0"/>
+                      <a:endParaRPr lang="zh-CN" altLang="en-US" sz="1400" dirty="0"/>
                     </a:p>
                   </a:txBody>
                   <a:tcPr>
@@ -12755,10 +13595,10 @@
                     <a:lstStyle/>
                     <a:p>
                       <a:r>
-                        <a:rPr lang="en-US" altLang="zh-CN" sz="1600" dirty="0" smtClean="0"/>
+                        <a:rPr lang="en-US" altLang="zh-CN" sz="1400" dirty="0" smtClean="0"/>
                         <a:t>4</a:t>
                       </a:r>
-                      <a:endParaRPr lang="zh-CN" altLang="en-US" sz="1600" dirty="0"/>
+                      <a:endParaRPr lang="zh-CN" altLang="en-US" sz="1400" dirty="0"/>
                     </a:p>
                   </a:txBody>
                   <a:tcPr>
@@ -12817,14 +13657,14 @@
                     <a:lstStyle/>
                     <a:p>
                       <a:r>
-                        <a:rPr lang="zh-CN" altLang="en-US" sz="1600" dirty="0" smtClean="0"/>
+                        <a:rPr lang="zh-CN" altLang="en-US" sz="1400" dirty="0" smtClean="0"/>
                         <a:t>所在的</a:t>
                       </a:r>
                       <a:r>
-                        <a:rPr lang="en-US" altLang="zh-CN" sz="1600" dirty="0" smtClean="0"/>
+                        <a:rPr lang="en-US" altLang="zh-CN" sz="1400" dirty="0" smtClean="0"/>
                         <a:t>cl</a:t>
                       </a:r>
-                      <a:endParaRPr lang="zh-CN" altLang="en-US" sz="1600" dirty="0"/>
+                      <a:endParaRPr lang="zh-CN" altLang="en-US" sz="1400" dirty="0"/>
                     </a:p>
                   </a:txBody>
                   <a:tcPr>
@@ -12883,17 +13723,17 @@
                   </a:ext>
                 </a:extLst>
               </a:tr>
-              <a:tr h="310169">
-                <a:tc>
-                  <a:txBody>
-                    <a:bodyPr/>
-                    <a:lstStyle/>
-                    <a:p>
-                      <a:r>
-                        <a:rPr lang="en-US" altLang="zh-CN" sz="1600" dirty="0" err="1" smtClean="0"/>
-                        <a:t>recordLevel</a:t>
-                      </a:r>
-                      <a:endParaRPr lang="zh-CN" altLang="en-US" sz="1600" dirty="0"/>
+              <a:tr h="296523">
+                <a:tc>
+                  <a:txBody>
+                    <a:bodyPr/>
+                    <a:lstStyle/>
+                    <a:p>
+                      <a:r>
+                        <a:rPr lang="en-US" altLang="zh-CN" sz="1400" dirty="0" smtClean="0"/>
+                        <a:t>Level</a:t>
+                      </a:r>
+                      <a:endParaRPr lang="zh-CN" altLang="en-US" sz="1400" dirty="0"/>
                     </a:p>
                   </a:txBody>
                   <a:tcPr>
@@ -12952,10 +13792,10 @@
                     <a:lstStyle/>
                     <a:p>
                       <a:r>
-                        <a:rPr lang="en-US" altLang="zh-CN" sz="1600" dirty="0" smtClean="0"/>
+                        <a:rPr lang="en-US" altLang="zh-CN" sz="1400" dirty="0" smtClean="0"/>
                         <a:t>UINT8</a:t>
                       </a:r>
-                      <a:endParaRPr lang="zh-CN" altLang="en-US" sz="1600" dirty="0"/>
+                      <a:endParaRPr lang="zh-CN" altLang="en-US" sz="1400" dirty="0"/>
                     </a:p>
                   </a:txBody>
                   <a:tcPr>
@@ -13014,10 +13854,10 @@
                     <a:lstStyle/>
                     <a:p>
                       <a:r>
-                        <a:rPr lang="en-US" altLang="zh-CN" sz="1600" dirty="0" smtClean="0"/>
+                        <a:rPr lang="en-US" altLang="zh-CN" sz="1400" dirty="0" smtClean="0"/>
                         <a:t>1</a:t>
                       </a:r>
-                      <a:endParaRPr lang="zh-CN" altLang="en-US" sz="1600" dirty="0"/>
+                      <a:endParaRPr lang="zh-CN" altLang="en-US" sz="1400" dirty="0"/>
                     </a:p>
                   </a:txBody>
                   <a:tcPr>
@@ -13076,18 +13916,22 @@
                     <a:lstStyle/>
                     <a:p>
                       <a:r>
-                        <a:rPr lang="zh-CN" altLang="en-US" sz="1600" dirty="0" smtClean="0"/>
+                        <a:rPr lang="zh-CN" altLang="en-US" sz="1400" dirty="0" smtClean="0"/>
                         <a:t>该</a:t>
                       </a:r>
                       <a:r>
-                        <a:rPr lang="en-US" altLang="zh-CN" sz="1600" dirty="0" smtClean="0"/>
-                        <a:t>extent</a:t>
-                      </a:r>
-                      <a:r>
-                        <a:rPr lang="zh-CN" altLang="en-US" sz="1600" dirty="0" smtClean="0"/>
-                        <a:t>所在等级</a:t>
-                      </a:r>
-                      <a:endParaRPr lang="zh-CN" altLang="en-US" sz="1600" dirty="0"/>
+                        <a:rPr lang="en-US" altLang="zh-CN" sz="1400" dirty="0" smtClean="0"/>
+                        <a:t>relation</a:t>
+                      </a:r>
+                      <a:r>
+                        <a:rPr lang="en-US" altLang="zh-CN" sz="1400" baseline="0" dirty="0" smtClean="0"/>
+                        <a:t> extent</a:t>
+                      </a:r>
+                      <a:r>
+                        <a:rPr lang="zh-CN" altLang="en-US" sz="1400" dirty="0" smtClean="0"/>
+                        <a:t>所在的等级</a:t>
+                      </a:r>
+                      <a:endParaRPr lang="zh-CN" altLang="en-US" sz="1400" dirty="0"/>
                     </a:p>
                   </a:txBody>
                   <a:tcPr>
@@ -13146,17 +13990,48 @@
                   </a:ext>
                 </a:extLst>
               </a:tr>
-              <a:tr h="310169">
-                <a:tc>
-                  <a:txBody>
-                    <a:bodyPr/>
-                    <a:lstStyle/>
-                    <a:p>
-                      <a:r>
-                        <a:rPr lang="en-US" altLang="zh-CN" sz="1600" dirty="0" err="1" smtClean="0"/>
-                        <a:t>idx</a:t>
-                      </a:r>
-                      <a:endParaRPr lang="zh-CN" altLang="en-US" sz="1600" dirty="0"/>
+              <a:tr h="296523">
+                <a:tc>
+                  <a:txBody>
+                    <a:bodyPr/>
+                    <a:lstStyle/>
+                    <a:p>
+                      <a:pPr marL="0" marR="0" indent="0" algn="l" defTabSz="914400" rtl="0" eaLnBrk="1" fontAlgn="auto" latinLnBrk="0" hangingPunct="1">
+                        <a:lnSpc>
+                          <a:spcPct val="100000"/>
+                        </a:lnSpc>
+                        <a:spcBef>
+                          <a:spcPts val="0"/>
+                        </a:spcBef>
+                        <a:spcAft>
+                          <a:spcPts val="0"/>
+                        </a:spcAft>
+                        <a:buClrTx/>
+                        <a:buSzTx/>
+                        <a:buFontTx/>
+                        <a:buNone/>
+                        <a:tabLst/>
+                        <a:defRPr/>
+                      </a:pPr>
+                      <a:r>
+                        <a:rPr lang="en-US" altLang="zh-CN" sz="1400" kern="1200" baseline="0" dirty="0" smtClean="0">
+                          <a:solidFill>
+                            <a:schemeClr val="dk1"/>
+                          </a:solidFill>
+                          <a:latin typeface="+mn-lt"/>
+                          <a:ea typeface="+mn-ea"/>
+                          <a:cs typeface="+mn-cs"/>
+                        </a:rPr>
+                        <a:t>pad</a:t>
+                      </a:r>
+                      <a:endParaRPr lang="zh-CN" altLang="en-US" sz="1400" kern="1200" baseline="0" dirty="0" smtClean="0">
+                        <a:solidFill>
+                          <a:schemeClr val="dk1"/>
+                        </a:solidFill>
+                        <a:latin typeface="+mn-lt"/>
+                        <a:ea typeface="+mn-ea"/>
+                        <a:cs typeface="+mn-cs"/>
+                      </a:endParaRPr>
                     </a:p>
                   </a:txBody>
                   <a:tcPr>
@@ -13215,10 +14090,10 @@
                     <a:lstStyle/>
                     <a:p>
                       <a:r>
-                        <a:rPr lang="en-US" altLang="zh-CN" sz="1600" dirty="0" smtClean="0"/>
-                        <a:t>UINT32</a:t>
-                      </a:r>
-                      <a:endParaRPr lang="zh-CN" altLang="en-US" sz="1600" dirty="0"/>
+                        <a:rPr lang="en-US" altLang="zh-CN" sz="1400" dirty="0" smtClean="0"/>
+                        <a:t>BYTES</a:t>
+                      </a:r>
+                      <a:endParaRPr lang="zh-CN" altLang="en-US" sz="1400" dirty="0"/>
                     </a:p>
                   </a:txBody>
                   <a:tcPr>
@@ -13277,10 +14152,10 @@
                     <a:lstStyle/>
                     <a:p>
                       <a:r>
-                        <a:rPr lang="en-US" altLang="zh-CN" sz="1600" dirty="0" smtClean="0"/>
-                        <a:t>4</a:t>
-                      </a:r>
-                      <a:endParaRPr lang="zh-CN" altLang="en-US" sz="1600" dirty="0"/>
+                        <a:rPr lang="en-US" altLang="zh-CN" sz="1400" dirty="0" smtClean="0"/>
+                        <a:t>3</a:t>
+                      </a:r>
+                      <a:endParaRPr lang="zh-CN" altLang="en-US" sz="1400" dirty="0"/>
                     </a:p>
                   </a:txBody>
                   <a:tcPr>
@@ -13338,19 +14213,7 @@
                     <a:bodyPr/>
                     <a:lstStyle/>
                     <a:p>
-                      <a:r>
-                        <a:rPr lang="zh-CN" altLang="en-US" sz="1600" dirty="0" smtClean="0"/>
-                        <a:t>在</a:t>
-                      </a:r>
-                      <a:r>
-                        <a:rPr lang="en-US" altLang="zh-CN" sz="1600" dirty="0" smtClean="0"/>
-                        <a:t>parent</a:t>
-                      </a:r>
-                      <a:r>
-                        <a:rPr lang="zh-CN" altLang="en-US" sz="1600" dirty="0" smtClean="0"/>
-                        <a:t>中的下标</a:t>
-                      </a:r>
-                      <a:endParaRPr lang="zh-CN" altLang="en-US" sz="1600" dirty="0"/>
+                      <a:endParaRPr lang="zh-CN" altLang="en-US" sz="1400" dirty="0"/>
                     </a:p>
                   </a:txBody>
                   <a:tcPr>
@@ -13405,25 +14268,63 @@
                 </a:tc>
                 <a:extLst>
                   <a:ext uri="{0D108BD9-81ED-4DB2-BD59-A6C34878D82A}">
-                    <a16:rowId xmlns:a16="http://schemas.microsoft.com/office/drawing/2014/main" val="1316835317"/>
+                    <a16:rowId xmlns:a16="http://schemas.microsoft.com/office/drawing/2014/main" val="4028668695"/>
                   </a:ext>
                 </a:extLst>
               </a:tr>
-              <a:tr h="2791523">
-                <a:tc>
-                  <a:txBody>
-                    <a:bodyPr/>
-                    <a:lstStyle/>
-                    <a:p>
-                      <a:r>
-                        <a:rPr lang="en-US" altLang="zh-CN" sz="1600" dirty="0" smtClean="0"/>
-                        <a:t>Extent</a:t>
-                      </a:r>
-                      <a:r>
-                        <a:rPr lang="en-US" altLang="zh-CN" sz="1600" baseline="0" dirty="0" smtClean="0"/>
-                        <a:t> slots[N]</a:t>
-                      </a:r>
-                      <a:endParaRPr lang="zh-CN" altLang="en-US" sz="1600" dirty="0"/>
+              <a:tr h="296523">
+                <a:tc>
+                  <a:txBody>
+                    <a:bodyPr/>
+                    <a:lstStyle/>
+                    <a:p>
+                      <a:pPr marL="0" marR="0" indent="0" algn="l" defTabSz="914400" rtl="0" eaLnBrk="1" fontAlgn="auto" latinLnBrk="0" hangingPunct="1">
+                        <a:lnSpc>
+                          <a:spcPct val="100000"/>
+                        </a:lnSpc>
+                        <a:spcBef>
+                          <a:spcPts val="0"/>
+                        </a:spcBef>
+                        <a:spcAft>
+                          <a:spcPts val="0"/>
+                        </a:spcAft>
+                        <a:buClrTx/>
+                        <a:buSzTx/>
+                        <a:buFontTx/>
+                        <a:buNone/>
+                        <a:tabLst/>
+                        <a:defRPr/>
+                      </a:pPr>
+                      <a:r>
+                        <a:rPr lang="en-US" altLang="zh-CN" sz="1400" kern="1200" baseline="0" dirty="0" smtClean="0">
+                          <a:solidFill>
+                            <a:schemeClr val="dk1"/>
+                          </a:solidFill>
+                          <a:latin typeface="+mn-lt"/>
+                          <a:ea typeface="+mn-ea"/>
+                          <a:cs typeface="+mn-cs"/>
+                        </a:rPr>
+                        <a:t>Slot </a:t>
+                      </a:r>
+                      <a:r>
+                        <a:rPr lang="en-US" altLang="zh-CN" sz="1400" kern="1200" baseline="0" dirty="0" err="1" smtClean="0">
+                          <a:solidFill>
+                            <a:schemeClr val="dk1"/>
+                          </a:solidFill>
+                          <a:latin typeface="+mn-lt"/>
+                          <a:ea typeface="+mn-ea"/>
+                          <a:cs typeface="+mn-cs"/>
+                        </a:rPr>
+                        <a:t>num</a:t>
+                      </a:r>
+                      <a:endParaRPr lang="zh-CN" altLang="en-US" sz="1400" kern="1200" baseline="0" dirty="0" smtClean="0">
+                        <a:solidFill>
+                          <a:schemeClr val="dk1"/>
+                        </a:solidFill>
+                        <a:latin typeface="+mn-lt"/>
+                        <a:ea typeface="+mn-ea"/>
+                        <a:cs typeface="+mn-cs"/>
+                      </a:endParaRPr>
                     </a:p>
                   </a:txBody>
                   <a:tcPr>
@@ -13482,10 +14383,10 @@
                     <a:lstStyle/>
                     <a:p>
                       <a:r>
-                        <a:rPr lang="en-US" altLang="zh-CN" sz="1600" dirty="0" smtClean="0"/>
-                        <a:t>BYTES</a:t>
-                      </a:r>
-                      <a:endParaRPr lang="zh-CN" altLang="en-US" sz="1600" dirty="0"/>
+                        <a:rPr lang="en-US" altLang="zh-CN" sz="1400" dirty="0" smtClean="0"/>
+                        <a:t>UINT16</a:t>
+                      </a:r>
+                      <a:endParaRPr lang="zh-CN" altLang="en-US" sz="1400" dirty="0"/>
                     </a:p>
                   </a:txBody>
                   <a:tcPr>
@@ -13544,10 +14445,10 @@
                     <a:lstStyle/>
                     <a:p>
                       <a:r>
-                        <a:rPr lang="en-US" altLang="zh-CN" sz="1600" dirty="0" smtClean="0"/>
-                        <a:t>4 * N</a:t>
-                      </a:r>
-                      <a:endParaRPr lang="zh-CN" altLang="en-US" sz="1600" dirty="0"/>
+                        <a:rPr lang="en-US" altLang="zh-CN" sz="1400" dirty="0" smtClean="0"/>
+                        <a:t>2</a:t>
+                      </a:r>
+                      <a:endParaRPr lang="zh-CN" altLang="en-US" sz="1400" dirty="0"/>
                     </a:p>
                   </a:txBody>
                   <a:tcPr>
@@ -13606,102 +14507,644 @@
                     <a:lstStyle/>
                     <a:p>
                       <a:r>
-                        <a:rPr lang="en-US" altLang="zh-CN" sz="1600" dirty="0" smtClean="0"/>
+                        <a:rPr lang="zh-CN" altLang="en-US" sz="1400" dirty="0" smtClean="0"/>
+                        <a:t>当前有效的槽位数</a:t>
+                      </a:r>
+                      <a:endParaRPr lang="zh-CN" altLang="en-US" sz="1400" dirty="0"/>
+                    </a:p>
+                  </a:txBody>
+                  <a:tcPr>
+                    <a:lnL w="12700" cap="flat" cmpd="sng" algn="ctr">
+                      <a:solidFill>
+                        <a:schemeClr val="tx1"/>
+                      </a:solidFill>
+                      <a:prstDash val="solid"/>
+                      <a:round/>
+                      <a:headEnd type="none" w="med" len="med"/>
+                      <a:tailEnd type="none" w="med" len="med"/>
+                    </a:lnL>
+                    <a:lnR w="12700" cap="flat" cmpd="sng" algn="ctr">
+                      <a:solidFill>
+                        <a:schemeClr val="tx1"/>
+                      </a:solidFill>
+                      <a:prstDash val="solid"/>
+                      <a:round/>
+                      <a:headEnd type="none" w="med" len="med"/>
+                      <a:tailEnd type="none" w="med" len="med"/>
+                    </a:lnR>
+                    <a:lnT w="12700" cap="flat" cmpd="sng" algn="ctr">
+                      <a:solidFill>
+                        <a:schemeClr val="tx1"/>
+                      </a:solidFill>
+                      <a:prstDash val="solid"/>
+                      <a:round/>
+                      <a:headEnd type="none" w="med" len="med"/>
+                      <a:tailEnd type="none" w="med" len="med"/>
+                    </a:lnT>
+                    <a:lnB w="12700" cap="flat" cmpd="sng" algn="ctr">
+                      <a:solidFill>
+                        <a:schemeClr val="tx1"/>
+                      </a:solidFill>
+                      <a:prstDash val="solid"/>
+                      <a:round/>
+                      <a:headEnd type="none" w="med" len="med"/>
+                      <a:tailEnd type="none" w="med" len="med"/>
+                    </a:lnB>
+                    <a:lnTlToBr w="12700" cmpd="sng">
+                      <a:noFill/>
+                      <a:prstDash val="solid"/>
+                    </a:lnTlToBr>
+                    <a:lnBlToTr w="12700" cmpd="sng">
+                      <a:noFill/>
+                      <a:prstDash val="solid"/>
+                    </a:lnBlToTr>
+                    <a:solidFill>
+                      <a:schemeClr val="bg2"/>
+                    </a:solidFill>
+                  </a:tcPr>
+                </a:tc>
+                <a:extLst>
+                  <a:ext uri="{0D108BD9-81ED-4DB2-BD59-A6C34878D82A}">
+                    <a16:rowId xmlns:a16="http://schemas.microsoft.com/office/drawing/2014/main" val="4170543432"/>
+                  </a:ext>
+                </a:extLst>
+              </a:tr>
+              <a:tr h="296523">
+                <a:tc>
+                  <a:txBody>
+                    <a:bodyPr/>
+                    <a:lstStyle/>
+                    <a:p>
+                      <a:r>
+                        <a:rPr lang="en-US" altLang="zh-CN" sz="1400" dirty="0" smtClean="0"/>
+                        <a:t>Slot size</a:t>
+                      </a:r>
+                      <a:endParaRPr lang="zh-CN" altLang="en-US" sz="1400" dirty="0"/>
+                    </a:p>
+                  </a:txBody>
+                  <a:tcPr>
+                    <a:lnL w="12700" cap="flat" cmpd="sng" algn="ctr">
+                      <a:solidFill>
+                        <a:schemeClr val="tx1"/>
+                      </a:solidFill>
+                      <a:prstDash val="solid"/>
+                      <a:round/>
+                      <a:headEnd type="none" w="med" len="med"/>
+                      <a:tailEnd type="none" w="med" len="med"/>
+                    </a:lnL>
+                    <a:lnR w="12700" cap="flat" cmpd="sng" algn="ctr">
+                      <a:solidFill>
+                        <a:schemeClr val="tx1"/>
+                      </a:solidFill>
+                      <a:prstDash val="solid"/>
+                      <a:round/>
+                      <a:headEnd type="none" w="med" len="med"/>
+                      <a:tailEnd type="none" w="med" len="med"/>
+                    </a:lnR>
+                    <a:lnT w="12700" cap="flat" cmpd="sng" algn="ctr">
+                      <a:solidFill>
+                        <a:schemeClr val="tx1"/>
+                      </a:solidFill>
+                      <a:prstDash val="solid"/>
+                      <a:round/>
+                      <a:headEnd type="none" w="med" len="med"/>
+                      <a:tailEnd type="none" w="med" len="med"/>
+                    </a:lnT>
+                    <a:lnB w="12700" cap="flat" cmpd="sng" algn="ctr">
+                      <a:solidFill>
+                        <a:schemeClr val="tx1"/>
+                      </a:solidFill>
+                      <a:prstDash val="solid"/>
+                      <a:round/>
+                      <a:headEnd type="none" w="med" len="med"/>
+                      <a:tailEnd type="none" w="med" len="med"/>
+                    </a:lnB>
+                    <a:lnTlToBr w="12700" cmpd="sng">
+                      <a:noFill/>
+                      <a:prstDash val="solid"/>
+                    </a:lnTlToBr>
+                    <a:lnBlToTr w="12700" cmpd="sng">
+                      <a:noFill/>
+                      <a:prstDash val="solid"/>
+                    </a:lnBlToTr>
+                    <a:solidFill>
+                      <a:schemeClr val="bg2"/>
+                    </a:solidFill>
+                  </a:tcPr>
+                </a:tc>
+                <a:tc>
+                  <a:txBody>
+                    <a:bodyPr/>
+                    <a:lstStyle/>
+                    <a:p>
+                      <a:r>
+                        <a:rPr lang="en-US" altLang="zh-CN" sz="1400" dirty="0" smtClean="0"/>
+                        <a:t>UINT16</a:t>
+                      </a:r>
+                      <a:endParaRPr lang="zh-CN" altLang="en-US" sz="1400" dirty="0"/>
+                    </a:p>
+                  </a:txBody>
+                  <a:tcPr>
+                    <a:lnL w="12700" cap="flat" cmpd="sng" algn="ctr">
+                      <a:solidFill>
+                        <a:schemeClr val="tx1"/>
+                      </a:solidFill>
+                      <a:prstDash val="solid"/>
+                      <a:round/>
+                      <a:headEnd type="none" w="med" len="med"/>
+                      <a:tailEnd type="none" w="med" len="med"/>
+                    </a:lnL>
+                    <a:lnR w="12700" cap="flat" cmpd="sng" algn="ctr">
+                      <a:solidFill>
+                        <a:schemeClr val="tx1"/>
+                      </a:solidFill>
+                      <a:prstDash val="solid"/>
+                      <a:round/>
+                      <a:headEnd type="none" w="med" len="med"/>
+                      <a:tailEnd type="none" w="med" len="med"/>
+                    </a:lnR>
+                    <a:lnT w="12700" cap="flat" cmpd="sng" algn="ctr">
+                      <a:solidFill>
+                        <a:schemeClr val="tx1"/>
+                      </a:solidFill>
+                      <a:prstDash val="solid"/>
+                      <a:round/>
+                      <a:headEnd type="none" w="med" len="med"/>
+                      <a:tailEnd type="none" w="med" len="med"/>
+                    </a:lnT>
+                    <a:lnB w="12700" cap="flat" cmpd="sng" algn="ctr">
+                      <a:solidFill>
+                        <a:schemeClr val="tx1"/>
+                      </a:solidFill>
+                      <a:prstDash val="solid"/>
+                      <a:round/>
+                      <a:headEnd type="none" w="med" len="med"/>
+                      <a:tailEnd type="none" w="med" len="med"/>
+                    </a:lnB>
+                    <a:lnTlToBr w="12700" cmpd="sng">
+                      <a:noFill/>
+                      <a:prstDash val="solid"/>
+                    </a:lnTlToBr>
+                    <a:lnBlToTr w="12700" cmpd="sng">
+                      <a:noFill/>
+                      <a:prstDash val="solid"/>
+                    </a:lnBlToTr>
+                    <a:solidFill>
+                      <a:schemeClr val="bg2"/>
+                    </a:solidFill>
+                  </a:tcPr>
+                </a:tc>
+                <a:tc>
+                  <a:txBody>
+                    <a:bodyPr/>
+                    <a:lstStyle/>
+                    <a:p>
+                      <a:r>
+                        <a:rPr lang="en-US" altLang="zh-CN" sz="1400" dirty="0" smtClean="0"/>
+                        <a:t>2</a:t>
+                      </a:r>
+                      <a:endParaRPr lang="zh-CN" altLang="en-US" sz="1400" dirty="0"/>
+                    </a:p>
+                  </a:txBody>
+                  <a:tcPr>
+                    <a:lnL w="12700" cap="flat" cmpd="sng" algn="ctr">
+                      <a:solidFill>
+                        <a:schemeClr val="tx1"/>
+                      </a:solidFill>
+                      <a:prstDash val="solid"/>
+                      <a:round/>
+                      <a:headEnd type="none" w="med" len="med"/>
+                      <a:tailEnd type="none" w="med" len="med"/>
+                    </a:lnL>
+                    <a:lnR w="12700" cap="flat" cmpd="sng" algn="ctr">
+                      <a:solidFill>
+                        <a:schemeClr val="tx1"/>
+                      </a:solidFill>
+                      <a:prstDash val="solid"/>
+                      <a:round/>
+                      <a:headEnd type="none" w="med" len="med"/>
+                      <a:tailEnd type="none" w="med" len="med"/>
+                    </a:lnR>
+                    <a:lnT w="12700" cap="flat" cmpd="sng" algn="ctr">
+                      <a:solidFill>
+                        <a:schemeClr val="tx1"/>
+                      </a:solidFill>
+                      <a:prstDash val="solid"/>
+                      <a:round/>
+                      <a:headEnd type="none" w="med" len="med"/>
+                      <a:tailEnd type="none" w="med" len="med"/>
+                    </a:lnT>
+                    <a:lnB w="12700" cap="flat" cmpd="sng" algn="ctr">
+                      <a:solidFill>
+                        <a:schemeClr val="tx1"/>
+                      </a:solidFill>
+                      <a:prstDash val="solid"/>
+                      <a:round/>
+                      <a:headEnd type="none" w="med" len="med"/>
+                      <a:tailEnd type="none" w="med" len="med"/>
+                    </a:lnB>
+                    <a:lnTlToBr w="12700" cmpd="sng">
+                      <a:noFill/>
+                      <a:prstDash val="solid"/>
+                    </a:lnTlToBr>
+                    <a:lnBlToTr w="12700" cmpd="sng">
+                      <a:noFill/>
+                      <a:prstDash val="solid"/>
+                    </a:lnBlToTr>
+                    <a:solidFill>
+                      <a:schemeClr val="bg2"/>
+                    </a:solidFill>
+                  </a:tcPr>
+                </a:tc>
+                <a:tc>
+                  <a:txBody>
+                    <a:bodyPr/>
+                    <a:lstStyle/>
+                    <a:p>
+                      <a:r>
+                        <a:rPr lang="zh-CN" altLang="en-US" sz="1400" dirty="0" smtClean="0"/>
+                        <a:t>最大槽位数</a:t>
+                      </a:r>
+                      <a:endParaRPr lang="zh-CN" altLang="en-US" sz="1400" dirty="0"/>
+                    </a:p>
+                  </a:txBody>
+                  <a:tcPr>
+                    <a:lnL w="12700" cap="flat" cmpd="sng" algn="ctr">
+                      <a:solidFill>
+                        <a:schemeClr val="tx1"/>
+                      </a:solidFill>
+                      <a:prstDash val="solid"/>
+                      <a:round/>
+                      <a:headEnd type="none" w="med" len="med"/>
+                      <a:tailEnd type="none" w="med" len="med"/>
+                    </a:lnL>
+                    <a:lnR w="12700" cap="flat" cmpd="sng" algn="ctr">
+                      <a:solidFill>
+                        <a:schemeClr val="tx1"/>
+                      </a:solidFill>
+                      <a:prstDash val="solid"/>
+                      <a:round/>
+                      <a:headEnd type="none" w="med" len="med"/>
+                      <a:tailEnd type="none" w="med" len="med"/>
+                    </a:lnR>
+                    <a:lnT w="12700" cap="flat" cmpd="sng" algn="ctr">
+                      <a:solidFill>
+                        <a:schemeClr val="tx1"/>
+                      </a:solidFill>
+                      <a:prstDash val="solid"/>
+                      <a:round/>
+                      <a:headEnd type="none" w="med" len="med"/>
+                      <a:tailEnd type="none" w="med" len="med"/>
+                    </a:lnT>
+                    <a:lnB w="12700" cap="flat" cmpd="sng" algn="ctr">
+                      <a:solidFill>
+                        <a:schemeClr val="tx1"/>
+                      </a:solidFill>
+                      <a:prstDash val="solid"/>
+                      <a:round/>
+                      <a:headEnd type="none" w="med" len="med"/>
+                      <a:tailEnd type="none" w="med" len="med"/>
+                    </a:lnB>
+                    <a:lnTlToBr w="12700" cmpd="sng">
+                      <a:noFill/>
+                      <a:prstDash val="solid"/>
+                    </a:lnTlToBr>
+                    <a:lnBlToTr w="12700" cmpd="sng">
+                      <a:noFill/>
+                      <a:prstDash val="solid"/>
+                    </a:lnBlToTr>
+                    <a:solidFill>
+                      <a:schemeClr val="bg2"/>
+                    </a:solidFill>
+                  </a:tcPr>
+                </a:tc>
+                <a:extLst>
+                  <a:ext uri="{0D108BD9-81ED-4DB2-BD59-A6C34878D82A}">
+                    <a16:rowId xmlns:a16="http://schemas.microsoft.com/office/drawing/2014/main" val="3396758703"/>
+                  </a:ext>
+                </a:extLst>
+              </a:tr>
+              <a:tr h="2540608">
+                <a:tc>
+                  <a:txBody>
+                    <a:bodyPr/>
+                    <a:lstStyle/>
+                    <a:p>
+                      <a:r>
+                        <a:rPr lang="en-US" altLang="zh-CN" sz="1400" dirty="0" smtClean="0"/>
+                        <a:t>Extent</a:t>
+                      </a:r>
+                      <a:r>
+                        <a:rPr lang="en-US" altLang="zh-CN" sz="1400" baseline="0" dirty="0" smtClean="0"/>
+                        <a:t> slots[N]</a:t>
+                      </a:r>
+                      <a:endParaRPr lang="zh-CN" altLang="en-US" sz="1400" dirty="0"/>
+                    </a:p>
+                  </a:txBody>
+                  <a:tcPr>
+                    <a:lnL w="12700" cap="flat" cmpd="sng" algn="ctr">
+                      <a:solidFill>
+                        <a:schemeClr val="tx1"/>
+                      </a:solidFill>
+                      <a:prstDash val="solid"/>
+                      <a:round/>
+                      <a:headEnd type="none" w="med" len="med"/>
+                      <a:tailEnd type="none" w="med" len="med"/>
+                    </a:lnL>
+                    <a:lnR w="12700" cap="flat" cmpd="sng" algn="ctr">
+                      <a:solidFill>
+                        <a:schemeClr val="tx1"/>
+                      </a:solidFill>
+                      <a:prstDash val="solid"/>
+                      <a:round/>
+                      <a:headEnd type="none" w="med" len="med"/>
+                      <a:tailEnd type="none" w="med" len="med"/>
+                    </a:lnR>
+                    <a:lnT w="12700" cap="flat" cmpd="sng" algn="ctr">
+                      <a:solidFill>
+                        <a:schemeClr val="tx1"/>
+                      </a:solidFill>
+                      <a:prstDash val="solid"/>
+                      <a:round/>
+                      <a:headEnd type="none" w="med" len="med"/>
+                      <a:tailEnd type="none" w="med" len="med"/>
+                    </a:lnT>
+                    <a:lnB w="12700" cap="flat" cmpd="sng" algn="ctr">
+                      <a:solidFill>
+                        <a:schemeClr val="tx1"/>
+                      </a:solidFill>
+                      <a:prstDash val="solid"/>
+                      <a:round/>
+                      <a:headEnd type="none" w="med" len="med"/>
+                      <a:tailEnd type="none" w="med" len="med"/>
+                    </a:lnB>
+                    <a:lnTlToBr w="12700" cmpd="sng">
+                      <a:noFill/>
+                      <a:prstDash val="solid"/>
+                    </a:lnTlToBr>
+                    <a:lnBlToTr w="12700" cmpd="sng">
+                      <a:noFill/>
+                      <a:prstDash val="solid"/>
+                    </a:lnBlToTr>
+                    <a:solidFill>
+                      <a:schemeClr val="bg2"/>
+                    </a:solidFill>
+                  </a:tcPr>
+                </a:tc>
+                <a:tc>
+                  <a:txBody>
+                    <a:bodyPr/>
+                    <a:lstStyle/>
+                    <a:p>
+                      <a:r>
+                        <a:rPr lang="en-US" altLang="zh-CN" sz="1400" dirty="0" smtClean="0"/>
+                        <a:t>BYTES</a:t>
+                      </a:r>
+                      <a:endParaRPr lang="zh-CN" altLang="en-US" sz="1400" dirty="0"/>
+                    </a:p>
+                  </a:txBody>
+                  <a:tcPr>
+                    <a:lnL w="12700" cap="flat" cmpd="sng" algn="ctr">
+                      <a:solidFill>
+                        <a:schemeClr val="tx1"/>
+                      </a:solidFill>
+                      <a:prstDash val="solid"/>
+                      <a:round/>
+                      <a:headEnd type="none" w="med" len="med"/>
+                      <a:tailEnd type="none" w="med" len="med"/>
+                    </a:lnL>
+                    <a:lnR w="12700" cap="flat" cmpd="sng" algn="ctr">
+                      <a:solidFill>
+                        <a:schemeClr val="tx1"/>
+                      </a:solidFill>
+                      <a:prstDash val="solid"/>
+                      <a:round/>
+                      <a:headEnd type="none" w="med" len="med"/>
+                      <a:tailEnd type="none" w="med" len="med"/>
+                    </a:lnR>
+                    <a:lnT w="12700" cap="flat" cmpd="sng" algn="ctr">
+                      <a:solidFill>
+                        <a:schemeClr val="tx1"/>
+                      </a:solidFill>
+                      <a:prstDash val="solid"/>
+                      <a:round/>
+                      <a:headEnd type="none" w="med" len="med"/>
+                      <a:tailEnd type="none" w="med" len="med"/>
+                    </a:lnT>
+                    <a:lnB w="12700" cap="flat" cmpd="sng" algn="ctr">
+                      <a:solidFill>
+                        <a:schemeClr val="tx1"/>
+                      </a:solidFill>
+                      <a:prstDash val="solid"/>
+                      <a:round/>
+                      <a:headEnd type="none" w="med" len="med"/>
+                      <a:tailEnd type="none" w="med" len="med"/>
+                    </a:lnB>
+                    <a:lnTlToBr w="12700" cmpd="sng">
+                      <a:noFill/>
+                      <a:prstDash val="solid"/>
+                    </a:lnTlToBr>
+                    <a:lnBlToTr w="12700" cmpd="sng">
+                      <a:noFill/>
+                      <a:prstDash val="solid"/>
+                    </a:lnBlToTr>
+                    <a:solidFill>
+                      <a:schemeClr val="bg2"/>
+                    </a:solidFill>
+                  </a:tcPr>
+                </a:tc>
+                <a:tc>
+                  <a:txBody>
+                    <a:bodyPr/>
+                    <a:lstStyle/>
+                    <a:p>
+                      <a:r>
+                        <a:rPr lang="en-US" altLang="zh-CN" sz="1400" dirty="0" smtClean="0"/>
+                        <a:t>4 * N</a:t>
+                      </a:r>
+                      <a:endParaRPr lang="zh-CN" altLang="en-US" sz="1400" dirty="0"/>
+                    </a:p>
+                  </a:txBody>
+                  <a:tcPr>
+                    <a:lnL w="12700" cap="flat" cmpd="sng" algn="ctr">
+                      <a:solidFill>
+                        <a:schemeClr val="tx1"/>
+                      </a:solidFill>
+                      <a:prstDash val="solid"/>
+                      <a:round/>
+                      <a:headEnd type="none" w="med" len="med"/>
+                      <a:tailEnd type="none" w="med" len="med"/>
+                    </a:lnL>
+                    <a:lnR w="12700" cap="flat" cmpd="sng" algn="ctr">
+                      <a:solidFill>
+                        <a:schemeClr val="tx1"/>
+                      </a:solidFill>
+                      <a:prstDash val="solid"/>
+                      <a:round/>
+                      <a:headEnd type="none" w="med" len="med"/>
+                      <a:tailEnd type="none" w="med" len="med"/>
+                    </a:lnR>
+                    <a:lnT w="12700" cap="flat" cmpd="sng" algn="ctr">
+                      <a:solidFill>
+                        <a:schemeClr val="tx1"/>
+                      </a:solidFill>
+                      <a:prstDash val="solid"/>
+                      <a:round/>
+                      <a:headEnd type="none" w="med" len="med"/>
+                      <a:tailEnd type="none" w="med" len="med"/>
+                    </a:lnT>
+                    <a:lnB w="12700" cap="flat" cmpd="sng" algn="ctr">
+                      <a:solidFill>
+                        <a:schemeClr val="tx1"/>
+                      </a:solidFill>
+                      <a:prstDash val="solid"/>
+                      <a:round/>
+                      <a:headEnd type="none" w="med" len="med"/>
+                      <a:tailEnd type="none" w="med" len="med"/>
+                    </a:lnB>
+                    <a:lnTlToBr w="12700" cmpd="sng">
+                      <a:noFill/>
+                      <a:prstDash val="solid"/>
+                    </a:lnTlToBr>
+                    <a:lnBlToTr w="12700" cmpd="sng">
+                      <a:noFill/>
+                      <a:prstDash val="solid"/>
+                    </a:lnBlToTr>
+                    <a:solidFill>
+                      <a:schemeClr val="bg2"/>
+                    </a:solidFill>
+                  </a:tcPr>
+                </a:tc>
+                <a:tc>
+                  <a:txBody>
+                    <a:bodyPr/>
+                    <a:lstStyle/>
+                    <a:p>
+                      <a:r>
+                        <a:rPr lang="en-US" altLang="zh-CN" sz="1400" dirty="0" smtClean="0"/>
                         <a:t>N = (64K(extent</a:t>
                       </a:r>
                       <a:r>
-                        <a:rPr lang="en-US" altLang="zh-CN" sz="1600" baseline="0" dirty="0" smtClean="0"/>
+                        <a:rPr lang="en-US" altLang="zh-CN" sz="1400" baseline="0" dirty="0" smtClean="0"/>
                         <a:t> length) – 24(</a:t>
                       </a:r>
                       <a:r>
-                        <a:rPr lang="en-US" altLang="zh-CN" sz="1600" baseline="0" dirty="0" err="1" smtClean="0"/>
-                        <a:t>header+idx+clid+recordLevel</a:t>
-                      </a:r>
-                      <a:r>
-                        <a:rPr lang="en-US" altLang="zh-CN" sz="1600" baseline="0" dirty="0" smtClean="0"/>
-                        <a:t>)) / 4(extent id length) - 1 = 16k – 6</a:t>
-                      </a:r>
-                      <a:r>
-                        <a:rPr lang="zh-CN" altLang="en-US" sz="1600" baseline="0" dirty="0" smtClean="0"/>
+                        <a:rPr lang="en-US" altLang="zh-CN" sz="1400" baseline="0" dirty="0" err="1" smtClean="0"/>
+                        <a:t>header+clid+Level</a:t>
+                      </a:r>
+                      <a:r>
+                        <a:rPr lang="en-US" altLang="zh-CN" sz="1400" baseline="0" dirty="0" smtClean="0"/>
+                        <a:t> + pad + slot size + slot </a:t>
+                      </a:r>
+                      <a:r>
+                        <a:rPr lang="en-US" altLang="zh-CN" sz="1400" baseline="0" dirty="0" err="1" smtClean="0"/>
+                        <a:t>num</a:t>
+                      </a:r>
+                      <a:r>
+                        <a:rPr lang="en-US" altLang="zh-CN" sz="1400" baseline="0" dirty="0" smtClean="0"/>
+                        <a:t>)) / 4(extent id length) - 1 = 16k – 6 - 1</a:t>
+                      </a:r>
+                      <a:r>
+                        <a:rPr lang="zh-CN" altLang="en-US" sz="1400" baseline="0" dirty="0" smtClean="0"/>
                         <a:t>。</a:t>
                       </a:r>
-                      <a:endParaRPr lang="en-US" altLang="zh-CN" sz="1600" baseline="0" dirty="0" smtClean="0"/>
-                    </a:p>
-                    <a:p>
-                      <a:endParaRPr lang="en-US" altLang="zh-CN" sz="1600" baseline="0" dirty="0" smtClean="0"/>
-                    </a:p>
-                    <a:p>
-                      <a:r>
-                        <a:rPr lang="zh-CN" altLang="en-US" sz="1600" baseline="0" dirty="0" smtClean="0"/>
-                        <a:t>当为</a:t>
-                      </a:r>
-                      <a:r>
-                        <a:rPr lang="en-US" altLang="zh-CN" sz="1600" baseline="0" dirty="0" smtClean="0"/>
-                        <a:t>relation extent leaf</a:t>
-                      </a:r>
-                      <a:r>
-                        <a:rPr lang="zh-CN" altLang="en-US" sz="1600" baseline="0" dirty="0" smtClean="0"/>
-                        <a:t>时，最后一个保存的是</a:t>
-                      </a:r>
-                      <a:r>
-                        <a:rPr lang="en-US" altLang="zh-CN" sz="1600" baseline="0" dirty="0" smtClean="0"/>
-                        <a:t>relation extent parent</a:t>
-                      </a:r>
-                      <a:r>
-                        <a:rPr lang="zh-CN" altLang="en-US" sz="1600" baseline="0" dirty="0" smtClean="0"/>
+                      <a:endParaRPr lang="en-US" altLang="zh-CN" sz="1400" baseline="0" dirty="0" smtClean="0"/>
+                    </a:p>
+                    <a:p>
+                      <a:endParaRPr lang="en-US" altLang="zh-CN" sz="1400" baseline="0" dirty="0" smtClean="0"/>
+                    </a:p>
+                    <a:p>
+                      <a:r>
+                        <a:rPr lang="en-US" altLang="zh-CN" sz="1400" baseline="0" dirty="0" smtClean="0"/>
+                        <a:t>Level0</a:t>
+                      </a:r>
+                      <a:r>
+                        <a:rPr lang="zh-CN" altLang="en-US" sz="1400" baseline="0" dirty="0" smtClean="0"/>
+                        <a:t>，记录</a:t>
+                      </a:r>
+                      <a:r>
+                        <a:rPr lang="en-US" altLang="zh-CN" sz="1400" baseline="0" dirty="0" smtClean="0"/>
+                        <a:t>data extent id</a:t>
+                      </a:r>
+                      <a:r>
+                        <a:rPr lang="zh-CN" altLang="en-US" sz="1400" baseline="0" dirty="0" smtClean="0"/>
+                        <a:t>，最后一个槽位记录上级</a:t>
+                      </a:r>
+                      <a:r>
+                        <a:rPr lang="en-US" altLang="zh-CN" sz="1400" baseline="0" dirty="0" smtClean="0"/>
+                        <a:t>level</a:t>
+                      </a:r>
+                      <a:r>
+                        <a:rPr lang="zh-CN" altLang="en-US" sz="1400" baseline="0" dirty="0" smtClean="0"/>
                         <a:t>的</a:t>
                       </a:r>
                       <a:r>
-                        <a:rPr lang="en-US" altLang="zh-CN" sz="1600" baseline="0" dirty="0" smtClean="0"/>
+                        <a:rPr lang="en-US" altLang="zh-CN" sz="1400" baseline="0" dirty="0" smtClean="0"/>
                         <a:t>extent id</a:t>
                       </a:r>
-                      <a:r>
-                        <a:rPr lang="zh-CN" altLang="en-US" sz="1600" baseline="0" dirty="0" smtClean="0"/>
-                        <a:t>；其他为</a:t>
-                      </a:r>
-                      <a:r>
-                        <a:rPr lang="en-US" altLang="zh-CN" sz="1600" baseline="0" dirty="0" smtClean="0"/>
-                        <a:t>data extent id</a:t>
-                      </a:r>
-                      <a:r>
-                        <a:rPr lang="zh-CN" altLang="en-US" sz="1600" baseline="0" dirty="0" smtClean="0"/>
-                        <a:t>。</a:t>
-                      </a:r>
-                      <a:endParaRPr lang="en-US" altLang="zh-CN" sz="1600" baseline="0" dirty="0" smtClean="0"/>
-                    </a:p>
-                    <a:p>
-                      <a:endParaRPr lang="en-US" altLang="zh-CN" sz="1600" baseline="0" dirty="0" smtClean="0"/>
-                    </a:p>
-                    <a:p>
-                      <a:r>
-                        <a:rPr lang="zh-CN" altLang="en-US" sz="1600" baseline="0" dirty="0" smtClean="0"/>
-                        <a:t>当为</a:t>
-                      </a:r>
-                      <a:r>
-                        <a:rPr lang="en-US" altLang="zh-CN" sz="1600" baseline="0" dirty="0" smtClean="0"/>
-                        <a:t>relation extent parent</a:t>
-                      </a:r>
-                      <a:r>
-                        <a:rPr lang="zh-CN" altLang="en-US" sz="1600" baseline="0" dirty="0" smtClean="0"/>
-                        <a:t>时，均表示</a:t>
-                      </a:r>
-                      <a:r>
-                        <a:rPr lang="en-US" altLang="zh-CN" sz="1600" baseline="0" dirty="0" smtClean="0"/>
-                        <a:t>relation extent leaf</a:t>
-                      </a:r>
-                      <a:r>
-                        <a:rPr lang="zh-CN" altLang="en-US" sz="1600" baseline="0" dirty="0" smtClean="0"/>
+                    </a:p>
+                    <a:p>
+                      <a:endParaRPr lang="en-US" altLang="zh-CN" sz="1400" baseline="0" dirty="0" smtClean="0"/>
+                    </a:p>
+                    <a:p>
+                      <a:pPr marL="0" marR="0" indent="0" algn="l" defTabSz="914400" rtl="0" eaLnBrk="1" fontAlgn="auto" latinLnBrk="0" hangingPunct="1">
+                        <a:lnSpc>
+                          <a:spcPct val="100000"/>
+                        </a:lnSpc>
+                        <a:spcBef>
+                          <a:spcPts val="0"/>
+                        </a:spcBef>
+                        <a:spcAft>
+                          <a:spcPts val="0"/>
+                        </a:spcAft>
+                        <a:buClrTx/>
+                        <a:buSzTx/>
+                        <a:buFontTx/>
+                        <a:buNone/>
+                        <a:tabLst/>
+                        <a:defRPr/>
+                      </a:pPr>
+                      <a:r>
+                        <a:rPr lang="en-US" altLang="zh-CN" sz="1400" baseline="0" dirty="0" smtClean="0"/>
+                        <a:t>Level1</a:t>
+                      </a:r>
+                      <a:r>
+                        <a:rPr lang="zh-CN" altLang="en-US" sz="1400" baseline="0" dirty="0" smtClean="0"/>
+                        <a:t>，记录</a:t>
+                      </a:r>
+                      <a:r>
+                        <a:rPr lang="en-US" altLang="zh-CN" sz="1400" baseline="0" dirty="0" smtClean="0"/>
+                        <a:t>level0</a:t>
+                      </a:r>
+                      <a:r>
+                        <a:rPr lang="zh-CN" altLang="en-US" sz="1400" baseline="0" dirty="0" smtClean="0"/>
                         <a:t>的</a:t>
                       </a:r>
                       <a:r>
-                        <a:rPr lang="en-US" altLang="zh-CN" sz="1600" baseline="0" dirty="0" smtClean="0"/>
+                        <a:rPr lang="en-US" altLang="zh-CN" sz="1400" baseline="0" dirty="0" smtClean="0"/>
+                        <a:t>relation extent id</a:t>
+                      </a:r>
+                      <a:r>
+                        <a:rPr lang="zh-CN" altLang="en-US" sz="1400" baseline="0" dirty="0" smtClean="0"/>
+                        <a:t>，最后一个槽位记录上级</a:t>
+                      </a:r>
+                      <a:r>
+                        <a:rPr lang="en-US" altLang="zh-CN" sz="1400" baseline="0" dirty="0" smtClean="0"/>
+                        <a:t>level</a:t>
+                      </a:r>
+                      <a:r>
+                        <a:rPr lang="zh-CN" altLang="en-US" sz="1400" baseline="0" dirty="0" smtClean="0"/>
+                        <a:t>的</a:t>
+                      </a:r>
+                      <a:r>
+                        <a:rPr lang="en-US" altLang="zh-CN" sz="1400" baseline="0" dirty="0" smtClean="0"/>
                         <a:t>extent id</a:t>
                       </a:r>
                       <a:r>
-                        <a:rPr lang="zh-CN" altLang="en-US" sz="1600" baseline="0" dirty="0" smtClean="0"/>
-                        <a:t>。</a:t>
-                      </a:r>
-                      <a:endParaRPr lang="en-US" altLang="zh-CN" sz="1600" baseline="0" dirty="0" smtClean="0"/>
+                        <a:rPr lang="zh-CN" altLang="en-US" sz="1400" baseline="0" dirty="0" smtClean="0"/>
+                        <a:t>（目前最多只有三层）</a:t>
+                      </a:r>
+                      <a:endParaRPr lang="en-US" altLang="zh-CN" sz="1400" baseline="0" dirty="0" smtClean="0"/>
                     </a:p>
                   </a:txBody>
                   <a:tcPr>
@@ -13772,8 +15215,8 @@
         </p:nvSpPr>
         <p:spPr>
           <a:xfrm>
-            <a:off x="8229600" y="2421227"/>
-            <a:ext cx="669701" cy="450761"/>
+            <a:off x="8188438" y="2538139"/>
+            <a:ext cx="746213" cy="333848"/>
           </a:xfrm>
           <a:prstGeom prst="rect">
             <a:avLst/>
@@ -13801,10 +15244,10 @@
           <a:p>
             <a:pPr algn="ctr"/>
             <a:r>
-              <a:rPr lang="en-US" altLang="zh-CN" dirty="0" smtClean="0"/>
-              <a:t>leaf</a:t>
+              <a:rPr lang="en-US" altLang="zh-CN" sz="1400" dirty="0" smtClean="0"/>
+              <a:t>level0</a:t>
             </a:r>
-            <a:endParaRPr lang="zh-CN" altLang="en-US" dirty="0"/>
+            <a:endParaRPr lang="zh-CN" altLang="en-US" sz="1400" dirty="0"/>
           </a:p>
         </p:txBody>
       </p:sp>
@@ -13865,9 +15308,9 @@
           <p:nvPr/>
         </p:nvCxnSpPr>
         <p:spPr>
-          <a:xfrm rot="16200000" flipH="1">
-            <a:off x="8402970" y="2259745"/>
-            <a:ext cx="320195" cy="2768"/>
+          <a:xfrm rot="5400000">
+            <a:off x="8381177" y="2281400"/>
+            <a:ext cx="437107" cy="76370"/>
           </a:xfrm>
           <a:prstGeom prst="curvedConnector3">
             <a:avLst>
@@ -13901,8 +15344,8 @@
         </p:nvSpPr>
         <p:spPr>
           <a:xfrm>
-            <a:off x="9463963" y="2421227"/>
-            <a:ext cx="822724" cy="450761"/>
+            <a:off x="9463963" y="2538138"/>
+            <a:ext cx="808193" cy="333849"/>
           </a:xfrm>
           <a:prstGeom prst="rect">
             <a:avLst/>
@@ -13930,142 +15373,10 @@
           <a:p>
             <a:pPr algn="ctr"/>
             <a:r>
-              <a:rPr lang="en-US" altLang="zh-CN" dirty="0" smtClean="0"/>
-              <a:t>parent</a:t>
+              <a:rPr lang="en-US" altLang="zh-CN" sz="1400" dirty="0" smtClean="0"/>
+              <a:t>level1</a:t>
             </a:r>
-            <a:endParaRPr lang="zh-CN" altLang="en-US" dirty="0"/>
-          </a:p>
-        </p:txBody>
-      </p:sp>
-      <p:sp>
-        <p:nvSpPr>
-          <p:cNvPr id="17" name="矩形 16"/>
-          <p:cNvSpPr/>
-          <p:nvPr/>
-        </p:nvSpPr>
-        <p:spPr>
-          <a:xfrm>
-            <a:off x="8229599" y="3467298"/>
-            <a:ext cx="669701" cy="450761"/>
-          </a:xfrm>
-          <a:prstGeom prst="rect">
-            <a:avLst/>
-          </a:prstGeom>
-        </p:spPr>
-        <p:style>
-          <a:lnRef idx="2">
-            <a:schemeClr val="accent1">
-              <a:shade val="50000"/>
-            </a:schemeClr>
-          </a:lnRef>
-          <a:fillRef idx="1">
-            <a:schemeClr val="accent1"/>
-          </a:fillRef>
-          <a:effectRef idx="0">
-            <a:schemeClr val="accent1"/>
-          </a:effectRef>
-          <a:fontRef idx="minor">
-            <a:schemeClr val="lt1"/>
-          </a:fontRef>
-        </p:style>
-        <p:txBody>
-          <a:bodyPr rtlCol="0" anchor="ctr"/>
-          <a:lstStyle/>
-          <a:p>
-            <a:pPr algn="ctr"/>
-            <a:r>
-              <a:rPr lang="en-US" altLang="zh-CN" dirty="0"/>
-              <a:t>leaf</a:t>
-            </a:r>
-            <a:endParaRPr lang="zh-CN" altLang="en-US" dirty="0"/>
-          </a:p>
-        </p:txBody>
-      </p:sp>
-      <p:sp>
-        <p:nvSpPr>
-          <p:cNvPr id="18" name="矩形 17"/>
-          <p:cNvSpPr/>
-          <p:nvPr/>
-        </p:nvSpPr>
-        <p:spPr>
-          <a:xfrm>
-            <a:off x="9540475" y="3467296"/>
-            <a:ext cx="669701" cy="450761"/>
-          </a:xfrm>
-          <a:prstGeom prst="rect">
-            <a:avLst/>
-          </a:prstGeom>
-        </p:spPr>
-        <p:style>
-          <a:lnRef idx="2">
-            <a:schemeClr val="accent1">
-              <a:shade val="50000"/>
-            </a:schemeClr>
-          </a:lnRef>
-          <a:fillRef idx="1">
-            <a:schemeClr val="accent1"/>
-          </a:fillRef>
-          <a:effectRef idx="0">
-            <a:schemeClr val="accent1"/>
-          </a:effectRef>
-          <a:fontRef idx="minor">
-            <a:schemeClr val="lt1"/>
-          </a:fontRef>
-        </p:style>
-        <p:txBody>
-          <a:bodyPr rtlCol="0" anchor="ctr"/>
-          <a:lstStyle/>
-          <a:p>
-            <a:pPr algn="ctr"/>
-            <a:r>
-              <a:rPr lang="en-US" altLang="zh-CN" dirty="0"/>
-              <a:t>leaf</a:t>
-            </a:r>
-            <a:endParaRPr lang="zh-CN" altLang="en-US" dirty="0"/>
-          </a:p>
-        </p:txBody>
-      </p:sp>
-      <p:sp>
-        <p:nvSpPr>
-          <p:cNvPr id="19" name="矩形 18"/>
-          <p:cNvSpPr/>
-          <p:nvPr/>
-        </p:nvSpPr>
-        <p:spPr>
-          <a:xfrm>
-            <a:off x="10851351" y="3467296"/>
-            <a:ext cx="669701" cy="450761"/>
-          </a:xfrm>
-          <a:prstGeom prst="rect">
-            <a:avLst/>
-          </a:prstGeom>
-        </p:spPr>
-        <p:style>
-          <a:lnRef idx="2">
-            <a:schemeClr val="accent1">
-              <a:shade val="50000"/>
-            </a:schemeClr>
-          </a:lnRef>
-          <a:fillRef idx="1">
-            <a:schemeClr val="accent1"/>
-          </a:fillRef>
-          <a:effectRef idx="0">
-            <a:schemeClr val="accent1"/>
-          </a:effectRef>
-          <a:fontRef idx="minor">
-            <a:schemeClr val="lt1"/>
-          </a:fontRef>
-        </p:style>
-        <p:txBody>
-          <a:bodyPr rtlCol="0" anchor="ctr"/>
-          <a:lstStyle/>
-          <a:p>
-            <a:pPr algn="ctr"/>
-            <a:r>
-              <a:rPr lang="en-US" altLang="zh-CN" dirty="0"/>
-              <a:t>leaf</a:t>
-            </a:r>
-            <a:endParaRPr lang="zh-CN" altLang="en-US" dirty="0"/>
+            <a:endParaRPr lang="zh-CN" altLang="en-US" sz="1400" dirty="0"/>
           </a:p>
         </p:txBody>
       </p:sp>
@@ -14074,17 +15385,19 @@
           <p:cNvPr id="21" name="曲线连接符 20"/>
           <p:cNvCxnSpPr>
             <a:stCxn id="13" idx="2"/>
-            <a:endCxn id="17" idx="0"/>
+            <a:endCxn id="54" idx="0"/>
           </p:cNvCxnSpPr>
           <p:nvPr/>
         </p:nvCxnSpPr>
         <p:spPr>
           <a:xfrm rot="5400000">
-            <a:off x="8922233" y="2514206"/>
-            <a:ext cx="595310" cy="1310875"/>
+            <a:off x="8902091" y="2507676"/>
+            <a:ext cx="601658" cy="1330281"/>
           </a:xfrm>
           <a:prstGeom prst="curvedConnector3">
-            <a:avLst/>
+            <a:avLst>
+              <a:gd name="adj1" fmla="val 50000"/>
+            </a:avLst>
           </a:prstGeom>
           <a:ln>
             <a:headEnd type="triangle"/>
@@ -14111,14 +15424,14 @@
           <p:cNvPr id="23" name="曲线连接符 22"/>
           <p:cNvCxnSpPr>
             <a:stCxn id="13" idx="2"/>
-            <a:endCxn id="18" idx="0"/>
+            <a:endCxn id="55" idx="0"/>
           </p:cNvCxnSpPr>
           <p:nvPr/>
         </p:nvCxnSpPr>
         <p:spPr>
           <a:xfrm rot="16200000" flipH="1">
-            <a:off x="9577671" y="3169641"/>
-            <a:ext cx="595308" cy="1"/>
+            <a:off x="9570557" y="3169490"/>
+            <a:ext cx="595008" cy="2"/>
           </a:xfrm>
           <a:prstGeom prst="curvedConnector3">
             <a:avLst/>
@@ -14148,17 +15461,19 @@
           <p:cNvPr id="25" name="曲线连接符 24"/>
           <p:cNvCxnSpPr>
             <a:stCxn id="13" idx="2"/>
-            <a:endCxn id="19" idx="0"/>
+            <a:endCxn id="56" idx="0"/>
           </p:cNvCxnSpPr>
           <p:nvPr/>
         </p:nvCxnSpPr>
         <p:spPr>
           <a:xfrm rot="16200000" flipH="1">
-            <a:off x="10233109" y="2514203"/>
-            <a:ext cx="595308" cy="1310877"/>
+            <a:off x="10166825" y="2573222"/>
+            <a:ext cx="595308" cy="1192838"/>
           </a:xfrm>
           <a:prstGeom prst="curvedConnector3">
-            <a:avLst/>
+            <a:avLst>
+              <a:gd name="adj1" fmla="val 50000"/>
+            </a:avLst>
           </a:prstGeom>
           <a:ln>
             <a:headEnd type="triangle"/>
@@ -14191,14 +15506,14 @@
         </p:nvCxnSpPr>
         <p:spPr>
           <a:xfrm rot="5400000" flipH="1">
-            <a:off x="8994507" y="1991171"/>
-            <a:ext cx="450761" cy="1310874"/>
+            <a:off x="9047879" y="2051806"/>
+            <a:ext cx="333848" cy="1306515"/>
           </a:xfrm>
           <a:prstGeom prst="curvedConnector5">
             <a:avLst>
-              <a:gd name="adj1" fmla="val -50714"/>
-              <a:gd name="adj2" fmla="val 52918"/>
-              <a:gd name="adj3" fmla="val 150714"/>
+              <a:gd name="adj1" fmla="val -68474"/>
+              <a:gd name="adj2" fmla="val 51186"/>
+              <a:gd name="adj3" fmla="val 168474"/>
             </a:avLst>
           </a:prstGeom>
           <a:ln>
@@ -14230,7 +15545,7 @@
         <p:spPr>
           <a:xfrm>
             <a:off x="8226832" y="1756568"/>
-            <a:ext cx="669701" cy="344464"/>
+            <a:ext cx="822165" cy="344464"/>
           </a:xfrm>
           <a:prstGeom prst="rect">
             <a:avLst/>
@@ -14238,6 +15553,191 @@
           <a:solidFill>
             <a:schemeClr val="accent2"/>
           </a:solidFill>
+        </p:spPr>
+        <p:style>
+          <a:lnRef idx="2">
+            <a:schemeClr val="accent1">
+              <a:shade val="50000"/>
+            </a:schemeClr>
+          </a:lnRef>
+          <a:fillRef idx="1">
+            <a:schemeClr val="accent1"/>
+          </a:fillRef>
+          <a:effectRef idx="0">
+            <a:schemeClr val="accent1"/>
+          </a:effectRef>
+          <a:fontRef idx="minor">
+            <a:schemeClr val="lt1"/>
+          </a:fontRef>
+        </p:style>
+        <p:txBody>
+          <a:bodyPr rtlCol="0" anchor="ctr"/>
+          <a:lstStyle/>
+          <a:p>
+            <a:pPr algn="ctr"/>
+            <a:r>
+              <a:rPr lang="en-US" altLang="zh-CN" sz="1400" dirty="0" smtClean="0"/>
+              <a:t>group1</a:t>
+            </a:r>
+            <a:endParaRPr lang="zh-CN" altLang="en-US" sz="1400" dirty="0"/>
+          </a:p>
+        </p:txBody>
+      </p:sp>
+      <p:sp>
+        <p:nvSpPr>
+          <p:cNvPr id="22" name="矩形 21"/>
+          <p:cNvSpPr/>
+          <p:nvPr/>
+        </p:nvSpPr>
+        <p:spPr>
+          <a:xfrm>
+            <a:off x="9048997" y="1752766"/>
+            <a:ext cx="822165" cy="344464"/>
+          </a:xfrm>
+          <a:prstGeom prst="rect">
+            <a:avLst/>
+          </a:prstGeom>
+          <a:solidFill>
+            <a:schemeClr val="accent2"/>
+          </a:solidFill>
+        </p:spPr>
+        <p:style>
+          <a:lnRef idx="2">
+            <a:schemeClr val="accent1">
+              <a:shade val="50000"/>
+            </a:schemeClr>
+          </a:lnRef>
+          <a:fillRef idx="1">
+            <a:schemeClr val="accent1"/>
+          </a:fillRef>
+          <a:effectRef idx="0">
+            <a:schemeClr val="accent1"/>
+          </a:effectRef>
+          <a:fontRef idx="minor">
+            <a:schemeClr val="lt1"/>
+          </a:fontRef>
+        </p:style>
+        <p:txBody>
+          <a:bodyPr rtlCol="0" anchor="ctr"/>
+          <a:lstStyle/>
+          <a:p>
+            <a:pPr algn="ctr"/>
+            <a:r>
+              <a:rPr lang="en-US" altLang="zh-CN" sz="1400" dirty="0" smtClean="0"/>
+              <a:t>group2</a:t>
+            </a:r>
+            <a:endParaRPr lang="zh-CN" altLang="en-US" sz="1400" dirty="0"/>
+          </a:p>
+        </p:txBody>
+      </p:sp>
+      <p:sp>
+        <p:nvSpPr>
+          <p:cNvPr id="24" name="矩形 23"/>
+          <p:cNvSpPr/>
+          <p:nvPr/>
+        </p:nvSpPr>
+        <p:spPr>
+          <a:xfrm>
+            <a:off x="9868394" y="1752766"/>
+            <a:ext cx="822165" cy="344464"/>
+          </a:xfrm>
+          <a:prstGeom prst="rect">
+            <a:avLst/>
+          </a:prstGeom>
+          <a:solidFill>
+            <a:schemeClr val="accent2"/>
+          </a:solidFill>
+        </p:spPr>
+        <p:style>
+          <a:lnRef idx="2">
+            <a:schemeClr val="accent1">
+              <a:shade val="50000"/>
+            </a:schemeClr>
+          </a:lnRef>
+          <a:fillRef idx="1">
+            <a:schemeClr val="accent1"/>
+          </a:fillRef>
+          <a:effectRef idx="0">
+            <a:schemeClr val="accent1"/>
+          </a:effectRef>
+          <a:fontRef idx="minor">
+            <a:schemeClr val="lt1"/>
+          </a:fontRef>
+        </p:style>
+        <p:txBody>
+          <a:bodyPr rtlCol="0" anchor="ctr"/>
+          <a:lstStyle/>
+          <a:p>
+            <a:pPr algn="ctr"/>
+            <a:r>
+              <a:rPr lang="en-US" altLang="zh-CN" sz="1400" dirty="0" smtClean="0"/>
+              <a:t>group3</a:t>
+            </a:r>
+            <a:endParaRPr lang="zh-CN" altLang="en-US" sz="1400" dirty="0"/>
+          </a:p>
+        </p:txBody>
+      </p:sp>
+      <p:sp>
+        <p:nvSpPr>
+          <p:cNvPr id="26" name="矩形 25"/>
+          <p:cNvSpPr/>
+          <p:nvPr/>
+        </p:nvSpPr>
+        <p:spPr>
+          <a:xfrm>
+            <a:off x="10687791" y="1752766"/>
+            <a:ext cx="822165" cy="344464"/>
+          </a:xfrm>
+          <a:prstGeom prst="rect">
+            <a:avLst/>
+          </a:prstGeom>
+          <a:solidFill>
+            <a:schemeClr val="accent2"/>
+          </a:solidFill>
+        </p:spPr>
+        <p:style>
+          <a:lnRef idx="2">
+            <a:schemeClr val="accent1">
+              <a:shade val="50000"/>
+            </a:schemeClr>
+          </a:lnRef>
+          <a:fillRef idx="1">
+            <a:schemeClr val="accent1"/>
+          </a:fillRef>
+          <a:effectRef idx="0">
+            <a:schemeClr val="accent1"/>
+          </a:effectRef>
+          <a:fontRef idx="minor">
+            <a:schemeClr val="lt1"/>
+          </a:fontRef>
+        </p:style>
+        <p:txBody>
+          <a:bodyPr rtlCol="0" anchor="ctr"/>
+          <a:lstStyle/>
+          <a:p>
+            <a:pPr algn="ctr"/>
+            <a:r>
+              <a:rPr lang="en-US" altLang="zh-CN" sz="1400" dirty="0" smtClean="0"/>
+              <a:t>group4</a:t>
+            </a:r>
+            <a:endParaRPr lang="zh-CN" altLang="en-US" sz="1400" dirty="0"/>
+          </a:p>
+        </p:txBody>
+      </p:sp>
+      <p:sp>
+        <p:nvSpPr>
+          <p:cNvPr id="54" name="矩形 53"/>
+          <p:cNvSpPr/>
+          <p:nvPr/>
+        </p:nvSpPr>
+        <p:spPr>
+          <a:xfrm>
+            <a:off x="8164672" y="3473645"/>
+            <a:ext cx="746213" cy="333848"/>
+          </a:xfrm>
+          <a:prstGeom prst="rect">
+            <a:avLst/>
+          </a:prstGeom>
         </p:spPr>
         <p:style>
           <a:lnRef idx="2">
@@ -14270,21 +15770,18 @@
       </p:sp>
       <p:sp>
         <p:nvSpPr>
-          <p:cNvPr id="32" name="矩形 31"/>
+          <p:cNvPr id="55" name="矩形 54"/>
           <p:cNvSpPr/>
           <p:nvPr/>
         </p:nvSpPr>
         <p:spPr>
           <a:xfrm>
-            <a:off x="8896533" y="1756568"/>
-            <a:ext cx="669701" cy="344464"/>
+            <a:off x="9494955" y="3466995"/>
+            <a:ext cx="746213" cy="333848"/>
           </a:xfrm>
           <a:prstGeom prst="rect">
             <a:avLst/>
           </a:prstGeom>
-          <a:solidFill>
-            <a:schemeClr val="accent2"/>
-          </a:solidFill>
         </p:spPr>
         <p:style>
           <a:lnRef idx="2">
@@ -14309,7 +15806,7 @@
             <a:pPr algn="ctr"/>
             <a:r>
               <a:rPr lang="en-US" altLang="zh-CN" sz="1400" dirty="0" smtClean="0"/>
-              <a:t>level1</a:t>
+              <a:t>level0</a:t>
             </a:r>
             <a:endParaRPr lang="zh-CN" altLang="en-US" sz="1400" dirty="0"/>
           </a:p>
@@ -14317,21 +15814,18 @@
       </p:sp>
       <p:sp>
         <p:nvSpPr>
-          <p:cNvPr id="33" name="矩形 32"/>
+          <p:cNvPr id="56" name="矩形 55"/>
           <p:cNvSpPr/>
           <p:nvPr/>
         </p:nvSpPr>
         <p:spPr>
           <a:xfrm>
-            <a:off x="9563466" y="1756568"/>
-            <a:ext cx="669701" cy="344464"/>
+            <a:off x="10687791" y="3467295"/>
+            <a:ext cx="746213" cy="333848"/>
           </a:xfrm>
           <a:prstGeom prst="rect">
             <a:avLst/>
           </a:prstGeom>
-          <a:solidFill>
-            <a:schemeClr val="accent2"/>
-          </a:solidFill>
         </p:spPr>
         <p:style>
           <a:lnRef idx="2">
@@ -14356,54 +15850,7 @@
             <a:pPr algn="ctr"/>
             <a:r>
               <a:rPr lang="en-US" altLang="zh-CN" sz="1400" dirty="0" smtClean="0"/>
-              <a:t>level2</a:t>
-            </a:r>
-            <a:endParaRPr lang="zh-CN" altLang="en-US" sz="1400" dirty="0"/>
-          </a:p>
-        </p:txBody>
-      </p:sp>
-      <p:sp>
-        <p:nvSpPr>
-          <p:cNvPr id="34" name="矩形 33"/>
-          <p:cNvSpPr/>
-          <p:nvPr/>
-        </p:nvSpPr>
-        <p:spPr>
-          <a:xfrm>
-            <a:off x="10230399" y="1756568"/>
-            <a:ext cx="669701" cy="344464"/>
-          </a:xfrm>
-          <a:prstGeom prst="rect">
-            <a:avLst/>
-          </a:prstGeom>
-          <a:solidFill>
-            <a:schemeClr val="accent2"/>
-          </a:solidFill>
-        </p:spPr>
-        <p:style>
-          <a:lnRef idx="2">
-            <a:schemeClr val="accent1">
-              <a:shade val="50000"/>
-            </a:schemeClr>
-          </a:lnRef>
-          <a:fillRef idx="1">
-            <a:schemeClr val="accent1"/>
-          </a:fillRef>
-          <a:effectRef idx="0">
-            <a:schemeClr val="accent1"/>
-          </a:effectRef>
-          <a:fontRef idx="minor">
-            <a:schemeClr val="lt1"/>
-          </a:fontRef>
-        </p:style>
-        <p:txBody>
-          <a:bodyPr rtlCol="0" anchor="ctr"/>
-          <a:lstStyle/>
-          <a:p>
-            <a:pPr algn="ctr"/>
-            <a:r>
-              <a:rPr lang="en-US" altLang="zh-CN" sz="1400" dirty="0" smtClean="0"/>
-              <a:t>level3</a:t>
+              <a:t>level0</a:t>
             </a:r>
             <a:endParaRPr lang="zh-CN" altLang="en-US" sz="1400" dirty="0"/>
           </a:p>
@@ -14429,7 +15876,7 @@
 </p:sld>
 </file>
 
-<file path=ppt/slides/slide13.xml><?xml version="1.0" encoding="utf-8"?>
+<file path=ppt/slides/slide14.xml><?xml version="1.0" encoding="utf-8"?>
 <p:sld xmlns:a="http://schemas.openxmlformats.org/drawingml/2006/main" xmlns:r="http://schemas.openxmlformats.org/officeDocument/2006/relationships" xmlns:p="http://schemas.openxmlformats.org/presentationml/2006/main">
   <p:cSld>
     <p:spTree>
@@ -14474,14 +15921,14 @@
           <p:nvPr>
             <p:extLst>
               <p:ext uri="{D42A27DB-BD31-4B8C-83A1-F6EECF244321}">
-                <p14:modId xmlns:p14="http://schemas.microsoft.com/office/powerpoint/2010/main" val="2901408308"/>
+                <p14:modId xmlns:p14="http://schemas.microsoft.com/office/powerpoint/2010/main" val="1123242766"/>
               </p:ext>
             </p:extLst>
           </p:nvPr>
         </p:nvGraphicFramePr>
         <p:xfrm>
-          <a:off x="142741" y="2597979"/>
-          <a:ext cx="6596999" cy="2956560"/>
+          <a:off x="276073" y="2657355"/>
+          <a:ext cx="4274713" cy="2225040"/>
         </p:xfrm>
         <a:graphic>
           <a:graphicData uri="http://schemas.openxmlformats.org/drawingml/2006/table">
@@ -14511,20 +15958,6 @@
                     </a:ext>
                   </a:extLst>
                 </a:gridCol>
-                <a:gridCol w="1674253">
-                  <a:extLst>
-                    <a:ext uri="{9D8B030D-6E8A-4147-A177-3AD203B41FA5}">
-                      <a16:colId xmlns:a16="http://schemas.microsoft.com/office/drawing/2014/main" val="101577088"/>
-                    </a:ext>
-                  </a:extLst>
-                </a:gridCol>
-                <a:gridCol w="648033">
-                  <a:extLst>
-                    <a:ext uri="{9D8B030D-6E8A-4147-A177-3AD203B41FA5}">
-                      <a16:colId xmlns:a16="http://schemas.microsoft.com/office/drawing/2014/main" val="4130007125"/>
-                    </a:ext>
-                  </a:extLst>
-                </a:gridCol>
               </a:tblGrid>
               <a:tr h="370840">
                 <a:tc>
@@ -14624,26 +16057,6 @@
                   </a:txBody>
                   <a:tcPr/>
                 </a:tc>
-                <a:tc>
-                  <a:txBody>
-                    <a:bodyPr/>
-                    <a:lstStyle/>
-                    <a:p>
-                      <a:endParaRPr lang="zh-CN" altLang="en-US" sz="1600" dirty="0"/>
-                    </a:p>
-                  </a:txBody>
-                  <a:tcPr/>
-                </a:tc>
-                <a:tc>
-                  <a:txBody>
-                    <a:bodyPr/>
-                    <a:lstStyle/>
-                    <a:p>
-                      <a:endParaRPr lang="zh-CN" altLang="en-US" sz="1600" dirty="0"/>
-                    </a:p>
-                  </a:txBody>
-                  <a:tcPr/>
-                </a:tc>
                 <a:extLst>
                   <a:ext uri="{0D108BD9-81ED-4DB2-BD59-A6C34878D82A}">
                     <a16:rowId xmlns:a16="http://schemas.microsoft.com/office/drawing/2014/main" val="2801473138"/>
@@ -14693,26 +16106,6 @@
                   </a:txBody>
                   <a:tcPr/>
                 </a:tc>
-                <a:tc>
-                  <a:txBody>
-                    <a:bodyPr/>
-                    <a:lstStyle/>
-                    <a:p>
-                      <a:endParaRPr lang="zh-CN" altLang="en-US" dirty="0"/>
-                    </a:p>
-                  </a:txBody>
-                  <a:tcPr/>
-                </a:tc>
-                <a:tc>
-                  <a:txBody>
-                    <a:bodyPr/>
-                    <a:lstStyle/>
-                    <a:p>
-                      <a:endParaRPr lang="zh-CN" altLang="en-US"/>
-                    </a:p>
-                  </a:txBody>
-                  <a:tcPr/>
-                </a:tc>
                 <a:extLst>
                   <a:ext uri="{0D108BD9-81ED-4DB2-BD59-A6C34878D82A}">
                     <a16:rowId xmlns:a16="http://schemas.microsoft.com/office/drawing/2014/main" val="255507549"/>
@@ -14762,26 +16155,6 @@
                   </a:txBody>
                   <a:tcPr/>
                 </a:tc>
-                <a:tc>
-                  <a:txBody>
-                    <a:bodyPr/>
-                    <a:lstStyle/>
-                    <a:p>
-                      <a:endParaRPr lang="zh-CN" altLang="en-US" dirty="0"/>
-                    </a:p>
-                  </a:txBody>
-                  <a:tcPr/>
-                </a:tc>
-                <a:tc>
-                  <a:txBody>
-                    <a:bodyPr/>
-                    <a:lstStyle/>
-                    <a:p>
-                      <a:endParaRPr lang="zh-CN" altLang="en-US"/>
-                    </a:p>
-                  </a:txBody>
-                  <a:tcPr/>
-                </a:tc>
                 <a:extLst>
                   <a:ext uri="{0D108BD9-81ED-4DB2-BD59-A6C34878D82A}">
                     <a16:rowId xmlns:a16="http://schemas.microsoft.com/office/drawing/2014/main" val="1922704453"/>
@@ -14831,26 +16204,6 @@
                   </a:txBody>
                   <a:tcPr/>
                 </a:tc>
-                <a:tc>
-                  <a:txBody>
-                    <a:bodyPr/>
-                    <a:lstStyle/>
-                    <a:p>
-                      <a:endParaRPr lang="zh-CN" altLang="en-US"/>
-                    </a:p>
-                  </a:txBody>
-                  <a:tcPr/>
-                </a:tc>
-                <a:tc>
-                  <a:txBody>
-                    <a:bodyPr/>
-                    <a:lstStyle/>
-                    <a:p>
-                      <a:endParaRPr lang="zh-CN" altLang="en-US"/>
-                    </a:p>
-                  </a:txBody>
-                  <a:tcPr/>
-                </a:tc>
                 <a:extLst>
                   <a:ext uri="{0D108BD9-81ED-4DB2-BD59-A6C34878D82A}">
                     <a16:rowId xmlns:a16="http://schemas.microsoft.com/office/drawing/2014/main" val="1774084974"/>
@@ -14900,26 +16253,6 @@
                   </a:txBody>
                   <a:tcPr/>
                 </a:tc>
-                <a:tc>
-                  <a:txBody>
-                    <a:bodyPr/>
-                    <a:lstStyle/>
-                    <a:p>
-                      <a:endParaRPr lang="zh-CN" altLang="en-US"/>
-                    </a:p>
-                  </a:txBody>
-                  <a:tcPr/>
-                </a:tc>
-                <a:tc>
-                  <a:txBody>
-                    <a:bodyPr/>
-                    <a:lstStyle/>
-                    <a:p>
-                      <a:endParaRPr lang="zh-CN" altLang="en-US"/>
-                    </a:p>
-                  </a:txBody>
-                  <a:tcPr/>
-                </a:tc>
                 <a:extLst>
                   <a:ext uri="{0D108BD9-81ED-4DB2-BD59-A6C34878D82A}">
                     <a16:rowId xmlns:a16="http://schemas.microsoft.com/office/drawing/2014/main" val="3244082800"/>
@@ -14969,167 +16302,9 @@
                   </a:txBody>
                   <a:tcPr/>
                 </a:tc>
-                <a:tc>
-                  <a:txBody>
-                    <a:bodyPr/>
-                    <a:lstStyle/>
-                    <a:p>
-                      <a:endParaRPr lang="zh-CN" altLang="en-US"/>
-                    </a:p>
-                  </a:txBody>
-                  <a:tcPr/>
-                </a:tc>
-                <a:tc>
-                  <a:txBody>
-                    <a:bodyPr/>
-                    <a:lstStyle/>
-                    <a:p>
-                      <a:endParaRPr lang="zh-CN" altLang="en-US"/>
-                    </a:p>
-                  </a:txBody>
-                  <a:tcPr/>
-                </a:tc>
                 <a:extLst>
                   <a:ext uri="{0D108BD9-81ED-4DB2-BD59-A6C34878D82A}">
                     <a16:rowId xmlns:a16="http://schemas.microsoft.com/office/drawing/2014/main" val="1391253023"/>
-                  </a:ext>
-                </a:extLst>
-              </a:tr>
-              <a:tr h="185420">
-                <a:tc>
-                  <a:txBody>
-                    <a:bodyPr/>
-                    <a:lstStyle/>
-                    <a:p>
-                      <a:r>
-                        <a:rPr lang="en-US" altLang="zh-CN" dirty="0" smtClean="0"/>
-                        <a:t>128k</a:t>
-                      </a:r>
-                      <a:endParaRPr lang="zh-CN" altLang="en-US" dirty="0"/>
-                    </a:p>
-                  </a:txBody>
-                  <a:tcPr/>
-                </a:tc>
-                <a:tc>
-                  <a:txBody>
-                    <a:bodyPr/>
-                    <a:lstStyle/>
-                    <a:p>
-                      <a:r>
-                        <a:rPr lang="en-US" altLang="zh-CN" dirty="0" smtClean="0"/>
-                        <a:t>16T</a:t>
-                      </a:r>
-                      <a:endParaRPr lang="zh-CN" altLang="en-US" dirty="0"/>
-                    </a:p>
-                  </a:txBody>
-                  <a:tcPr/>
-                </a:tc>
-                <a:tc>
-                  <a:txBody>
-                    <a:bodyPr/>
-                    <a:lstStyle/>
-                    <a:p>
-                      <a:r>
-                        <a:rPr lang="en-US" altLang="zh-CN" dirty="0" smtClean="0"/>
-                        <a:t>128k</a:t>
-                      </a:r>
-                      <a:endParaRPr lang="zh-CN" altLang="en-US" dirty="0"/>
-                    </a:p>
-                  </a:txBody>
-                  <a:tcPr/>
-                </a:tc>
-                <a:tc>
-                  <a:txBody>
-                    <a:bodyPr/>
-                    <a:lstStyle/>
-                    <a:p>
-                      <a:endParaRPr lang="zh-CN" altLang="en-US"/>
-                    </a:p>
-                  </a:txBody>
-                  <a:tcPr/>
-                </a:tc>
-                <a:tc>
-                  <a:txBody>
-                    <a:bodyPr/>
-                    <a:lstStyle/>
-                    <a:p>
-                      <a:endParaRPr lang="zh-CN" altLang="en-US" dirty="0"/>
-                    </a:p>
-                  </a:txBody>
-                  <a:tcPr/>
-                </a:tc>
-                <a:extLst>
-                  <a:ext uri="{0D108BD9-81ED-4DB2-BD59-A6C34878D82A}">
-                    <a16:rowId xmlns:a16="http://schemas.microsoft.com/office/drawing/2014/main" val="3994644814"/>
-                  </a:ext>
-                </a:extLst>
-              </a:tr>
-              <a:tr h="185420">
-                <a:tc>
-                  <a:txBody>
-                    <a:bodyPr/>
-                    <a:lstStyle/>
-                    <a:p>
-                      <a:r>
-                        <a:rPr lang="en-US" altLang="zh-CN" dirty="0" smtClean="0"/>
-                        <a:t>256k</a:t>
-                      </a:r>
-                      <a:endParaRPr lang="zh-CN" altLang="en-US" dirty="0"/>
-                    </a:p>
-                  </a:txBody>
-                  <a:tcPr/>
-                </a:tc>
-                <a:tc>
-                  <a:txBody>
-                    <a:bodyPr/>
-                    <a:lstStyle/>
-                    <a:p>
-                      <a:r>
-                        <a:rPr lang="en-US" altLang="zh-CN" dirty="0" smtClean="0"/>
-                        <a:t>32T</a:t>
-                      </a:r>
-                      <a:endParaRPr lang="zh-CN" altLang="en-US" dirty="0"/>
-                    </a:p>
-                  </a:txBody>
-                  <a:tcPr/>
-                </a:tc>
-                <a:tc>
-                  <a:txBody>
-                    <a:bodyPr/>
-                    <a:lstStyle/>
-                    <a:p>
-                      <a:r>
-                        <a:rPr lang="en-US" altLang="zh-CN" dirty="0" smtClean="0"/>
-                        <a:t>256k</a:t>
-                      </a:r>
-                      <a:endParaRPr lang="zh-CN" altLang="en-US" dirty="0"/>
-                    </a:p>
-                  </a:txBody>
-                  <a:tcPr/>
-                </a:tc>
-                <a:tc>
-                  <a:txBody>
-                    <a:bodyPr/>
-                    <a:lstStyle/>
-                    <a:p>
-                      <a:endParaRPr lang="zh-CN" altLang="en-US"/>
-                    </a:p>
-                  </a:txBody>
-                  <a:tcPr/>
-                </a:tc>
-                <a:tc>
-                  <a:txBody>
-                    <a:bodyPr/>
-                    <a:lstStyle/>
-                    <a:p>
-                      <a:endParaRPr lang="zh-CN" altLang="en-US" dirty="0"/>
-                    </a:p>
-                  </a:txBody>
-                  <a:tcPr/>
-                </a:tc>
-                <a:extLst>
-                  <a:ext uri="{0D108BD9-81ED-4DB2-BD59-A6C34878D82A}">
-                    <a16:rowId xmlns:a16="http://schemas.microsoft.com/office/drawing/2014/main" val="609043090"/>
                   </a:ext>
                 </a:extLst>
               </a:tr>
@@ -15145,7 +16320,7 @@
         </p:nvSpPr>
         <p:spPr>
           <a:xfrm>
-            <a:off x="1094704" y="2150772"/>
+            <a:off x="310932" y="2147367"/>
             <a:ext cx="4204997" cy="369332"/>
           </a:xfrm>
           <a:prstGeom prst="rect">
@@ -15208,14 +16383,14 @@
           <p:nvPr>
             <p:extLst>
               <p:ext uri="{D42A27DB-BD31-4B8C-83A1-F6EECF244321}">
-                <p14:modId xmlns:p14="http://schemas.microsoft.com/office/powerpoint/2010/main" val="3431509671"/>
+                <p14:modId xmlns:p14="http://schemas.microsoft.com/office/powerpoint/2010/main" val="1334490005"/>
               </p:ext>
             </p:extLst>
           </p:nvPr>
         </p:nvGraphicFramePr>
         <p:xfrm>
-          <a:off x="7057621" y="2516699"/>
-          <a:ext cx="4881094" cy="3037840"/>
+          <a:off x="6012593" y="2662435"/>
+          <a:ext cx="4592072" cy="2585720"/>
         </p:xfrm>
         <a:graphic>
           <a:graphicData uri="http://schemas.openxmlformats.org/drawingml/2006/table">
@@ -15224,35 +16399,35 @@
                 <a:tableStyleId>{5C22544A-7EE6-4342-B048-85BDC9FD1C3A}</a:tableStyleId>
               </a:tblPr>
               <a:tblGrid>
-                <a:gridCol w="1068948">
+                <a:gridCol w="981974">
                   <a:extLst>
                     <a:ext uri="{9D8B030D-6E8A-4147-A177-3AD203B41FA5}">
                       <a16:colId xmlns:a16="http://schemas.microsoft.com/office/drawing/2014/main" val="2848572070"/>
                     </a:ext>
                   </a:extLst>
                 </a:gridCol>
-                <a:gridCol w="721217">
+                <a:gridCol w="807522">
                   <a:extLst>
                     <a:ext uri="{9D8B030D-6E8A-4147-A177-3AD203B41FA5}">
                       <a16:colId xmlns:a16="http://schemas.microsoft.com/office/drawing/2014/main" val="2018968454"/>
                     </a:ext>
                   </a:extLst>
                 </a:gridCol>
-                <a:gridCol w="953037">
+                <a:gridCol w="953706">
                   <a:extLst>
                     <a:ext uri="{9D8B030D-6E8A-4147-A177-3AD203B41FA5}">
                       <a16:colId xmlns:a16="http://schemas.microsoft.com/office/drawing/2014/main" val="2117237622"/>
                     </a:ext>
                   </a:extLst>
                 </a:gridCol>
-                <a:gridCol w="1043188">
+                <a:gridCol w="910719">
                   <a:extLst>
                     <a:ext uri="{9D8B030D-6E8A-4147-A177-3AD203B41FA5}">
                       <a16:colId xmlns:a16="http://schemas.microsoft.com/office/drawing/2014/main" val="2615805294"/>
                     </a:ext>
                   </a:extLst>
                 </a:gridCol>
-                <a:gridCol w="1094704">
+                <a:gridCol w="938151">
                   <a:extLst>
                     <a:ext uri="{9D8B030D-6E8A-4147-A177-3AD203B41FA5}">
                       <a16:colId xmlns:a16="http://schemas.microsoft.com/office/drawing/2014/main" val="1500529203"/>
@@ -15267,53 +16442,104 @@
                     <a:lstStyle/>
                     <a:p>
                       <a:r>
-                        <a:rPr lang="en-US" altLang="zh-CN" sz="1200" dirty="0" smtClean="0"/>
-                        <a:t>         rec</a:t>
-                      </a:r>
-                      <a:r>
-                        <a:rPr lang="en-US" altLang="zh-CN" sz="1200" baseline="0" dirty="0" smtClean="0"/>
+                        <a:rPr lang="en-US" altLang="zh-CN" sz="1400" dirty="0" smtClean="0"/>
+                        <a:t>page</a:t>
+                      </a:r>
+                      <a:r>
+                        <a:rPr lang="en-US" altLang="zh-CN" sz="1400" baseline="0" dirty="0" smtClean="0"/>
                         <a:t> size</a:t>
                       </a:r>
-                      <a:endParaRPr lang="en-US" altLang="zh-CN" sz="1200" dirty="0" smtClean="0"/>
-                    </a:p>
-                    <a:p>
-                      <a:r>
-                        <a:rPr lang="en-US" altLang="zh-CN" sz="1200" dirty="0" smtClean="0"/>
-                        <a:t>page size</a:t>
-                      </a:r>
-                      <a:endParaRPr lang="zh-CN" altLang="en-US" sz="1200" dirty="0"/>
+                      <a:endParaRPr lang="zh-CN" altLang="en-US" sz="1400" dirty="0"/>
                     </a:p>
                   </a:txBody>
                   <a:tcPr>
+                    <a:lnL w="12700" cap="flat" cmpd="sng" algn="ctr">
+                      <a:noFill/>
+                      <a:prstDash val="solid"/>
+                      <a:round/>
+                      <a:headEnd type="none" w="med" len="med"/>
+                      <a:tailEnd type="none" w="med" len="med"/>
+                    </a:lnL>
+                    <a:lnR w="12700" cap="flat" cmpd="sng" algn="ctr">
+                      <a:noFill/>
+                      <a:prstDash val="solid"/>
+                      <a:round/>
+                      <a:headEnd type="none" w="med" len="med"/>
+                      <a:tailEnd type="none" w="med" len="med"/>
+                    </a:lnR>
+                    <a:lnT w="12700" cap="flat" cmpd="sng" algn="ctr">
+                      <a:noFill/>
+                      <a:prstDash val="solid"/>
+                      <a:round/>
+                      <a:headEnd type="none" w="med" len="med"/>
+                      <a:tailEnd type="none" w="med" len="med"/>
+                    </a:lnT>
+                    <a:lnB w="12700" cap="flat" cmpd="sng" algn="ctr">
+                      <a:noFill/>
+                      <a:prstDash val="solid"/>
+                      <a:round/>
+                      <a:headEnd type="none" w="med" len="med"/>
+                      <a:tailEnd type="none" w="med" len="med"/>
+                    </a:lnB>
                     <a:lnTlToBr w="12700" cap="flat" cmpd="sng" algn="ctr">
-                      <a:solidFill>
-                        <a:schemeClr val="tx1"/>
-                      </a:solidFill>
+                      <a:noFill/>
                       <a:prstDash val="solid"/>
                       <a:round/>
                       <a:headEnd type="none" w="med" len="med"/>
                       <a:tailEnd type="none" w="med" len="med"/>
                     </a:lnTlToBr>
-                  </a:tcPr>
-                </a:tc>
-                <a:tc>
-                  <a:txBody>
-                    <a:bodyPr/>
-                    <a:lstStyle/>
-                    <a:p>
-                      <a:r>
-                        <a:rPr lang="en-US" altLang="zh-CN" sz="1600" dirty="0" smtClean="0"/>
-                        <a:t>(</a:t>
-                      </a:r>
-                      <a:r>
-                        <a:rPr lang="en-US" altLang="zh-CN" sz="1600" dirty="0" smtClean="0"/>
-                        <a:t>0,4k</a:t>
-                      </a:r>
-                      <a:r>
-                        <a:rPr lang="en-US" altLang="zh-CN" sz="1600" dirty="0" smtClean="0"/>
-                        <a:t>)</a:t>
-                      </a:r>
-                      <a:endParaRPr lang="zh-CN" altLang="en-US" sz="1600" dirty="0"/>
+                    <a:lnBlToTr w="12700" cmpd="sng">
+                      <a:noFill/>
+                      <a:prstDash val="solid"/>
+                    </a:lnBlToTr>
+                  </a:tcPr>
+                </a:tc>
+                <a:tc>
+                  <a:txBody>
+                    <a:bodyPr/>
+                    <a:lstStyle/>
+                    <a:p>
+                      <a:r>
+                        <a:rPr lang="en-US" altLang="zh-CN" sz="1400" dirty="0" smtClean="0"/>
+                        <a:t>group1</a:t>
+                      </a:r>
+                      <a:endParaRPr lang="zh-CN" altLang="en-US" sz="1400" dirty="0"/>
+                    </a:p>
+                  </a:txBody>
+                  <a:tcPr>
+                    <a:lnL w="12700" cap="flat" cmpd="sng" algn="ctr">
+                      <a:noFill/>
+                      <a:prstDash val="solid"/>
+                      <a:round/>
+                      <a:headEnd type="none" w="med" len="med"/>
+                      <a:tailEnd type="none" w="med" len="med"/>
+                    </a:lnL>
+                  </a:tcPr>
+                </a:tc>
+                <a:tc>
+                  <a:txBody>
+                    <a:bodyPr/>
+                    <a:lstStyle/>
+                    <a:p>
+                      <a:r>
+                        <a:rPr lang="en-US" altLang="zh-CN" sz="1400" b="1" kern="1200" dirty="0" smtClean="0">
+                          <a:solidFill>
+                            <a:schemeClr val="lt1"/>
+                          </a:solidFill>
+                          <a:latin typeface="+mn-lt"/>
+                          <a:ea typeface="+mn-ea"/>
+                          <a:cs typeface="+mn-cs"/>
+                        </a:rPr>
+                        <a:t>group2</a:t>
+                      </a:r>
+                      <a:endParaRPr lang="zh-CN" altLang="en-US" sz="1400" b="1" kern="1200" dirty="0">
+                        <a:solidFill>
+                          <a:schemeClr val="lt1"/>
+                        </a:solidFill>
+                        <a:latin typeface="+mn-lt"/>
+                        <a:ea typeface="+mn-ea"/>
+                        <a:cs typeface="+mn-cs"/>
+                      </a:endParaRPr>
                     </a:p>
                   </a:txBody>
                   <a:tcPr/>
@@ -15324,14 +16550,24 @@
                     <a:lstStyle/>
                     <a:p>
                       <a:r>
-                        <a:rPr lang="en-US" altLang="zh-CN" sz="1600" dirty="0" smtClean="0"/>
-                        <a:t>[4k,64k</a:t>
-                      </a:r>
-                      <a:r>
-                        <a:rPr lang="en-US" altLang="zh-CN" sz="1600" dirty="0" smtClean="0"/>
-                        <a:t>)</a:t>
-                      </a:r>
-                      <a:endParaRPr lang="zh-CN" altLang="en-US" sz="1600" dirty="0"/>
+                        <a:rPr lang="en-US" altLang="zh-CN" sz="1400" b="1" kern="1200" dirty="0" smtClean="0">
+                          <a:solidFill>
+                            <a:schemeClr val="lt1"/>
+                          </a:solidFill>
+                          <a:latin typeface="+mn-lt"/>
+                          <a:ea typeface="+mn-ea"/>
+                          <a:cs typeface="+mn-cs"/>
+                        </a:rPr>
+                        <a:t>group3</a:t>
+                      </a:r>
+                      <a:endParaRPr lang="zh-CN" altLang="en-US" sz="1400" b="1" kern="1200" dirty="0">
+                        <a:solidFill>
+                          <a:schemeClr val="lt1"/>
+                        </a:solidFill>
+                        <a:latin typeface="+mn-lt"/>
+                        <a:ea typeface="+mn-ea"/>
+                        <a:cs typeface="+mn-cs"/>
+                      </a:endParaRPr>
                     </a:p>
                   </a:txBody>
                   <a:tcPr/>
@@ -15342,24 +16578,24 @@
                     <a:lstStyle/>
                     <a:p>
                       <a:r>
-                        <a:rPr lang="en-US" altLang="zh-CN" sz="1600" dirty="0" smtClean="0"/>
-                        <a:t>[64k,1M)</a:t>
-                      </a:r>
-                      <a:endParaRPr lang="zh-CN" altLang="en-US" sz="1600" dirty="0"/>
-                    </a:p>
-                  </a:txBody>
-                  <a:tcPr/>
-                </a:tc>
-                <a:tc>
-                  <a:txBody>
-                    <a:bodyPr/>
-                    <a:lstStyle/>
-                    <a:p>
-                      <a:r>
-                        <a:rPr lang="en-US" altLang="zh-CN" sz="1600" dirty="0" smtClean="0"/>
-                        <a:t>[1M,16M]</a:t>
-                      </a:r>
-                      <a:endParaRPr lang="zh-CN" altLang="en-US" sz="1600" dirty="0"/>
+                        <a:rPr lang="en-US" altLang="zh-CN" sz="1400" b="1" kern="1200" dirty="0" smtClean="0">
+                          <a:solidFill>
+                            <a:schemeClr val="lt1"/>
+                          </a:solidFill>
+                          <a:latin typeface="+mn-lt"/>
+                          <a:ea typeface="+mn-ea"/>
+                          <a:cs typeface="+mn-cs"/>
+                        </a:rPr>
+                        <a:t>group4</a:t>
+                      </a:r>
+                      <a:endParaRPr lang="zh-CN" altLang="en-US" sz="1400" b="1" kern="1200" dirty="0">
+                        <a:solidFill>
+                          <a:schemeClr val="lt1"/>
+                        </a:solidFill>
+                        <a:latin typeface="+mn-lt"/>
+                        <a:ea typeface="+mn-ea"/>
+                        <a:cs typeface="+mn-cs"/>
+                      </a:endParaRPr>
                     </a:p>
                   </a:txBody>
                   <a:tcPr/>
@@ -15391,7 +16627,32 @@
                       </a:endParaRPr>
                     </a:p>
                   </a:txBody>
-                  <a:tcPr/>
+                  <a:tcPr>
+                    <a:lnL w="12700" cmpd="sng">
+                      <a:noFill/>
+                    </a:lnL>
+                    <a:lnR w="12700" cmpd="sng">
+                      <a:noFill/>
+                    </a:lnR>
+                    <a:lnT w="12700" cap="flat" cmpd="sng" algn="ctr">
+                      <a:noFill/>
+                      <a:prstDash val="solid"/>
+                      <a:round/>
+                      <a:headEnd type="none" w="med" len="med"/>
+                      <a:tailEnd type="none" w="med" len="med"/>
+                    </a:lnT>
+                    <a:lnB w="12700" cmpd="sng">
+                      <a:noFill/>
+                    </a:lnB>
+                    <a:lnTlToBr w="12700" cmpd="sng">
+                      <a:noFill/>
+                      <a:prstDash val="solid"/>
+                    </a:lnTlToBr>
+                    <a:lnBlToTr w="12700" cmpd="sng">
+                      <a:noFill/>
+                      <a:prstDash val="solid"/>
+                    </a:lnBlToTr>
+                  </a:tcPr>
                 </a:tc>
                 <a:tc>
                   <a:txBody>
@@ -15413,7 +16674,11 @@
                       </a:endParaRPr>
                     </a:p>
                   </a:txBody>
-                  <a:tcPr/>
+                  <a:tcPr>
+                    <a:lnL w="12700" cmpd="sng">
+                      <a:noFill/>
+                    </a:lnL>
+                  </a:tcPr>
                 </a:tc>
                 <a:tc>
                   <a:txBody>
@@ -15508,7 +16773,11 @@
                       </a:endParaRPr>
                     </a:p>
                   </a:txBody>
-                  <a:tcPr/>
+                  <a:tcPr>
+                    <a:lnT w="12700" cmpd="sng">
+                      <a:noFill/>
+                    </a:lnT>
+                  </a:tcPr>
                 </a:tc>
                 <a:tc>
                   <a:txBody>
@@ -15838,7 +17107,7 @@
                   </a:ext>
                 </a:extLst>
               </a:tr>
-              <a:tr h="0">
+              <a:tr h="182880">
                 <a:tc>
                   <a:txBody>
                     <a:bodyPr/>
@@ -15955,20 +17224,26 @@
                   </a:ext>
                 </a:extLst>
               </a:tr>
-              <a:tr h="291592">
-                <a:tc>
-                  <a:txBody>
-                    <a:bodyPr/>
-                    <a:lstStyle/>
-                    <a:p>
-                      <a:r>
-                        <a:rPr lang="en-US" altLang="zh-CN" dirty="0" smtClean="0">
-                          <a:solidFill>
-                            <a:schemeClr val="bg2"/>
-                          </a:solidFill>
-                        </a:rPr>
-                        <a:t>128k</a:t>
-                      </a:r>
+              <a:tr h="182880">
+                <a:tc>
+                  <a:txBody>
+                    <a:bodyPr/>
+                    <a:lstStyle/>
+                    <a:p>
+                      <a:endParaRPr lang="zh-CN" altLang="en-US" dirty="0">
+                        <a:solidFill>
+                          <a:schemeClr val="tx1"/>
+                        </a:solidFill>
+                      </a:endParaRPr>
+                    </a:p>
+                  </a:txBody>
+                  <a:tcPr/>
+                </a:tc>
+                <a:tc>
+                  <a:txBody>
+                    <a:bodyPr/>
+                    <a:lstStyle/>
+                    <a:p>
                       <a:endParaRPr lang="zh-CN" altLang="en-US" dirty="0">
                         <a:solidFill>
                           <a:schemeClr val="bg2"/>
@@ -15983,17 +17258,9 @@
                     <a:bodyPr/>
                     <a:lstStyle/>
                     <a:p>
-                      <a:r>
-                        <a:rPr lang="en-US" altLang="zh-CN" dirty="0" smtClean="0">
-                          <a:solidFill>
-                            <a:schemeClr val="bg2"/>
-                          </a:solidFill>
-                        </a:rPr>
-                        <a:t>128k</a:t>
-                      </a:r>
                       <a:endParaRPr lang="zh-CN" altLang="en-US" dirty="0">
                         <a:solidFill>
-                          <a:schemeClr val="bg2"/>
+                          <a:srgbClr val="FF0000"/>
                         </a:solidFill>
                       </a:endParaRPr>
                     </a:p>
@@ -16005,17 +17272,9 @@
                     <a:bodyPr/>
                     <a:lstStyle/>
                     <a:p>
-                      <a:r>
-                        <a:rPr lang="en-US" altLang="zh-CN" dirty="0" smtClean="0">
-                          <a:solidFill>
-                            <a:schemeClr val="bg2"/>
-                          </a:solidFill>
-                        </a:rPr>
-                        <a:t>512K</a:t>
-                      </a:r>
                       <a:endParaRPr lang="zh-CN" altLang="en-US" dirty="0">
                         <a:solidFill>
-                          <a:schemeClr val="bg2"/>
+                          <a:srgbClr val="FF0000"/>
                         </a:solidFill>
                       </a:endParaRPr>
                     </a:p>
@@ -16027,165 +17286,18 @@
                     <a:bodyPr/>
                     <a:lstStyle/>
                     <a:p>
-                      <a:r>
-                        <a:rPr lang="en-US" altLang="zh-CN" dirty="0" smtClean="0">
-                          <a:solidFill>
-                            <a:schemeClr val="bg2"/>
-                          </a:solidFill>
-                        </a:rPr>
-                        <a:t>2M</a:t>
-                      </a:r>
                       <a:endParaRPr lang="zh-CN" altLang="en-US" dirty="0">
                         <a:solidFill>
-                          <a:schemeClr val="bg2"/>
+                          <a:srgbClr val="FF0000"/>
                         </a:solidFill>
                       </a:endParaRPr>
                     </a:p>
                   </a:txBody>
                   <a:tcPr/>
                 </a:tc>
-                <a:tc>
-                  <a:txBody>
-                    <a:bodyPr/>
-                    <a:lstStyle/>
-                    <a:p>
-                      <a:r>
-                        <a:rPr lang="en-US" altLang="zh-CN" dirty="0" smtClean="0">
-                          <a:solidFill>
-                            <a:schemeClr val="bg2"/>
-                          </a:solidFill>
-                        </a:rPr>
-                        <a:t>16M</a:t>
-                      </a:r>
-                      <a:endParaRPr lang="zh-CN" altLang="en-US" dirty="0">
-                        <a:solidFill>
-                          <a:schemeClr val="bg2"/>
-                        </a:solidFill>
-                      </a:endParaRPr>
-                    </a:p>
-                  </a:txBody>
-                  <a:tcPr/>
-                </a:tc>
                 <a:extLst>
                   <a:ext uri="{0D108BD9-81ED-4DB2-BD59-A6C34878D82A}">
-                    <a16:rowId xmlns:a16="http://schemas.microsoft.com/office/drawing/2014/main" val="127398630"/>
-                  </a:ext>
-                </a:extLst>
-              </a:tr>
-              <a:tr h="217424">
-                <a:tc>
-                  <a:txBody>
-                    <a:bodyPr/>
-                    <a:lstStyle/>
-                    <a:p>
-                      <a:r>
-                        <a:rPr lang="en-US" altLang="zh-CN" dirty="0" smtClean="0">
-                          <a:solidFill>
-                            <a:schemeClr val="bg2"/>
-                          </a:solidFill>
-                        </a:rPr>
-                        <a:t>256k</a:t>
-                      </a:r>
-                      <a:endParaRPr lang="zh-CN" altLang="en-US" dirty="0">
-                        <a:solidFill>
-                          <a:schemeClr val="bg2"/>
-                        </a:solidFill>
-                      </a:endParaRPr>
-                    </a:p>
-                  </a:txBody>
-                  <a:tcPr/>
-                </a:tc>
-                <a:tc>
-                  <a:txBody>
-                    <a:bodyPr/>
-                    <a:lstStyle/>
-                    <a:p>
-                      <a:r>
-                        <a:rPr lang="en-US" altLang="zh-CN" dirty="0" smtClean="0">
-                          <a:solidFill>
-                            <a:schemeClr val="bg2"/>
-                          </a:solidFill>
-                        </a:rPr>
-                        <a:t>256k</a:t>
-                      </a:r>
-                      <a:endParaRPr lang="zh-CN" altLang="en-US" dirty="0">
-                        <a:solidFill>
-                          <a:schemeClr val="bg2"/>
-                        </a:solidFill>
-                      </a:endParaRPr>
-                    </a:p>
-                  </a:txBody>
-                  <a:tcPr/>
-                </a:tc>
-                <a:tc>
-                  <a:txBody>
-                    <a:bodyPr/>
-                    <a:lstStyle/>
-                    <a:p>
-                      <a:r>
-                        <a:rPr lang="en-US" altLang="zh-CN" dirty="0" smtClean="0">
-                          <a:solidFill>
-                            <a:schemeClr val="bg2"/>
-                          </a:solidFill>
-                        </a:rPr>
-                        <a:t>512K</a:t>
-                      </a:r>
-                      <a:endParaRPr lang="zh-CN" altLang="en-US" dirty="0">
-                        <a:solidFill>
-                          <a:schemeClr val="bg2"/>
-                        </a:solidFill>
-                      </a:endParaRPr>
-                    </a:p>
-                  </a:txBody>
-                  <a:tcPr/>
-                </a:tc>
-                <a:tc>
-                  <a:txBody>
-                    <a:bodyPr/>
-                    <a:lstStyle/>
-                    <a:p>
-                      <a:r>
-                        <a:rPr lang="en-US" altLang="zh-CN" dirty="0" smtClean="0">
-                          <a:solidFill>
-                            <a:schemeClr val="bg2"/>
-                          </a:solidFill>
-                        </a:rPr>
-                        <a:t>2M</a:t>
-                      </a:r>
-                      <a:endParaRPr lang="zh-CN" altLang="en-US" dirty="0">
-                        <a:solidFill>
-                          <a:schemeClr val="bg2"/>
-                        </a:solidFill>
-                      </a:endParaRPr>
-                    </a:p>
-                  </a:txBody>
-                  <a:tcPr/>
-                </a:tc>
-                <a:tc>
-                  <a:txBody>
-                    <a:bodyPr/>
-                    <a:lstStyle/>
-                    <a:p>
-                      <a:r>
-                        <a:rPr lang="en-US" altLang="zh-CN" dirty="0" smtClean="0">
-                          <a:solidFill>
-                            <a:schemeClr val="bg2"/>
-                          </a:solidFill>
-                        </a:rPr>
-                        <a:t>16M</a:t>
-                      </a:r>
-                      <a:endParaRPr lang="zh-CN" altLang="en-US" dirty="0">
-                        <a:solidFill>
-                          <a:schemeClr val="bg2"/>
-                        </a:solidFill>
-                      </a:endParaRPr>
-                    </a:p>
-                  </a:txBody>
-                  <a:tcPr/>
-                </a:tc>
-                <a:extLst>
-                  <a:ext uri="{0D108BD9-81ED-4DB2-BD59-A6C34878D82A}">
-                    <a16:rowId xmlns:a16="http://schemas.microsoft.com/office/drawing/2014/main" val="3332647440"/>
+                    <a16:rowId xmlns:a16="http://schemas.microsoft.com/office/drawing/2014/main" val="215133827"/>
                   </a:ext>
                 </a:extLst>
               </a:tr>
@@ -16193,56 +17305,6 @@
           </a:graphicData>
         </a:graphic>
       </p:graphicFrame>
-      <p:sp>
-        <p:nvSpPr>
-          <p:cNvPr id="7" name="文本框 6"/>
-          <p:cNvSpPr txBox="1"/>
-          <p:nvPr/>
-        </p:nvSpPr>
-        <p:spPr>
-          <a:xfrm>
-            <a:off x="7422920" y="2150772"/>
-            <a:ext cx="4150495" cy="369332"/>
-          </a:xfrm>
-          <a:prstGeom prst="rect">
-            <a:avLst/>
-          </a:prstGeom>
-          <a:noFill/>
-        </p:spPr>
-        <p:txBody>
-          <a:bodyPr wrap="none" rtlCol="0">
-            <a:spAutoFit/>
-          </a:bodyPr>
-          <a:lstStyle/>
-          <a:p>
-            <a:r>
-              <a:rPr lang="zh-CN" altLang="en-US" dirty="0"/>
-              <a:t>以</a:t>
-            </a:r>
-            <a:r>
-              <a:rPr lang="zh-CN" altLang="en-US" dirty="0" smtClean="0"/>
-              <a:t>一个</a:t>
-            </a:r>
-            <a:r>
-              <a:rPr lang="en-US" altLang="zh-CN" dirty="0" smtClean="0"/>
-              <a:t>extent</a:t>
-            </a:r>
-            <a:r>
-              <a:rPr lang="zh-CN" altLang="en-US" dirty="0" smtClean="0"/>
-              <a:t>可以放</a:t>
-            </a:r>
-            <a:r>
-              <a:rPr lang="en-US" altLang="zh-CN" dirty="0" smtClean="0"/>
-              <a:t>4</a:t>
-            </a:r>
-            <a:r>
-              <a:rPr lang="zh-CN" altLang="en-US" dirty="0" smtClean="0"/>
-              <a:t>条最大记录为原则</a:t>
-            </a:r>
-            <a:endParaRPr lang="zh-CN" altLang="en-US" dirty="0"/>
-          </a:p>
-        </p:txBody>
-      </p:sp>
     </p:spTree>
     <p:extLst>
       <p:ext uri="{BB962C8B-B14F-4D97-AF65-F5344CB8AC3E}">
@@ -16263,7 +17325,7 @@
 </p:sld>
 </file>
 
-<file path=ppt/slides/slide14.xml><?xml version="1.0" encoding="utf-8"?>
+<file path=ppt/slides/slide15.xml><?xml version="1.0" encoding="utf-8"?>
 <p:sld xmlns:a="http://schemas.openxmlformats.org/drawingml/2006/main" xmlns:r="http://schemas.openxmlformats.org/officeDocument/2006/relationships" xmlns:p="http://schemas.openxmlformats.org/presentationml/2006/main">
   <p:cSld>
     <p:spTree>
@@ -16834,13 +17896,13 @@
           <p:nvPr>
             <p:extLst>
               <p:ext uri="{D42A27DB-BD31-4B8C-83A1-F6EECF244321}">
-                <p14:modId xmlns:p14="http://schemas.microsoft.com/office/powerpoint/2010/main" val="2091332720"/>
+                <p14:modId xmlns:p14="http://schemas.microsoft.com/office/powerpoint/2010/main" val="3925682730"/>
               </p:ext>
             </p:extLst>
           </p:nvPr>
         </p:nvGraphicFramePr>
         <p:xfrm>
-          <a:off x="977900" y="3500523"/>
+          <a:off x="977900" y="2993894"/>
           <a:ext cx="4229104" cy="370840"/>
         </p:xfrm>
         <a:graphic>
@@ -17207,13 +18269,13 @@
           <p:nvPr>
             <p:extLst>
               <p:ext uri="{D42A27DB-BD31-4B8C-83A1-F6EECF244321}">
-                <p14:modId xmlns:p14="http://schemas.microsoft.com/office/powerpoint/2010/main" val="2341277533"/>
+                <p14:modId xmlns:p14="http://schemas.microsoft.com/office/powerpoint/2010/main" val="2499839412"/>
               </p:ext>
             </p:extLst>
           </p:nvPr>
         </p:nvGraphicFramePr>
         <p:xfrm>
-          <a:off x="977900" y="4137747"/>
+          <a:off x="977900" y="3631118"/>
           <a:ext cx="4229104" cy="370840"/>
         </p:xfrm>
         <a:graphic>
@@ -17580,13 +18642,13 @@
           <p:nvPr>
             <p:extLst>
               <p:ext uri="{D42A27DB-BD31-4B8C-83A1-F6EECF244321}">
-                <p14:modId xmlns:p14="http://schemas.microsoft.com/office/powerpoint/2010/main" val="1106330960"/>
+                <p14:modId xmlns:p14="http://schemas.microsoft.com/office/powerpoint/2010/main" val="1693560409"/>
               </p:ext>
             </p:extLst>
           </p:nvPr>
         </p:nvGraphicFramePr>
         <p:xfrm>
-          <a:off x="977900" y="4694799"/>
+          <a:off x="977900" y="4188170"/>
           <a:ext cx="4229104" cy="370840"/>
         </p:xfrm>
         <a:graphic>
@@ -17953,13 +19015,13 @@
           <p:nvPr>
             <p:extLst>
               <p:ext uri="{D42A27DB-BD31-4B8C-83A1-F6EECF244321}">
-                <p14:modId xmlns:p14="http://schemas.microsoft.com/office/powerpoint/2010/main" val="3885047326"/>
+                <p14:modId xmlns:p14="http://schemas.microsoft.com/office/powerpoint/2010/main" val="4097575589"/>
               </p:ext>
             </p:extLst>
           </p:nvPr>
         </p:nvGraphicFramePr>
         <p:xfrm>
-          <a:off x="977900" y="5227563"/>
+          <a:off x="977900" y="4720934"/>
           <a:ext cx="4229104" cy="370840"/>
         </p:xfrm>
         <a:graphic>
@@ -18325,8 +19387,8 @@
         </p:nvSpPr>
         <p:spPr>
           <a:xfrm>
-            <a:off x="1308100" y="1429110"/>
-            <a:ext cx="5367175" cy="1477328"/>
+            <a:off x="977900" y="1487050"/>
+            <a:ext cx="6336991" cy="1477328"/>
           </a:xfrm>
           <a:prstGeom prst="rect">
             <a:avLst/>
@@ -18365,7 +19427,23 @@
             </a:r>
             <a:r>
               <a:rPr lang="zh-CN" altLang="en-US" dirty="0" smtClean="0"/>
-              <a:t>个等级：</a:t>
+              <a:t>个等级</a:t>
+            </a:r>
+            <a:r>
+              <a:rPr lang="en-US" altLang="zh-CN" dirty="0" smtClean="0"/>
+              <a:t>(</a:t>
+            </a:r>
+            <a:r>
+              <a:rPr lang="en-US" altLang="zh-CN" dirty="0" err="1" smtClean="0"/>
+              <a:t>freeLevel</a:t>
+            </a:r>
+            <a:r>
+              <a:rPr lang="en-US" altLang="zh-CN" dirty="0" smtClean="0"/>
+              <a:t>)</a:t>
+            </a:r>
+            <a:r>
+              <a:rPr lang="zh-CN" altLang="en-US" dirty="0" smtClean="0"/>
+              <a:t>：</a:t>
             </a:r>
             <a:endParaRPr lang="en-US" altLang="zh-CN" dirty="0" smtClean="0"/>
           </a:p>
@@ -18421,7 +19499,7 @@
         </p:nvSpPr>
         <p:spPr>
           <a:xfrm>
-            <a:off x="571500" y="3499887"/>
+            <a:off x="571500" y="2993258"/>
             <a:ext cx="242994" cy="369968"/>
           </a:xfrm>
           <a:prstGeom prst="rect">
@@ -18450,7 +19528,7 @@
         </p:nvSpPr>
         <p:spPr>
           <a:xfrm>
-            <a:off x="571500" y="4138619"/>
+            <a:off x="571500" y="3631990"/>
             <a:ext cx="242994" cy="369968"/>
           </a:xfrm>
           <a:prstGeom prst="rect">
@@ -18479,7 +19557,7 @@
         </p:nvSpPr>
         <p:spPr>
           <a:xfrm>
-            <a:off x="571500" y="4695671"/>
+            <a:off x="571500" y="4189042"/>
             <a:ext cx="242994" cy="369968"/>
           </a:xfrm>
           <a:prstGeom prst="rect">
@@ -18508,7 +19586,7 @@
         </p:nvSpPr>
         <p:spPr>
           <a:xfrm>
-            <a:off x="571500" y="5252723"/>
+            <a:off x="571500" y="4746094"/>
             <a:ext cx="242994" cy="369968"/>
           </a:xfrm>
           <a:prstGeom prst="rect">
@@ -18537,7 +19615,7 @@
         </p:nvSpPr>
         <p:spPr>
           <a:xfrm>
-            <a:off x="1308100" y="5622691"/>
+            <a:off x="977900" y="5380672"/>
             <a:ext cx="8081058" cy="1477328"/>
           </a:xfrm>
           <a:prstGeom prst="rect">
@@ -18557,7 +19635,15 @@
             </a:r>
             <a:r>
               <a:rPr lang="en-US" altLang="zh-CN" dirty="0" smtClean="0"/>
-              <a:t>: 1000(level1)</a:t>
+              <a:t>: </a:t>
+            </a:r>
+            <a:r>
+              <a:rPr lang="en-US" altLang="zh-CN" dirty="0"/>
+              <a:t>9</a:t>
+            </a:r>
+            <a:r>
+              <a:rPr lang="en-US" altLang="zh-CN" dirty="0" smtClean="0"/>
+              <a:t>00(level1)</a:t>
             </a:r>
           </a:p>
           <a:p>
@@ -18686,7 +19772,7 @@
         </p:nvSpPr>
         <p:spPr>
           <a:xfrm>
-            <a:off x="2883201" y="3213100"/>
+            <a:off x="2883201" y="2706471"/>
             <a:ext cx="139399" cy="924647"/>
           </a:xfrm>
           <a:prstGeom prst="downArrow">
@@ -18732,7 +19818,7 @@
         </p:nvSpPr>
         <p:spPr>
           <a:xfrm>
-            <a:off x="2952900" y="3038085"/>
+            <a:off x="2952900" y="2531456"/>
             <a:ext cx="1250663" cy="369332"/>
           </a:xfrm>
           <a:prstGeom prst="rect">
@@ -18782,7 +19868,7 @@
 </p:sld>
 </file>
 
-<file path=ppt/slides/slide15.xml><?xml version="1.0" encoding="utf-8"?>
+<file path=ppt/slides/slide16.xml><?xml version="1.0" encoding="utf-8"?>
 <p:sld xmlns:a="http://schemas.openxmlformats.org/drawingml/2006/main" xmlns:r="http://schemas.openxmlformats.org/officeDocument/2006/relationships" xmlns:p="http://schemas.openxmlformats.org/presentationml/2006/main">
   <p:cSld>
     <p:spTree>
@@ -20694,7 +21780,7 @@
           <p:nvPr>
             <p:extLst>
               <p:ext uri="{D42A27DB-BD31-4B8C-83A1-F6EECF244321}">
-                <p14:modId xmlns:p14="http://schemas.microsoft.com/office/powerpoint/2010/main" val="1311138687"/>
+                <p14:modId xmlns:p14="http://schemas.microsoft.com/office/powerpoint/2010/main" val="102497193"/>
               </p:ext>
             </p:extLst>
           </p:nvPr>
@@ -21505,7 +22591,7 @@
                     <a:p>
                       <a:r>
                         <a:rPr lang="en-US" altLang="zh-CN" sz="1600" dirty="0" err="1" smtClean="0"/>
-                        <a:t>recordLevel</a:t>
+                        <a:t>extentLevel</a:t>
                       </a:r>
                       <a:endParaRPr lang="zh-CN" altLang="en-US" sz="1600" dirty="0"/>
                     </a:p>
@@ -22627,7 +23713,7 @@
 </p:sld>
 </file>
 
-<file path=ppt/slides/slide16.xml><?xml version="1.0" encoding="utf-8"?>
+<file path=ppt/slides/slide17.xml><?xml version="1.0" encoding="utf-8"?>
 <p:sld xmlns:a="http://schemas.openxmlformats.org/drawingml/2006/main" xmlns:r="http://schemas.openxmlformats.org/officeDocument/2006/relationships" xmlns:p="http://schemas.openxmlformats.org/presentationml/2006/main">
   <p:cSld>
     <p:spTree>
@@ -23167,11 +24253,7 @@
             </a:r>
             <a:r>
               <a:rPr lang="zh-CN" altLang="en-US" dirty="0" smtClean="0"/>
-              <a:t>可以放</a:t>
-            </a:r>
-            <a:r>
-              <a:rPr lang="zh-CN" altLang="en-US" dirty="0" smtClean="0"/>
-              <a:t>不同</a:t>
+              <a:t>可以放不同</a:t>
             </a:r>
             <a:r>
               <a:rPr lang="en-US" altLang="zh-CN" dirty="0" smtClean="0"/>
@@ -24618,8 +25700,8 @@
         </p:nvSpPr>
         <p:spPr>
           <a:xfrm>
-            <a:off x="648389" y="6165068"/>
-            <a:ext cx="4859022" cy="369332"/>
+            <a:off x="1211042" y="6166842"/>
+            <a:ext cx="3733714" cy="369332"/>
           </a:xfrm>
           <a:prstGeom prst="rect">
             <a:avLst/>
@@ -24642,7 +25724,7 @@
             </a:r>
             <a:r>
               <a:rPr lang="en-US" altLang="zh-CN" dirty="0" smtClean="0"/>
-              <a:t>[4k, 8k, 16k, 32k, 64k, 128k, 256k]</a:t>
+              <a:t>[4k, 8k, 16k, 32k, 64k]</a:t>
             </a:r>
             <a:endParaRPr lang="zh-CN" altLang="en-US" dirty="0"/>
           </a:p>
@@ -34439,7 +35521,7 @@
           <a:p>
             <a:r>
               <a:rPr lang="en-US" altLang="zh-CN" dirty="0" smtClean="0"/>
-              <a:t>CS Metadata</a:t>
+              <a:t>MME-Metadata Management Extent</a:t>
             </a:r>
             <a:endParaRPr lang="zh-CN" altLang="en-US" dirty="0"/>
           </a:p>
@@ -35373,7 +36455,11 @@
             <a:graphicFrameLocks noGrp="1"/>
           </p:cNvGraphicFramePr>
           <p:nvPr>
-            <p:extLst/>
+            <p:extLst>
+              <p:ext uri="{D42A27DB-BD31-4B8C-83A1-F6EECF244321}">
+                <p14:modId xmlns:p14="http://schemas.microsoft.com/office/powerpoint/2010/main" val="2117381527"/>
+              </p:ext>
+            </p:extLst>
           </p:nvPr>
         </p:nvGraphicFramePr>
         <p:xfrm>
@@ -39040,43 +40126,19 @@
                       </a:pPr>
                       <a:r>
                         <a:rPr lang="zh-CN" altLang="en-US" sz="1400" baseline="0" dirty="0" smtClean="0"/>
-                        <a:t>根据记录大小分为</a:t>
+                        <a:t>根据</a:t>
                       </a:r>
                       <a:r>
                         <a:rPr lang="en-US" altLang="zh-CN" sz="1400" baseline="0" dirty="0" smtClean="0"/>
-                        <a:t>4</a:t>
+                        <a:t>extent</a:t>
                       </a:r>
                       <a:r>
                         <a:rPr lang="zh-CN" altLang="en-US" sz="1400" baseline="0" dirty="0" smtClean="0"/>
-                        <a:t>个等级：</a:t>
+                        <a:t>大小分组</a:t>
                       </a:r>
                       <a:r>
                         <a:rPr lang="en-US" altLang="zh-CN" sz="1400" baseline="0" dirty="0" smtClean="0"/>
-                        <a:t>(0, 4k)</a:t>
-                      </a:r>
-                      <a:r>
-                        <a:rPr lang="zh-CN" altLang="en-US" sz="1400" baseline="0" dirty="0" smtClean="0"/>
-                        <a:t>、</a:t>
-                      </a:r>
-                      <a:r>
-                        <a:rPr lang="en-US" altLang="zh-CN" sz="1400" baseline="0" dirty="0" smtClean="0"/>
-                        <a:t>[4k, 64k)</a:t>
-                      </a:r>
-                      <a:r>
-                        <a:rPr lang="zh-CN" altLang="en-US" sz="1400" baseline="0" dirty="0" smtClean="0"/>
-                        <a:t>、</a:t>
-                      </a:r>
-                      <a:r>
-                        <a:rPr lang="en-US" altLang="zh-CN" sz="1400" baseline="0" dirty="0" smtClean="0"/>
-                        <a:t>[64k, 1M)</a:t>
-                      </a:r>
-                      <a:r>
-                        <a:rPr lang="zh-CN" altLang="en-US" sz="1400" baseline="0" dirty="0" smtClean="0"/>
-                        <a:t>、</a:t>
-                      </a:r>
-                      <a:r>
-                        <a:rPr lang="en-US" altLang="zh-CN" sz="1400" baseline="0" dirty="0" smtClean="0"/>
-                        <a:t>[1M, 16M )</a:t>
+                        <a:t>[0-pageSize], []</a:t>
                       </a:r>
                       <a:endParaRPr lang="zh-CN" altLang="en-US" sz="1400" dirty="0" smtClean="0"/>
                     </a:p>
